--- a/togikaidrive-overview/togikaidrive_overview.pptx
+++ b/togikaidrive-overview/togikaidrive_overview.pptx
@@ -16,9 +16,15 @@
     <p:sldId id="264" r:id="rId10"/>
     <p:sldId id="265" r:id="rId11"/>
     <p:sldId id="266" r:id="rId12"/>
+    <p:sldId id="267" r:id="rId13"/>
+    <p:sldId id="268" r:id="rId14"/>
+    <p:sldId id="269" r:id="rId15"/>
+    <p:sldId id="270" r:id="rId16"/>
+    <p:sldId id="271" r:id="rId17"/>
+    <p:sldId id="272" r:id="rId18"/>
   </p:sldIdLst>
   <p:notesMasterIdLst>
-    <p:notesMasterId r:id="rId13"/>
+    <p:notesMasterId r:id="rId19"/>
   </p:notesMasterIdLst>
   <p:sldSz cx="12191695" cy="6858000"/>
   <p:notesSz cx="6858000" cy="12191695"/>
@@ -712,6 +718,534 @@
             <a:fld id="{F7021451-1387-4CA6-816F-3879F97B5CBC}" type="slidenum">
               <a:rPr lang="en-US"/>
               <a:t>11</a:t>
+            </a:fld>
+            <a:endParaRPr lang="en-US"/>
+          </a:p>
+        </p:txBody>
+      </p:sp>
+    </p:spTree>
+    <p:extLst>
+      <p:ext uri="{BB962C8B-B14F-4D97-AF65-F5344CB8AC3E}">
+        <p14:creationId xmlns:p14="http://schemas.microsoft.com/office/powerpoint/2010/main" val="1024086991"/>
+      </p:ext>
+    </p:extLst>
+  </p:cSld>
+  <p:clrMapOvr>
+    <a:masterClrMapping/>
+  </p:clrMapOvr>
+</p:notes>
+</file>
+
+<file path=ppt/notesSlides/notesSlide12.xml><?xml version="1.0" encoding="utf-8"?>
+<p:notes xmlns:a="http://schemas.openxmlformats.org/drawingml/2006/main" xmlns:r="http://schemas.openxmlformats.org/officeDocument/2006/relationships" xmlns:p="http://schemas.openxmlformats.org/presentationml/2006/main">
+  <p:cSld>
+    <p:spTree>
+      <p:nvGrpSpPr>
+        <p:cNvPr id="1" name=""/>
+        <p:cNvGrpSpPr/>
+        <p:nvPr/>
+      </p:nvGrpSpPr>
+      <p:grpSpPr>
+        <a:xfrm>
+          <a:off x="0" y="0"/>
+          <a:ext cx="0" cy="0"/>
+          <a:chOff x="0" y="0"/>
+          <a:chExt cx="0" cy="0"/>
+        </a:xfrm>
+      </p:grpSpPr>
+      <p:sp>
+        <p:nvSpPr>
+          <p:cNvPr id="2" name="Slide Image Placeholder 1"/>
+          <p:cNvSpPr>
+            <a:spLocks noGrp="1" noRot="1" noChangeAspect="1"/>
+          </p:cNvSpPr>
+          <p:nvPr>
+            <p:ph type="sldImg"/>
+          </p:nvPr>
+        </p:nvSpPr>
+        <p:spPr/>
+      </p:sp>
+      <p:sp>
+        <p:nvSpPr>
+          <p:cNvPr id="3" name="Notes Placeholder 2"/>
+          <p:cNvSpPr>
+            <a:spLocks noGrp="1"/>
+          </p:cNvSpPr>
+          <p:nvPr>
+            <p:ph type="body" idx="1"/>
+          </p:nvPr>
+        </p:nvSpPr>
+        <p:spPr/>
+        <p:txBody>
+          <a:bodyPr/>
+          <a:lstStyle/>
+          <a:p>
+            <a:r>
+              <a:rPr lang="en-US" dirty="0"/>
+              <a:t/>
+            </a:r>
+            <a:endParaRPr lang="en-US" dirty="0"/>
+          </a:p>
+        </p:txBody>
+      </p:sp>
+      <p:sp>
+        <p:nvSpPr>
+          <p:cNvPr id="4" name="Slide Number Placeholder 3"/>
+          <p:cNvSpPr>
+            <a:spLocks noGrp="1"/>
+          </p:cNvSpPr>
+          <p:nvPr>
+            <p:ph type="sldNum" sz="quarter" idx="10"/>
+          </p:nvPr>
+        </p:nvSpPr>
+        <p:spPr/>
+        <p:txBody>
+          <a:bodyPr/>
+          <a:lstStyle/>
+          <a:p>
+            <a:fld id="{F7021451-1387-4CA6-816F-3879F97B5CBC}" type="slidenum">
+              <a:rPr lang="en-US"/>
+              <a:t>12</a:t>
+            </a:fld>
+            <a:endParaRPr lang="en-US"/>
+          </a:p>
+        </p:txBody>
+      </p:sp>
+    </p:spTree>
+    <p:extLst>
+      <p:ext uri="{BB962C8B-B14F-4D97-AF65-F5344CB8AC3E}">
+        <p14:creationId xmlns:p14="http://schemas.microsoft.com/office/powerpoint/2010/main" val="1024086991"/>
+      </p:ext>
+    </p:extLst>
+  </p:cSld>
+  <p:clrMapOvr>
+    <a:masterClrMapping/>
+  </p:clrMapOvr>
+</p:notes>
+</file>
+
+<file path=ppt/notesSlides/notesSlide13.xml><?xml version="1.0" encoding="utf-8"?>
+<p:notes xmlns:a="http://schemas.openxmlformats.org/drawingml/2006/main" xmlns:r="http://schemas.openxmlformats.org/officeDocument/2006/relationships" xmlns:p="http://schemas.openxmlformats.org/presentationml/2006/main">
+  <p:cSld>
+    <p:spTree>
+      <p:nvGrpSpPr>
+        <p:cNvPr id="1" name=""/>
+        <p:cNvGrpSpPr/>
+        <p:nvPr/>
+      </p:nvGrpSpPr>
+      <p:grpSpPr>
+        <a:xfrm>
+          <a:off x="0" y="0"/>
+          <a:ext cx="0" cy="0"/>
+          <a:chOff x="0" y="0"/>
+          <a:chExt cx="0" cy="0"/>
+        </a:xfrm>
+      </p:grpSpPr>
+      <p:sp>
+        <p:nvSpPr>
+          <p:cNvPr id="2" name="Slide Image Placeholder 1"/>
+          <p:cNvSpPr>
+            <a:spLocks noGrp="1" noRot="1" noChangeAspect="1"/>
+          </p:cNvSpPr>
+          <p:nvPr>
+            <p:ph type="sldImg"/>
+          </p:nvPr>
+        </p:nvSpPr>
+        <p:spPr/>
+      </p:sp>
+      <p:sp>
+        <p:nvSpPr>
+          <p:cNvPr id="3" name="Notes Placeholder 2"/>
+          <p:cNvSpPr>
+            <a:spLocks noGrp="1"/>
+          </p:cNvSpPr>
+          <p:nvPr>
+            <p:ph type="body" idx="1"/>
+          </p:nvPr>
+        </p:nvSpPr>
+        <p:spPr/>
+        <p:txBody>
+          <a:bodyPr/>
+          <a:lstStyle/>
+          <a:p>
+            <a:r>
+              <a:rPr lang="en-US" dirty="0"/>
+              <a:t/>
+            </a:r>
+            <a:endParaRPr lang="en-US" dirty="0"/>
+          </a:p>
+        </p:txBody>
+      </p:sp>
+      <p:sp>
+        <p:nvSpPr>
+          <p:cNvPr id="4" name="Slide Number Placeholder 3"/>
+          <p:cNvSpPr>
+            <a:spLocks noGrp="1"/>
+          </p:cNvSpPr>
+          <p:nvPr>
+            <p:ph type="sldNum" sz="quarter" idx="10"/>
+          </p:nvPr>
+        </p:nvSpPr>
+        <p:spPr/>
+        <p:txBody>
+          <a:bodyPr/>
+          <a:lstStyle/>
+          <a:p>
+            <a:fld id="{F7021451-1387-4CA6-816F-3879F97B5CBC}" type="slidenum">
+              <a:rPr lang="en-US"/>
+              <a:t>13</a:t>
+            </a:fld>
+            <a:endParaRPr lang="en-US"/>
+          </a:p>
+        </p:txBody>
+      </p:sp>
+    </p:spTree>
+    <p:extLst>
+      <p:ext uri="{BB962C8B-B14F-4D97-AF65-F5344CB8AC3E}">
+        <p14:creationId xmlns:p14="http://schemas.microsoft.com/office/powerpoint/2010/main" val="1024086991"/>
+      </p:ext>
+    </p:extLst>
+  </p:cSld>
+  <p:clrMapOvr>
+    <a:masterClrMapping/>
+  </p:clrMapOvr>
+</p:notes>
+</file>
+
+<file path=ppt/notesSlides/notesSlide14.xml><?xml version="1.0" encoding="utf-8"?>
+<p:notes xmlns:a="http://schemas.openxmlformats.org/drawingml/2006/main" xmlns:r="http://schemas.openxmlformats.org/officeDocument/2006/relationships" xmlns:p="http://schemas.openxmlformats.org/presentationml/2006/main">
+  <p:cSld>
+    <p:spTree>
+      <p:nvGrpSpPr>
+        <p:cNvPr id="1" name=""/>
+        <p:cNvGrpSpPr/>
+        <p:nvPr/>
+      </p:nvGrpSpPr>
+      <p:grpSpPr>
+        <a:xfrm>
+          <a:off x="0" y="0"/>
+          <a:ext cx="0" cy="0"/>
+          <a:chOff x="0" y="0"/>
+          <a:chExt cx="0" cy="0"/>
+        </a:xfrm>
+      </p:grpSpPr>
+      <p:sp>
+        <p:nvSpPr>
+          <p:cNvPr id="2" name="Slide Image Placeholder 1"/>
+          <p:cNvSpPr>
+            <a:spLocks noGrp="1" noRot="1" noChangeAspect="1"/>
+          </p:cNvSpPr>
+          <p:nvPr>
+            <p:ph type="sldImg"/>
+          </p:nvPr>
+        </p:nvSpPr>
+        <p:spPr/>
+      </p:sp>
+      <p:sp>
+        <p:nvSpPr>
+          <p:cNvPr id="3" name="Notes Placeholder 2"/>
+          <p:cNvSpPr>
+            <a:spLocks noGrp="1"/>
+          </p:cNvSpPr>
+          <p:nvPr>
+            <p:ph type="body" idx="1"/>
+          </p:nvPr>
+        </p:nvSpPr>
+        <p:spPr/>
+        <p:txBody>
+          <a:bodyPr/>
+          <a:lstStyle/>
+          <a:p>
+            <a:r>
+              <a:rPr lang="en-US" dirty="0"/>
+              <a:t/>
+            </a:r>
+            <a:endParaRPr lang="en-US" dirty="0"/>
+          </a:p>
+        </p:txBody>
+      </p:sp>
+      <p:sp>
+        <p:nvSpPr>
+          <p:cNvPr id="4" name="Slide Number Placeholder 3"/>
+          <p:cNvSpPr>
+            <a:spLocks noGrp="1"/>
+          </p:cNvSpPr>
+          <p:nvPr>
+            <p:ph type="sldNum" sz="quarter" idx="10"/>
+          </p:nvPr>
+        </p:nvSpPr>
+        <p:spPr/>
+        <p:txBody>
+          <a:bodyPr/>
+          <a:lstStyle/>
+          <a:p>
+            <a:fld id="{F7021451-1387-4CA6-816F-3879F97B5CBC}" type="slidenum">
+              <a:rPr lang="en-US"/>
+              <a:t>14</a:t>
+            </a:fld>
+            <a:endParaRPr lang="en-US"/>
+          </a:p>
+        </p:txBody>
+      </p:sp>
+    </p:spTree>
+    <p:extLst>
+      <p:ext uri="{BB962C8B-B14F-4D97-AF65-F5344CB8AC3E}">
+        <p14:creationId xmlns:p14="http://schemas.microsoft.com/office/powerpoint/2010/main" val="1024086991"/>
+      </p:ext>
+    </p:extLst>
+  </p:cSld>
+  <p:clrMapOvr>
+    <a:masterClrMapping/>
+  </p:clrMapOvr>
+</p:notes>
+</file>
+
+<file path=ppt/notesSlides/notesSlide15.xml><?xml version="1.0" encoding="utf-8"?>
+<p:notes xmlns:a="http://schemas.openxmlformats.org/drawingml/2006/main" xmlns:r="http://schemas.openxmlformats.org/officeDocument/2006/relationships" xmlns:p="http://schemas.openxmlformats.org/presentationml/2006/main">
+  <p:cSld>
+    <p:spTree>
+      <p:nvGrpSpPr>
+        <p:cNvPr id="1" name=""/>
+        <p:cNvGrpSpPr/>
+        <p:nvPr/>
+      </p:nvGrpSpPr>
+      <p:grpSpPr>
+        <a:xfrm>
+          <a:off x="0" y="0"/>
+          <a:ext cx="0" cy="0"/>
+          <a:chOff x="0" y="0"/>
+          <a:chExt cx="0" cy="0"/>
+        </a:xfrm>
+      </p:grpSpPr>
+      <p:sp>
+        <p:nvSpPr>
+          <p:cNvPr id="2" name="Slide Image Placeholder 1"/>
+          <p:cNvSpPr>
+            <a:spLocks noGrp="1" noRot="1" noChangeAspect="1"/>
+          </p:cNvSpPr>
+          <p:nvPr>
+            <p:ph type="sldImg"/>
+          </p:nvPr>
+        </p:nvSpPr>
+        <p:spPr/>
+      </p:sp>
+      <p:sp>
+        <p:nvSpPr>
+          <p:cNvPr id="3" name="Notes Placeholder 2"/>
+          <p:cNvSpPr>
+            <a:spLocks noGrp="1"/>
+          </p:cNvSpPr>
+          <p:nvPr>
+            <p:ph type="body" idx="1"/>
+          </p:nvPr>
+        </p:nvSpPr>
+        <p:spPr/>
+        <p:txBody>
+          <a:bodyPr/>
+          <a:lstStyle/>
+          <a:p>
+            <a:r>
+              <a:rPr lang="en-US" dirty="0"/>
+              <a:t/>
+            </a:r>
+            <a:endParaRPr lang="en-US" dirty="0"/>
+          </a:p>
+        </p:txBody>
+      </p:sp>
+      <p:sp>
+        <p:nvSpPr>
+          <p:cNvPr id="4" name="Slide Number Placeholder 3"/>
+          <p:cNvSpPr>
+            <a:spLocks noGrp="1"/>
+          </p:cNvSpPr>
+          <p:nvPr>
+            <p:ph type="sldNum" sz="quarter" idx="10"/>
+          </p:nvPr>
+        </p:nvSpPr>
+        <p:spPr/>
+        <p:txBody>
+          <a:bodyPr/>
+          <a:lstStyle/>
+          <a:p>
+            <a:fld id="{F7021451-1387-4CA6-816F-3879F97B5CBC}" type="slidenum">
+              <a:rPr lang="en-US"/>
+              <a:t>15</a:t>
+            </a:fld>
+            <a:endParaRPr lang="en-US"/>
+          </a:p>
+        </p:txBody>
+      </p:sp>
+    </p:spTree>
+    <p:extLst>
+      <p:ext uri="{BB962C8B-B14F-4D97-AF65-F5344CB8AC3E}">
+        <p14:creationId xmlns:p14="http://schemas.microsoft.com/office/powerpoint/2010/main" val="1024086991"/>
+      </p:ext>
+    </p:extLst>
+  </p:cSld>
+  <p:clrMapOvr>
+    <a:masterClrMapping/>
+  </p:clrMapOvr>
+</p:notes>
+</file>
+
+<file path=ppt/notesSlides/notesSlide16.xml><?xml version="1.0" encoding="utf-8"?>
+<p:notes xmlns:a="http://schemas.openxmlformats.org/drawingml/2006/main" xmlns:r="http://schemas.openxmlformats.org/officeDocument/2006/relationships" xmlns:p="http://schemas.openxmlformats.org/presentationml/2006/main">
+  <p:cSld>
+    <p:spTree>
+      <p:nvGrpSpPr>
+        <p:cNvPr id="1" name=""/>
+        <p:cNvGrpSpPr/>
+        <p:nvPr/>
+      </p:nvGrpSpPr>
+      <p:grpSpPr>
+        <a:xfrm>
+          <a:off x="0" y="0"/>
+          <a:ext cx="0" cy="0"/>
+          <a:chOff x="0" y="0"/>
+          <a:chExt cx="0" cy="0"/>
+        </a:xfrm>
+      </p:grpSpPr>
+      <p:sp>
+        <p:nvSpPr>
+          <p:cNvPr id="2" name="Slide Image Placeholder 1"/>
+          <p:cNvSpPr>
+            <a:spLocks noGrp="1" noRot="1" noChangeAspect="1"/>
+          </p:cNvSpPr>
+          <p:nvPr>
+            <p:ph type="sldImg"/>
+          </p:nvPr>
+        </p:nvSpPr>
+        <p:spPr/>
+      </p:sp>
+      <p:sp>
+        <p:nvSpPr>
+          <p:cNvPr id="3" name="Notes Placeholder 2"/>
+          <p:cNvSpPr>
+            <a:spLocks noGrp="1"/>
+          </p:cNvSpPr>
+          <p:nvPr>
+            <p:ph type="body" idx="1"/>
+          </p:nvPr>
+        </p:nvSpPr>
+        <p:spPr/>
+        <p:txBody>
+          <a:bodyPr/>
+          <a:lstStyle/>
+          <a:p>
+            <a:r>
+              <a:rPr lang="en-US" dirty="0"/>
+              <a:t/>
+            </a:r>
+            <a:endParaRPr lang="en-US" dirty="0"/>
+          </a:p>
+        </p:txBody>
+      </p:sp>
+      <p:sp>
+        <p:nvSpPr>
+          <p:cNvPr id="4" name="Slide Number Placeholder 3"/>
+          <p:cNvSpPr>
+            <a:spLocks noGrp="1"/>
+          </p:cNvSpPr>
+          <p:nvPr>
+            <p:ph type="sldNum" sz="quarter" idx="10"/>
+          </p:nvPr>
+        </p:nvSpPr>
+        <p:spPr/>
+        <p:txBody>
+          <a:bodyPr/>
+          <a:lstStyle/>
+          <a:p>
+            <a:fld id="{F7021451-1387-4CA6-816F-3879F97B5CBC}" type="slidenum">
+              <a:rPr lang="en-US"/>
+              <a:t>16</a:t>
+            </a:fld>
+            <a:endParaRPr lang="en-US"/>
+          </a:p>
+        </p:txBody>
+      </p:sp>
+    </p:spTree>
+    <p:extLst>
+      <p:ext uri="{BB962C8B-B14F-4D97-AF65-F5344CB8AC3E}">
+        <p14:creationId xmlns:p14="http://schemas.microsoft.com/office/powerpoint/2010/main" val="1024086991"/>
+      </p:ext>
+    </p:extLst>
+  </p:cSld>
+  <p:clrMapOvr>
+    <a:masterClrMapping/>
+  </p:clrMapOvr>
+</p:notes>
+</file>
+
+<file path=ppt/notesSlides/notesSlide17.xml><?xml version="1.0" encoding="utf-8"?>
+<p:notes xmlns:a="http://schemas.openxmlformats.org/drawingml/2006/main" xmlns:r="http://schemas.openxmlformats.org/officeDocument/2006/relationships" xmlns:p="http://schemas.openxmlformats.org/presentationml/2006/main">
+  <p:cSld>
+    <p:spTree>
+      <p:nvGrpSpPr>
+        <p:cNvPr id="1" name=""/>
+        <p:cNvGrpSpPr/>
+        <p:nvPr/>
+      </p:nvGrpSpPr>
+      <p:grpSpPr>
+        <a:xfrm>
+          <a:off x="0" y="0"/>
+          <a:ext cx="0" cy="0"/>
+          <a:chOff x="0" y="0"/>
+          <a:chExt cx="0" cy="0"/>
+        </a:xfrm>
+      </p:grpSpPr>
+      <p:sp>
+        <p:nvSpPr>
+          <p:cNvPr id="2" name="Slide Image Placeholder 1"/>
+          <p:cNvSpPr>
+            <a:spLocks noGrp="1" noRot="1" noChangeAspect="1"/>
+          </p:cNvSpPr>
+          <p:nvPr>
+            <p:ph type="sldImg"/>
+          </p:nvPr>
+        </p:nvSpPr>
+        <p:spPr/>
+      </p:sp>
+      <p:sp>
+        <p:nvSpPr>
+          <p:cNvPr id="3" name="Notes Placeholder 2"/>
+          <p:cNvSpPr>
+            <a:spLocks noGrp="1"/>
+          </p:cNvSpPr>
+          <p:nvPr>
+            <p:ph type="body" idx="1"/>
+          </p:nvPr>
+        </p:nvSpPr>
+        <p:spPr/>
+        <p:txBody>
+          <a:bodyPr/>
+          <a:lstStyle/>
+          <a:p>
+            <a:r>
+              <a:rPr lang="en-US" dirty="0"/>
+              <a:t/>
+            </a:r>
+            <a:endParaRPr lang="en-US" dirty="0"/>
+          </a:p>
+        </p:txBody>
+      </p:sp>
+      <p:sp>
+        <p:nvSpPr>
+          <p:cNvPr id="4" name="Slide Number Placeholder 3"/>
+          <p:cNvSpPr>
+            <a:spLocks noGrp="1"/>
+          </p:cNvSpPr>
+          <p:nvPr>
+            <p:ph type="sldNum" sz="quarter" idx="10"/>
+          </p:nvPr>
+        </p:nvSpPr>
+        <p:spPr/>
+        <p:txBody>
+          <a:bodyPr/>
+          <a:lstStyle/>
+          <a:p>
+            <a:fld id="{F7021451-1387-4CA6-816F-3879F97B5CBC}" type="slidenum">
+              <a:rPr lang="en-US"/>
+              <a:t>17</a:t>
             </a:fld>
             <a:endParaRPr lang="en-US"/>
           </a:p>
@@ -2096,7 +2630,7 @@
                 <a:ea typeface="Calibri" pitchFamily="34" charset="-122"/>
                 <a:cs typeface="Calibri" pitchFamily="34" charset="-120"/>
               </a:rPr>
-              <a:t>06 / TRAIN_PYTORCH.PY・DATA_VIEWER</a:t>
+              <a:t>06 / TRAIN_PYTORCH.PY / DATA_VIEWER</a:t>
             </a:r>
             <a:endParaRPr lang="en-US" sz="1200" dirty="0"/>
           </a:p>
@@ -3315,6 +3849,6448 @@
 <file path=ppt/slides/slide11.xml><?xml version="1.0" encoding="utf-8"?>
 <p:sld xmlns:a="http://schemas.openxmlformats.org/drawingml/2006/main" xmlns:r="http://schemas.openxmlformats.org/officeDocument/2006/relationships" xmlns:p="http://schemas.openxmlformats.org/presentationml/2006/main">
   <p:cSld name="Slide 11">
+    <p:bg>
+      <p:bgPr>
+        <a:solidFill>
+          <a:srgbClr val="FFFFFF"/>
+        </a:solidFill>
+      </p:bgPr>
+    </p:bg>
+    <p:spTree>
+      <p:nvGrpSpPr>
+        <p:cNvPr id="1" name=""/>
+        <p:cNvGrpSpPr/>
+        <p:nvPr/>
+      </p:nvGrpSpPr>
+      <p:grpSpPr>
+        <a:xfrm>
+          <a:off x="0" y="0"/>
+          <a:ext cx="0" cy="0"/>
+          <a:chOff x="0" y="0"/>
+          <a:chExt cx="0" cy="0"/>
+        </a:xfrm>
+      </p:grpSpPr>
+      <p:sp>
+        <p:nvSpPr>
+          <p:cNvPr id="2" name="Text 0"/>
+          <p:cNvSpPr/>
+          <p:nvPr/>
+        </p:nvSpPr>
+        <p:spPr>
+          <a:xfrm>
+            <a:off x="548640" y="320040"/>
+            <a:ext cx="7315200" cy="320040"/>
+          </a:xfrm>
+          <a:prstGeom prst="rect">
+            <a:avLst/>
+          </a:prstGeom>
+          <a:noFill/>
+          <a:ln/>
+        </p:spPr>
+        <p:txBody>
+          <a:bodyPr wrap="square" lIns="0" tIns="0" rIns="0" bIns="0" rtlCol="0" anchor="ctr"/>
+          <a:lstStyle/>
+          <a:p>
+            <a:pPr indent="0" marL="0">
+              <a:buNone/>
+            </a:pPr>
+            <a:r>
+              <a:rPr lang="en-US" sz="1200" b="1" spc="200" kern="0" dirty="0">
+                <a:solidFill>
+                  <a:srgbClr val="FF4B2B"/>
+                </a:solidFill>
+                <a:latin typeface="Calibri" pitchFamily="34" charset="0"/>
+                <a:ea typeface="Calibri" pitchFamily="34" charset="-122"/>
+                <a:cs typeface="Calibri" pitchFamily="34" charset="-120"/>
+              </a:rPr>
+              <a:t>ADVANCED FEATURES ― まだまだ広い機能の世界</a:t>
+            </a:r>
+            <a:endParaRPr lang="en-US" sz="1200" dirty="0"/>
+          </a:p>
+        </p:txBody>
+      </p:sp>
+      <p:sp>
+        <p:nvSpPr>
+          <p:cNvPr id="3" name="Text 1"/>
+          <p:cNvSpPr/>
+          <p:nvPr/>
+        </p:nvSpPr>
+        <p:spPr>
+          <a:xfrm>
+            <a:off x="548640" y="594360"/>
+            <a:ext cx="10515600" cy="640080"/>
+          </a:xfrm>
+          <a:prstGeom prst="rect">
+            <a:avLst/>
+          </a:prstGeom>
+          <a:noFill/>
+          <a:ln/>
+        </p:spPr>
+        <p:txBody>
+          <a:bodyPr wrap="square" lIns="0" tIns="0" rIns="0" bIns="0" rtlCol="0" anchor="ctr"/>
+          <a:lstStyle/>
+          <a:p>
+            <a:pPr indent="0" marL="0">
+              <a:buNone/>
+            </a:pPr>
+            <a:r>
+              <a:rPr lang="en-US" sz="3000" b="1" dirty="0">
+                <a:solidFill>
+                  <a:srgbClr val="16192A"/>
+                </a:solidFill>
+                <a:latin typeface="Cambria" pitchFamily="34" charset="0"/>
+                <a:ea typeface="Cambria" pitchFamily="34" charset="-122"/>
+                <a:cs typeface="Cambria" pitchFamily="34" charset="-120"/>
+              </a:rPr>
+              <a:t>高度な機能マップ</a:t>
+            </a:r>
+            <a:endParaRPr lang="en-US" sz="3000" dirty="0"/>
+          </a:p>
+        </p:txBody>
+      </p:sp>
+      <p:sp>
+        <p:nvSpPr>
+          <p:cNvPr id="4" name="Shape 2"/>
+          <p:cNvSpPr/>
+          <p:nvPr/>
+        </p:nvSpPr>
+        <p:spPr>
+          <a:xfrm>
+            <a:off x="548640" y="1691640"/>
+            <a:ext cx="3200400" cy="1051560"/>
+          </a:xfrm>
+          <a:prstGeom prst="roundRect">
+            <a:avLst>
+              <a:gd name="adj" fmla="val 8696"/>
+            </a:avLst>
+          </a:prstGeom>
+          <a:solidFill>
+            <a:srgbClr val="10131A"/>
+          </a:solidFill>
+          <a:ln/>
+        </p:spPr>
+      </p:sp>
+      <p:sp>
+        <p:nvSpPr>
+          <p:cNvPr id="5" name="Text 3"/>
+          <p:cNvSpPr/>
+          <p:nvPr/>
+        </p:nvSpPr>
+        <p:spPr>
+          <a:xfrm>
+            <a:off x="777240" y="1801368"/>
+            <a:ext cx="2743200" cy="548640"/>
+          </a:xfrm>
+          <a:prstGeom prst="rect">
+            <a:avLst/>
+          </a:prstGeom>
+          <a:noFill/>
+          <a:ln/>
+        </p:spPr>
+        <p:txBody>
+          <a:bodyPr wrap="square" lIns="0" tIns="0" rIns="0" bIns="0" rtlCol="0" anchor="ctr"/>
+          <a:lstStyle/>
+          <a:p>
+            <a:pPr indent="0" marL="0">
+              <a:buNone/>
+            </a:pPr>
+            <a:r>
+              <a:rPr lang="en-US" sz="3000" b="1" dirty="0">
+                <a:solidFill>
+                  <a:srgbClr val="FF4B2B"/>
+                </a:solidFill>
+                <a:latin typeface="Cambria" pitchFamily="34" charset="0"/>
+                <a:ea typeface="Cambria" pitchFamily="34" charset="-122"/>
+                <a:cs typeface="Cambria" pitchFamily="34" charset="-120"/>
+              </a:rPr>
+              <a:t>473</a:t>
+            </a:r>
+            <a:endParaRPr lang="en-US" sz="3000" dirty="0"/>
+          </a:p>
+        </p:txBody>
+      </p:sp>
+      <p:sp>
+        <p:nvSpPr>
+          <p:cNvPr id="6" name="Text 4"/>
+          <p:cNvSpPr/>
+          <p:nvPr/>
+        </p:nvSpPr>
+        <p:spPr>
+          <a:xfrm>
+            <a:off x="777240" y="2368296"/>
+            <a:ext cx="2743200" cy="320040"/>
+          </a:xfrm>
+          <a:prstGeom prst="rect">
+            <a:avLst/>
+          </a:prstGeom>
+          <a:noFill/>
+          <a:ln/>
+        </p:spPr>
+        <p:txBody>
+          <a:bodyPr wrap="square" lIns="0" tIns="0" rIns="0" bIns="0" rtlCol="0" anchor="ctr"/>
+          <a:lstStyle/>
+          <a:p>
+            <a:pPr indent="0" marL="0">
+              <a:buNone/>
+            </a:pPr>
+            <a:r>
+              <a:rPr lang="en-US" sz="1050" dirty="0">
+                <a:solidFill>
+                  <a:srgbClr val="C7CEDE"/>
+                </a:solidFill>
+                <a:latin typeface="Calibri" pitchFamily="34" charset="0"/>
+                <a:ea typeface="Calibri" pitchFamily="34" charset="-122"/>
+                <a:cs typeface="Calibri" pitchFamily="34" charset="-120"/>
+              </a:rPr>
+              <a:t>config.py の設定項目数</a:t>
+            </a:r>
+            <a:endParaRPr lang="en-US" sz="1050" dirty="0"/>
+          </a:p>
+        </p:txBody>
+      </p:sp>
+      <p:sp>
+        <p:nvSpPr>
+          <p:cNvPr id="7" name="Shape 5"/>
+          <p:cNvSpPr/>
+          <p:nvPr/>
+        </p:nvSpPr>
+        <p:spPr>
+          <a:xfrm>
+            <a:off x="4114800" y="1691640"/>
+            <a:ext cx="3200400" cy="1051560"/>
+          </a:xfrm>
+          <a:prstGeom prst="roundRect">
+            <a:avLst>
+              <a:gd name="adj" fmla="val 8696"/>
+            </a:avLst>
+          </a:prstGeom>
+          <a:solidFill>
+            <a:srgbClr val="10131A"/>
+          </a:solidFill>
+          <a:ln/>
+        </p:spPr>
+      </p:sp>
+      <p:sp>
+        <p:nvSpPr>
+          <p:cNvPr id="8" name="Text 6"/>
+          <p:cNvSpPr/>
+          <p:nvPr/>
+        </p:nvSpPr>
+        <p:spPr>
+          <a:xfrm>
+            <a:off x="4343400" y="1801368"/>
+            <a:ext cx="2743200" cy="548640"/>
+          </a:xfrm>
+          <a:prstGeom prst="rect">
+            <a:avLst/>
+          </a:prstGeom>
+          <a:noFill/>
+          <a:ln/>
+        </p:spPr>
+        <p:txBody>
+          <a:bodyPr wrap="square" lIns="0" tIns="0" rIns="0" bIns="0" rtlCol="0" anchor="ctr"/>
+          <a:lstStyle/>
+          <a:p>
+            <a:pPr indent="0" marL="0">
+              <a:buNone/>
+            </a:pPr>
+            <a:r>
+              <a:rPr lang="en-US" sz="3000" b="1" dirty="0">
+                <a:solidFill>
+                  <a:srgbClr val="FF4B2B"/>
+                </a:solidFill>
+                <a:latin typeface="Cambria" pitchFamily="34" charset="0"/>
+                <a:ea typeface="Cambria" pitchFamily="34" charset="-122"/>
+                <a:cs typeface="Cambria" pitchFamily="34" charset="-120"/>
+              </a:rPr>
+              <a:t>15〜20%</a:t>
+            </a:r>
+            <a:endParaRPr lang="en-US" sz="3000" dirty="0"/>
+          </a:p>
+        </p:txBody>
+      </p:sp>
+      <p:sp>
+        <p:nvSpPr>
+          <p:cNvPr id="9" name="Text 7"/>
+          <p:cNvSpPr/>
+          <p:nvPr/>
+        </p:nvSpPr>
+        <p:spPr>
+          <a:xfrm>
+            <a:off x="4343400" y="2368296"/>
+            <a:ext cx="2743200" cy="320040"/>
+          </a:xfrm>
+          <a:prstGeom prst="rect">
+            <a:avLst/>
+          </a:prstGeom>
+          <a:noFill/>
+          <a:ln/>
+        </p:spPr>
+        <p:txBody>
+          <a:bodyPr wrap="square" lIns="0" tIns="0" rIns="0" bIns="0" rtlCol="0" anchor="ctr"/>
+          <a:lstStyle/>
+          <a:p>
+            <a:pPr indent="0" marL="0">
+              <a:buNone/>
+            </a:pPr>
+            <a:r>
+              <a:rPr lang="en-US" sz="1050" dirty="0">
+                <a:solidFill>
+                  <a:srgbClr val="C7CEDE"/>
+                </a:solidFill>
+                <a:latin typeface="Calibri" pitchFamily="34" charset="0"/>
+                <a:ea typeface="Calibri" pitchFamily="34" charset="-122"/>
+                <a:cs typeface="Calibri" pitchFamily="34" charset="-120"/>
+              </a:rPr>
+              <a:t>これまでの基本解説でカバーした範囲</a:t>
+            </a:r>
+            <a:endParaRPr lang="en-US" sz="1050" dirty="0"/>
+          </a:p>
+        </p:txBody>
+      </p:sp>
+      <p:sp>
+        <p:nvSpPr>
+          <p:cNvPr id="10" name="Text 8"/>
+          <p:cNvSpPr/>
+          <p:nvPr/>
+        </p:nvSpPr>
+        <p:spPr>
+          <a:xfrm>
+            <a:off x="7589520" y="1691640"/>
+            <a:ext cx="4050792" cy="1051560"/>
+          </a:xfrm>
+          <a:prstGeom prst="rect">
+            <a:avLst/>
+          </a:prstGeom>
+          <a:noFill/>
+          <a:ln/>
+        </p:spPr>
+        <p:txBody>
+          <a:bodyPr wrap="square" lIns="0" tIns="0" rIns="0" bIns="0" rtlCol="0" anchor="ctr"/>
+          <a:lstStyle/>
+          <a:p>
+            <a:pPr indent="0" marL="0">
+              <a:lnSpc>
+                <a:spcPct val="125000"/>
+              </a:lnSpc>
+              <a:buNone/>
+            </a:pPr>
+            <a:r>
+              <a:rPr lang="en-US" sz="1250" dirty="0">
+                <a:solidFill>
+                  <a:srgbClr val="16192A"/>
+                </a:solidFill>
+                <a:latin typeface="Calibri" pitchFamily="34" charset="0"/>
+                <a:ea typeface="Calibri" pitchFamily="34" charset="-122"/>
+                <a:cs typeface="Calibri" pitchFamily="34" charset="-120"/>
+              </a:rPr>
+              <a:t>残りの大部分は、本格的なレース競技向けの高度な自律走行技術。ここから5つのジャンルを見ていく。</a:t>
+            </a:r>
+            <a:endParaRPr lang="en-US" sz="1250" dirty="0"/>
+          </a:p>
+        </p:txBody>
+      </p:sp>
+      <p:sp>
+        <p:nvSpPr>
+          <p:cNvPr id="11" name="Shape 9"/>
+          <p:cNvSpPr/>
+          <p:nvPr/>
+        </p:nvSpPr>
+        <p:spPr>
+          <a:xfrm>
+            <a:off x="325984" y="3108960"/>
+            <a:ext cx="2103120" cy="2880360"/>
+          </a:xfrm>
+          <a:prstGeom prst="roundRect">
+            <a:avLst>
+              <a:gd name="adj" fmla="val 5217"/>
+            </a:avLst>
+          </a:prstGeom>
+          <a:solidFill>
+            <a:srgbClr val="F3F5FA"/>
+          </a:solidFill>
+          <a:ln/>
+        </p:spPr>
+      </p:sp>
+      <p:sp>
+        <p:nvSpPr>
+          <p:cNvPr id="12" name="Shape 10"/>
+          <p:cNvSpPr/>
+          <p:nvPr/>
+        </p:nvSpPr>
+        <p:spPr>
+          <a:xfrm>
+            <a:off x="943204" y="3360420"/>
+            <a:ext cx="868680" cy="868680"/>
+          </a:xfrm>
+          <a:prstGeom prst="ellipse">
+            <a:avLst/>
+          </a:prstGeom>
+          <a:solidFill>
+            <a:srgbClr val="E4FAFC"/>
+          </a:solidFill>
+          <a:ln/>
+        </p:spPr>
+      </p:sp>
+      <p:pic>
+        <p:nvPicPr>
+          <p:cNvPr id="13" name="Image 0" descr="preencoded.png">    </p:cNvPr>
+          <p:cNvPicPr>
+            <a:picLocks noChangeAspect="1"/>
+          </p:cNvPicPr>
+          <p:nvPr/>
+        </p:nvPicPr>
+        <p:blipFill>
+          <a:blip r:embed="rId1"/>
+          <a:stretch>
+            <a:fillRect/>
+          </a:stretch>
+        </p:blipFill>
+        <p:spPr>
+          <a:xfrm>
+            <a:off x="1151687" y="3568903"/>
+            <a:ext cx="451714" cy="451714"/>
+          </a:xfrm>
+          <a:prstGeom prst="rect">
+            <a:avLst/>
+          </a:prstGeom>
+        </p:spPr>
+      </p:pic>
+      <p:sp>
+        <p:nvSpPr>
+          <p:cNvPr id="14" name="Text 11"/>
+          <p:cNvSpPr/>
+          <p:nvPr/>
+        </p:nvSpPr>
+        <p:spPr>
+          <a:xfrm>
+            <a:off x="463144" y="4343400"/>
+            <a:ext cx="1828800" cy="594360"/>
+          </a:xfrm>
+          <a:prstGeom prst="rect">
+            <a:avLst/>
+          </a:prstGeom>
+          <a:noFill/>
+          <a:ln/>
+        </p:spPr>
+        <p:txBody>
+          <a:bodyPr wrap="square" lIns="0" tIns="0" rIns="0" bIns="0" rtlCol="0" anchor="ctr"/>
+          <a:lstStyle/>
+          <a:p>
+            <a:pPr algn="ctr" indent="0" marL="0">
+              <a:lnSpc>
+                <a:spcPct val="105000"/>
+              </a:lnSpc>
+              <a:buNone/>
+            </a:pPr>
+            <a:r>
+              <a:rPr lang="en-US" sz="1300" b="1" dirty="0">
+                <a:solidFill>
+                  <a:srgbClr val="16192A"/>
+                </a:solidFill>
+                <a:latin typeface="Cambria" pitchFamily="34" charset="0"/>
+                <a:ea typeface="Cambria" pitchFamily="34" charset="-122"/>
+                <a:cs typeface="Cambria" pitchFamily="34" charset="-120"/>
+              </a:rPr>
+              <a:t>自己位置推定</a:t>
+            </a:r>
+            <a:endParaRPr lang="en-US" sz="1300" dirty="0"/>
+          </a:p>
+        </p:txBody>
+      </p:sp>
+      <p:sp>
+        <p:nvSpPr>
+          <p:cNvPr id="15" name="Text 12"/>
+          <p:cNvSpPr/>
+          <p:nvPr/>
+        </p:nvSpPr>
+        <p:spPr>
+          <a:xfrm>
+            <a:off x="463144" y="4937760"/>
+            <a:ext cx="1828800" cy="640080"/>
+          </a:xfrm>
+          <a:prstGeom prst="rect">
+            <a:avLst/>
+          </a:prstGeom>
+          <a:noFill/>
+          <a:ln/>
+        </p:spPr>
+        <p:txBody>
+          <a:bodyPr wrap="square" lIns="0" tIns="0" rIns="0" bIns="0" rtlCol="0" anchor="ctr"/>
+          <a:lstStyle/>
+          <a:p>
+            <a:pPr algn="ctr" indent="0" marL="0">
+              <a:lnSpc>
+                <a:spcPct val="115000"/>
+              </a:lnSpc>
+              <a:buNone/>
+            </a:pPr>
+            <a:r>
+              <a:rPr lang="en-US" sz="950" dirty="0">
+                <a:solidFill>
+                  <a:srgbClr val="6B7280"/>
+                </a:solidFill>
+                <a:latin typeface="Calibri" pitchFamily="34" charset="0"/>
+                <a:ea typeface="Calibri" pitchFamily="34" charset="-122"/>
+                <a:cs typeface="Calibri" pitchFamily="34" charset="-120"/>
+              </a:rPr>
+              <a:t>SLAM / VSLAM / ArUco / AMCL</a:t>
+            </a:r>
+            <a:endParaRPr lang="en-US" sz="950" dirty="0"/>
+          </a:p>
+        </p:txBody>
+      </p:sp>
+      <p:sp>
+        <p:nvSpPr>
+          <p:cNvPr id="16" name="Text 13"/>
+          <p:cNvSpPr/>
+          <p:nvPr/>
+        </p:nvSpPr>
+        <p:spPr>
+          <a:xfrm>
+            <a:off x="463144" y="5623560"/>
+            <a:ext cx="1828800" cy="274320"/>
+          </a:xfrm>
+          <a:prstGeom prst="rect">
+            <a:avLst/>
+          </a:prstGeom>
+          <a:noFill/>
+          <a:ln/>
+        </p:spPr>
+        <p:txBody>
+          <a:bodyPr wrap="square" lIns="0" tIns="0" rIns="0" bIns="0" rtlCol="0" anchor="ctr"/>
+          <a:lstStyle/>
+          <a:p>
+            <a:pPr algn="ctr" indent="0" marL="0">
+              <a:buNone/>
+            </a:pPr>
+            <a:r>
+              <a:rPr lang="en-US" sz="900" b="1" dirty="0">
+                <a:solidFill>
+                  <a:srgbClr val="6B7280"/>
+                </a:solidFill>
+                <a:latin typeface="Calibri" pitchFamily="34" charset="0"/>
+                <a:ea typeface="Calibri" pitchFamily="34" charset="-122"/>
+                <a:cs typeface="Calibri" pitchFamily="34" charset="-120"/>
+              </a:rPr>
+              <a:t>p.12</a:t>
+            </a:r>
+            <a:endParaRPr lang="en-US" sz="900" dirty="0"/>
+          </a:p>
+        </p:txBody>
+      </p:sp>
+      <p:sp>
+        <p:nvSpPr>
+          <p:cNvPr id="17" name="Shape 14"/>
+          <p:cNvSpPr/>
+          <p:nvPr/>
+        </p:nvSpPr>
+        <p:spPr>
+          <a:xfrm>
+            <a:off x="2685136" y="3108960"/>
+            <a:ext cx="2103120" cy="2880360"/>
+          </a:xfrm>
+          <a:prstGeom prst="roundRect">
+            <a:avLst>
+              <a:gd name="adj" fmla="val 5217"/>
+            </a:avLst>
+          </a:prstGeom>
+          <a:solidFill>
+            <a:srgbClr val="F3F5FA"/>
+          </a:solidFill>
+          <a:ln/>
+        </p:spPr>
+      </p:sp>
+      <p:sp>
+        <p:nvSpPr>
+          <p:cNvPr id="18" name="Shape 15"/>
+          <p:cNvSpPr/>
+          <p:nvPr/>
+        </p:nvSpPr>
+        <p:spPr>
+          <a:xfrm>
+            <a:off x="3302356" y="3360420"/>
+            <a:ext cx="868680" cy="868680"/>
+          </a:xfrm>
+          <a:prstGeom prst="ellipse">
+            <a:avLst/>
+          </a:prstGeom>
+          <a:solidFill>
+            <a:srgbClr val="FFEDE9"/>
+          </a:solidFill>
+          <a:ln/>
+        </p:spPr>
+      </p:sp>
+      <p:pic>
+        <p:nvPicPr>
+          <p:cNvPr id="19" name="Image 1" descr="preencoded.png">    </p:cNvPr>
+          <p:cNvPicPr>
+            <a:picLocks noChangeAspect="1"/>
+          </p:cNvPicPr>
+          <p:nvPr/>
+        </p:nvPicPr>
+        <p:blipFill>
+          <a:blip r:embed="rId2"/>
+          <a:stretch>
+            <a:fillRect/>
+          </a:stretch>
+        </p:blipFill>
+        <p:spPr>
+          <a:xfrm>
+            <a:off x="3510839" y="3568903"/>
+            <a:ext cx="451714" cy="451714"/>
+          </a:xfrm>
+          <a:prstGeom prst="rect">
+            <a:avLst/>
+          </a:prstGeom>
+        </p:spPr>
+      </p:pic>
+      <p:sp>
+        <p:nvSpPr>
+          <p:cNvPr id="20" name="Text 16"/>
+          <p:cNvSpPr/>
+          <p:nvPr/>
+        </p:nvSpPr>
+        <p:spPr>
+          <a:xfrm>
+            <a:off x="2822296" y="4343400"/>
+            <a:ext cx="1828800" cy="594360"/>
+          </a:xfrm>
+          <a:prstGeom prst="rect">
+            <a:avLst/>
+          </a:prstGeom>
+          <a:noFill/>
+          <a:ln/>
+        </p:spPr>
+        <p:txBody>
+          <a:bodyPr wrap="square" lIns="0" tIns="0" rIns="0" bIns="0" rtlCol="0" anchor="ctr"/>
+          <a:lstStyle/>
+          <a:p>
+            <a:pPr algn="ctr" indent="0" marL="0">
+              <a:lnSpc>
+                <a:spcPct val="105000"/>
+              </a:lnSpc>
+              <a:buNone/>
+            </a:pPr>
+            <a:r>
+              <a:rPr lang="en-US" sz="1300" b="1" dirty="0">
+                <a:solidFill>
+                  <a:srgbClr val="16192A"/>
+                </a:solidFill>
+                <a:latin typeface="Cambria" pitchFamily="34" charset="0"/>
+                <a:ea typeface="Cambria" pitchFamily="34" charset="-122"/>
+                <a:cs typeface="Cambria" pitchFamily="34" charset="-120"/>
+              </a:rPr>
+              <a:t>経路追従・最適制御</a:t>
+            </a:r>
+            <a:endParaRPr lang="en-US" sz="1300" dirty="0"/>
+          </a:p>
+        </p:txBody>
+      </p:sp>
+      <p:sp>
+        <p:nvSpPr>
+          <p:cNvPr id="21" name="Text 17"/>
+          <p:cNvSpPr/>
+          <p:nvPr/>
+        </p:nvSpPr>
+        <p:spPr>
+          <a:xfrm>
+            <a:off x="2822296" y="4937760"/>
+            <a:ext cx="1828800" cy="640080"/>
+          </a:xfrm>
+          <a:prstGeom prst="rect">
+            <a:avLst/>
+          </a:prstGeom>
+          <a:noFill/>
+          <a:ln/>
+        </p:spPr>
+        <p:txBody>
+          <a:bodyPr wrap="square" lIns="0" tIns="0" rIns="0" bIns="0" rtlCol="0" anchor="ctr"/>
+          <a:lstStyle/>
+          <a:p>
+            <a:pPr algn="ctr" indent="0" marL="0">
+              <a:lnSpc>
+                <a:spcPct val="115000"/>
+              </a:lnSpc>
+              <a:buNone/>
+            </a:pPr>
+            <a:r>
+              <a:rPr lang="en-US" sz="950" dirty="0">
+                <a:solidFill>
+                  <a:srgbClr val="6B7280"/>
+                </a:solidFill>
+                <a:latin typeface="Calibri" pitchFamily="34" charset="0"/>
+                <a:ea typeface="Calibri" pitchFamily="34" charset="-122"/>
+                <a:cs typeface="Calibri" pitchFamily="34" charset="-120"/>
+              </a:rPr>
+              <a:t>pure pursuit / MPC / MPPI</a:t>
+            </a:r>
+            <a:endParaRPr lang="en-US" sz="950" dirty="0"/>
+          </a:p>
+        </p:txBody>
+      </p:sp>
+      <p:sp>
+        <p:nvSpPr>
+          <p:cNvPr id="22" name="Text 18"/>
+          <p:cNvSpPr/>
+          <p:nvPr/>
+        </p:nvSpPr>
+        <p:spPr>
+          <a:xfrm>
+            <a:off x="2822296" y="5623560"/>
+            <a:ext cx="1828800" cy="274320"/>
+          </a:xfrm>
+          <a:prstGeom prst="rect">
+            <a:avLst/>
+          </a:prstGeom>
+          <a:noFill/>
+          <a:ln/>
+        </p:spPr>
+        <p:txBody>
+          <a:bodyPr wrap="square" lIns="0" tIns="0" rIns="0" bIns="0" rtlCol="0" anchor="ctr"/>
+          <a:lstStyle/>
+          <a:p>
+            <a:pPr algn="ctr" indent="0" marL="0">
+              <a:buNone/>
+            </a:pPr>
+            <a:r>
+              <a:rPr lang="en-US" sz="900" b="1" dirty="0">
+                <a:solidFill>
+                  <a:srgbClr val="6B7280"/>
+                </a:solidFill>
+                <a:latin typeface="Calibri" pitchFamily="34" charset="0"/>
+                <a:ea typeface="Calibri" pitchFamily="34" charset="-122"/>
+                <a:cs typeface="Calibri" pitchFamily="34" charset="-120"/>
+              </a:rPr>
+              <a:t>p.13</a:t>
+            </a:r>
+            <a:endParaRPr lang="en-US" sz="900" dirty="0"/>
+          </a:p>
+        </p:txBody>
+      </p:sp>
+      <p:sp>
+        <p:nvSpPr>
+          <p:cNvPr id="23" name="Shape 19"/>
+          <p:cNvSpPr/>
+          <p:nvPr/>
+        </p:nvSpPr>
+        <p:spPr>
+          <a:xfrm>
+            <a:off x="5044288" y="3108960"/>
+            <a:ext cx="2103120" cy="2880360"/>
+          </a:xfrm>
+          <a:prstGeom prst="roundRect">
+            <a:avLst>
+              <a:gd name="adj" fmla="val 5217"/>
+            </a:avLst>
+          </a:prstGeom>
+          <a:solidFill>
+            <a:srgbClr val="F3F5FA"/>
+          </a:solidFill>
+          <a:ln/>
+        </p:spPr>
+      </p:sp>
+      <p:sp>
+        <p:nvSpPr>
+          <p:cNvPr id="24" name="Shape 20"/>
+          <p:cNvSpPr/>
+          <p:nvPr/>
+        </p:nvSpPr>
+        <p:spPr>
+          <a:xfrm>
+            <a:off x="5661508" y="3360420"/>
+            <a:ext cx="868680" cy="868680"/>
+          </a:xfrm>
+          <a:prstGeom prst="ellipse">
+            <a:avLst/>
+          </a:prstGeom>
+          <a:solidFill>
+            <a:srgbClr val="EAEEF6"/>
+          </a:solidFill>
+          <a:ln/>
+        </p:spPr>
+      </p:sp>
+      <p:pic>
+        <p:nvPicPr>
+          <p:cNvPr id="25" name="Image 2" descr="preencoded.png">    </p:cNvPr>
+          <p:cNvPicPr>
+            <a:picLocks noChangeAspect="1"/>
+          </p:cNvPicPr>
+          <p:nvPr/>
+        </p:nvPicPr>
+        <p:blipFill>
+          <a:blip r:embed="rId3"/>
+          <a:stretch>
+            <a:fillRect/>
+          </a:stretch>
+        </p:blipFill>
+        <p:spPr>
+          <a:xfrm>
+            <a:off x="5869991" y="3568903"/>
+            <a:ext cx="451714" cy="451714"/>
+          </a:xfrm>
+          <a:prstGeom prst="rect">
+            <a:avLst/>
+          </a:prstGeom>
+        </p:spPr>
+      </p:pic>
+      <p:sp>
+        <p:nvSpPr>
+          <p:cNvPr id="26" name="Text 21"/>
+          <p:cNvSpPr/>
+          <p:nvPr/>
+        </p:nvSpPr>
+        <p:spPr>
+          <a:xfrm>
+            <a:off x="5181448" y="4343400"/>
+            <a:ext cx="1828800" cy="594360"/>
+          </a:xfrm>
+          <a:prstGeom prst="rect">
+            <a:avLst/>
+          </a:prstGeom>
+          <a:noFill/>
+          <a:ln/>
+        </p:spPr>
+        <p:txBody>
+          <a:bodyPr wrap="square" lIns="0" tIns="0" rIns="0" bIns="0" rtlCol="0" anchor="ctr"/>
+          <a:lstStyle/>
+          <a:p>
+            <a:pPr algn="ctr" indent="0" marL="0">
+              <a:lnSpc>
+                <a:spcPct val="105000"/>
+              </a:lnSpc>
+              <a:buNone/>
+            </a:pPr>
+            <a:r>
+              <a:rPr lang="en-US" sz="1300" b="1" dirty="0">
+                <a:solidFill>
+                  <a:srgbClr val="16192A"/>
+                </a:solidFill>
+                <a:latin typeface="Cambria" pitchFamily="34" charset="0"/>
+                <a:ea typeface="Cambria" pitchFamily="34" charset="-122"/>
+                <a:cs typeface="Cambria" pitchFamily="34" charset="-120"/>
+              </a:rPr>
+              <a:t>物体検知</a:t>
+            </a:r>
+            <a:endParaRPr lang="en-US" sz="1300" dirty="0"/>
+          </a:p>
+        </p:txBody>
+      </p:sp>
+      <p:sp>
+        <p:nvSpPr>
+          <p:cNvPr id="27" name="Text 22"/>
+          <p:cNvSpPr/>
+          <p:nvPr/>
+        </p:nvSpPr>
+        <p:spPr>
+          <a:xfrm>
+            <a:off x="5181448" y="4937760"/>
+            <a:ext cx="1828800" cy="640080"/>
+          </a:xfrm>
+          <a:prstGeom prst="rect">
+            <a:avLst/>
+          </a:prstGeom>
+          <a:noFill/>
+          <a:ln/>
+        </p:spPr>
+        <p:txBody>
+          <a:bodyPr wrap="square" lIns="0" tIns="0" rIns="0" bIns="0" rtlCol="0" anchor="ctr"/>
+          <a:lstStyle/>
+          <a:p>
+            <a:pPr algn="ctr" indent="0" marL="0">
+              <a:lnSpc>
+                <a:spcPct val="115000"/>
+              </a:lnSpc>
+              <a:buNone/>
+            </a:pPr>
+            <a:r>
+              <a:rPr lang="en-US" sz="950" dirty="0">
+                <a:solidFill>
+                  <a:srgbClr val="6B7280"/>
+                </a:solidFill>
+                <a:latin typeface="Calibri" pitchFamily="34" charset="0"/>
+                <a:ea typeface="Calibri" pitchFamily="34" charset="-122"/>
+                <a:cs typeface="Calibri" pitchFamily="34" charset="-120"/>
+              </a:rPr>
+              <a:t>YOLO</a:t>
+            </a:r>
+            <a:endParaRPr lang="en-US" sz="950" dirty="0"/>
+          </a:p>
+        </p:txBody>
+      </p:sp>
+      <p:sp>
+        <p:nvSpPr>
+          <p:cNvPr id="28" name="Text 23"/>
+          <p:cNvSpPr/>
+          <p:nvPr/>
+        </p:nvSpPr>
+        <p:spPr>
+          <a:xfrm>
+            <a:off x="5181448" y="5623560"/>
+            <a:ext cx="1828800" cy="274320"/>
+          </a:xfrm>
+          <a:prstGeom prst="rect">
+            <a:avLst/>
+          </a:prstGeom>
+          <a:noFill/>
+          <a:ln/>
+        </p:spPr>
+        <p:txBody>
+          <a:bodyPr wrap="square" lIns="0" tIns="0" rIns="0" bIns="0" rtlCol="0" anchor="ctr"/>
+          <a:lstStyle/>
+          <a:p>
+            <a:pPr algn="ctr" indent="0" marL="0">
+              <a:buNone/>
+            </a:pPr>
+            <a:r>
+              <a:rPr lang="en-US" sz="900" b="1" dirty="0">
+                <a:solidFill>
+                  <a:srgbClr val="6B7280"/>
+                </a:solidFill>
+                <a:latin typeface="Calibri" pitchFamily="34" charset="0"/>
+                <a:ea typeface="Calibri" pitchFamily="34" charset="-122"/>
+                <a:cs typeface="Calibri" pitchFamily="34" charset="-120"/>
+              </a:rPr>
+              <a:t>p.14</a:t>
+            </a:r>
+            <a:endParaRPr lang="en-US" sz="900" dirty="0"/>
+          </a:p>
+        </p:txBody>
+      </p:sp>
+      <p:sp>
+        <p:nvSpPr>
+          <p:cNvPr id="29" name="Shape 24"/>
+          <p:cNvSpPr/>
+          <p:nvPr/>
+        </p:nvSpPr>
+        <p:spPr>
+          <a:xfrm>
+            <a:off x="7403440" y="3108960"/>
+            <a:ext cx="2103120" cy="2880360"/>
+          </a:xfrm>
+          <a:prstGeom prst="roundRect">
+            <a:avLst>
+              <a:gd name="adj" fmla="val 5217"/>
+            </a:avLst>
+          </a:prstGeom>
+          <a:solidFill>
+            <a:srgbClr val="F3F5FA"/>
+          </a:solidFill>
+          <a:ln/>
+        </p:spPr>
+      </p:sp>
+      <p:sp>
+        <p:nvSpPr>
+          <p:cNvPr id="30" name="Shape 25"/>
+          <p:cNvSpPr/>
+          <p:nvPr/>
+        </p:nvSpPr>
+        <p:spPr>
+          <a:xfrm>
+            <a:off x="8020660" y="3360420"/>
+            <a:ext cx="868680" cy="868680"/>
+          </a:xfrm>
+          <a:prstGeom prst="ellipse">
+            <a:avLst/>
+          </a:prstGeom>
+          <a:solidFill>
+            <a:srgbClr val="E4FAFC"/>
+          </a:solidFill>
+          <a:ln/>
+        </p:spPr>
+      </p:sp>
+      <p:pic>
+        <p:nvPicPr>
+          <p:cNvPr id="31" name="Image 3" descr="preencoded.png">    </p:cNvPr>
+          <p:cNvPicPr>
+            <a:picLocks noChangeAspect="1"/>
+          </p:cNvPicPr>
+          <p:nvPr/>
+        </p:nvPicPr>
+        <p:blipFill>
+          <a:blip r:embed="rId4"/>
+          <a:stretch>
+            <a:fillRect/>
+          </a:stretch>
+        </p:blipFill>
+        <p:spPr>
+          <a:xfrm>
+            <a:off x="8229143" y="3568903"/>
+            <a:ext cx="451714" cy="451714"/>
+          </a:xfrm>
+          <a:prstGeom prst="rect">
+            <a:avLst/>
+          </a:prstGeom>
+        </p:spPr>
+      </p:pic>
+      <p:sp>
+        <p:nvSpPr>
+          <p:cNvPr id="32" name="Text 26"/>
+          <p:cNvSpPr/>
+          <p:nvPr/>
+        </p:nvSpPr>
+        <p:spPr>
+          <a:xfrm>
+            <a:off x="7540600" y="4343400"/>
+            <a:ext cx="1828800" cy="594360"/>
+          </a:xfrm>
+          <a:prstGeom prst="rect">
+            <a:avLst/>
+          </a:prstGeom>
+          <a:noFill/>
+          <a:ln/>
+        </p:spPr>
+        <p:txBody>
+          <a:bodyPr wrap="square" lIns="0" tIns="0" rIns="0" bIns="0" rtlCol="0" anchor="ctr"/>
+          <a:lstStyle/>
+          <a:p>
+            <a:pPr algn="ctr" indent="0" marL="0">
+              <a:lnSpc>
+                <a:spcPct val="105000"/>
+              </a:lnSpc>
+              <a:buNone/>
+            </a:pPr>
+            <a:r>
+              <a:rPr lang="en-US" sz="1300" b="1" dirty="0">
+                <a:solidFill>
+                  <a:srgbClr val="16192A"/>
+                </a:solidFill>
+                <a:latin typeface="Cambria" pitchFamily="34" charset="0"/>
+                <a:ea typeface="Cambria" pitchFamily="34" charset="-122"/>
+                <a:cs typeface="Cambria" pitchFamily="34" charset="-120"/>
+              </a:rPr>
+              <a:t>安全機構</a:t>
+            </a:r>
+            <a:endParaRPr lang="en-US" sz="1300" dirty="0"/>
+          </a:p>
+        </p:txBody>
+      </p:sp>
+      <p:sp>
+        <p:nvSpPr>
+          <p:cNvPr id="33" name="Text 27"/>
+          <p:cNvSpPr/>
+          <p:nvPr/>
+        </p:nvSpPr>
+        <p:spPr>
+          <a:xfrm>
+            <a:off x="7540600" y="4937760"/>
+            <a:ext cx="1828800" cy="640080"/>
+          </a:xfrm>
+          <a:prstGeom prst="rect">
+            <a:avLst/>
+          </a:prstGeom>
+          <a:noFill/>
+          <a:ln/>
+        </p:spPr>
+        <p:txBody>
+          <a:bodyPr wrap="square" lIns="0" tIns="0" rIns="0" bIns="0" rtlCol="0" anchor="ctr"/>
+          <a:lstStyle/>
+          <a:p>
+            <a:pPr algn="ctr" indent="0" marL="0">
+              <a:lnSpc>
+                <a:spcPct val="115000"/>
+              </a:lnSpc>
+              <a:buNone/>
+            </a:pPr>
+            <a:r>
+              <a:rPr lang="en-US" sz="950" dirty="0">
+                <a:solidFill>
+                  <a:srgbClr val="6B7280"/>
+                </a:solidFill>
+                <a:latin typeface="Calibri" pitchFamily="34" charset="0"/>
+                <a:ea typeface="Calibri" pitchFamily="34" charset="-122"/>
+                <a:cs typeface="Calibri" pitchFamily="34" charset="-120"/>
+              </a:rPr>
+              <a:t>ControlArbiter</a:t>
+            </a:r>
+            <a:endParaRPr lang="en-US" sz="950" dirty="0"/>
+          </a:p>
+        </p:txBody>
+      </p:sp>
+      <p:sp>
+        <p:nvSpPr>
+          <p:cNvPr id="34" name="Text 28"/>
+          <p:cNvSpPr/>
+          <p:nvPr/>
+        </p:nvSpPr>
+        <p:spPr>
+          <a:xfrm>
+            <a:off x="7540600" y="5623560"/>
+            <a:ext cx="1828800" cy="274320"/>
+          </a:xfrm>
+          <a:prstGeom prst="rect">
+            <a:avLst/>
+          </a:prstGeom>
+          <a:noFill/>
+          <a:ln/>
+        </p:spPr>
+        <p:txBody>
+          <a:bodyPr wrap="square" lIns="0" tIns="0" rIns="0" bIns="0" rtlCol="0" anchor="ctr"/>
+          <a:lstStyle/>
+          <a:p>
+            <a:pPr algn="ctr" indent="0" marL="0">
+              <a:buNone/>
+            </a:pPr>
+            <a:r>
+              <a:rPr lang="en-US" sz="900" b="1" dirty="0">
+                <a:solidFill>
+                  <a:srgbClr val="6B7280"/>
+                </a:solidFill>
+                <a:latin typeface="Calibri" pitchFamily="34" charset="0"/>
+                <a:ea typeface="Calibri" pitchFamily="34" charset="-122"/>
+                <a:cs typeface="Calibri" pitchFamily="34" charset="-120"/>
+              </a:rPr>
+              <a:t>p.15</a:t>
+            </a:r>
+            <a:endParaRPr lang="en-US" sz="900" dirty="0"/>
+          </a:p>
+        </p:txBody>
+      </p:sp>
+      <p:sp>
+        <p:nvSpPr>
+          <p:cNvPr id="35" name="Shape 29"/>
+          <p:cNvSpPr/>
+          <p:nvPr/>
+        </p:nvSpPr>
+        <p:spPr>
+          <a:xfrm>
+            <a:off x="9762592" y="3108960"/>
+            <a:ext cx="2103120" cy="2880360"/>
+          </a:xfrm>
+          <a:prstGeom prst="roundRect">
+            <a:avLst>
+              <a:gd name="adj" fmla="val 5217"/>
+            </a:avLst>
+          </a:prstGeom>
+          <a:solidFill>
+            <a:srgbClr val="F3F5FA"/>
+          </a:solidFill>
+          <a:ln/>
+        </p:spPr>
+      </p:sp>
+      <p:sp>
+        <p:nvSpPr>
+          <p:cNvPr id="36" name="Shape 30"/>
+          <p:cNvSpPr/>
+          <p:nvPr/>
+        </p:nvSpPr>
+        <p:spPr>
+          <a:xfrm>
+            <a:off x="10379812" y="3360420"/>
+            <a:ext cx="868680" cy="868680"/>
+          </a:xfrm>
+          <a:prstGeom prst="ellipse">
+            <a:avLst/>
+          </a:prstGeom>
+          <a:solidFill>
+            <a:srgbClr val="FFEDE9"/>
+          </a:solidFill>
+          <a:ln/>
+        </p:spPr>
+      </p:sp>
+      <p:pic>
+        <p:nvPicPr>
+          <p:cNvPr id="37" name="Image 4" descr="preencoded.png">    </p:cNvPr>
+          <p:cNvPicPr>
+            <a:picLocks noChangeAspect="1"/>
+          </p:cNvPicPr>
+          <p:nvPr/>
+        </p:nvPicPr>
+        <p:blipFill>
+          <a:blip r:embed="rId5"/>
+          <a:stretch>
+            <a:fillRect/>
+          </a:stretch>
+        </p:blipFill>
+        <p:spPr>
+          <a:xfrm>
+            <a:off x="10588295" y="3568903"/>
+            <a:ext cx="451714" cy="451714"/>
+          </a:xfrm>
+          <a:prstGeom prst="rect">
+            <a:avLst/>
+          </a:prstGeom>
+        </p:spPr>
+      </p:pic>
+      <p:sp>
+        <p:nvSpPr>
+          <p:cNvPr id="38" name="Text 31"/>
+          <p:cNvSpPr/>
+          <p:nvPr/>
+        </p:nvSpPr>
+        <p:spPr>
+          <a:xfrm>
+            <a:off x="9899752" y="4343400"/>
+            <a:ext cx="1828800" cy="594360"/>
+          </a:xfrm>
+          <a:prstGeom prst="rect">
+            <a:avLst/>
+          </a:prstGeom>
+          <a:noFill/>
+          <a:ln/>
+        </p:spPr>
+        <p:txBody>
+          <a:bodyPr wrap="square" lIns="0" tIns="0" rIns="0" bIns="0" rtlCol="0" anchor="ctr"/>
+          <a:lstStyle/>
+          <a:p>
+            <a:pPr algn="ctr" indent="0" marL="0">
+              <a:lnSpc>
+                <a:spcPct val="105000"/>
+              </a:lnSpc>
+              <a:buNone/>
+            </a:pPr>
+            <a:r>
+              <a:rPr lang="en-US" sz="1300" b="1" dirty="0">
+                <a:solidFill>
+                  <a:srgbClr val="16192A"/>
+                </a:solidFill>
+                <a:latin typeface="Cambria" pitchFamily="34" charset="0"/>
+                <a:ea typeface="Cambria" pitchFamily="34" charset="-122"/>
+                <a:cs typeface="Cambria" pitchFamily="34" charset="-120"/>
+              </a:rPr>
+              <a:t>強化学習シミュレーター</a:t>
+            </a:r>
+            <a:endParaRPr lang="en-US" sz="1300" dirty="0"/>
+          </a:p>
+        </p:txBody>
+      </p:sp>
+      <p:sp>
+        <p:nvSpPr>
+          <p:cNvPr id="39" name="Text 32"/>
+          <p:cNvSpPr/>
+          <p:nvPr/>
+        </p:nvSpPr>
+        <p:spPr>
+          <a:xfrm>
+            <a:off x="9899752" y="4937760"/>
+            <a:ext cx="1828800" cy="640080"/>
+          </a:xfrm>
+          <a:prstGeom prst="rect">
+            <a:avLst/>
+          </a:prstGeom>
+          <a:noFill/>
+          <a:ln/>
+        </p:spPr>
+        <p:txBody>
+          <a:bodyPr wrap="square" lIns="0" tIns="0" rIns="0" bIns="0" rtlCol="0" anchor="ctr"/>
+          <a:lstStyle/>
+          <a:p>
+            <a:pPr algn="ctr" indent="0" marL="0">
+              <a:lnSpc>
+                <a:spcPct val="115000"/>
+              </a:lnSpc>
+              <a:buNone/>
+            </a:pPr>
+            <a:r>
+              <a:rPr lang="en-US" sz="950" dirty="0">
+                <a:solidFill>
+                  <a:srgbClr val="6B7280"/>
+                </a:solidFill>
+                <a:latin typeface="Calibri" pitchFamily="34" charset="0"/>
+                <a:ea typeface="Calibri" pitchFamily="34" charset="-122"/>
+                <a:cs typeface="Calibri" pitchFamily="34" charset="-120"/>
+              </a:rPr>
+              <a:t>togikaidrive-sim</a:t>
+            </a:r>
+            <a:endParaRPr lang="en-US" sz="950" dirty="0"/>
+          </a:p>
+        </p:txBody>
+      </p:sp>
+      <p:sp>
+        <p:nvSpPr>
+          <p:cNvPr id="40" name="Text 33"/>
+          <p:cNvSpPr/>
+          <p:nvPr/>
+        </p:nvSpPr>
+        <p:spPr>
+          <a:xfrm>
+            <a:off x="9899752" y="5623560"/>
+            <a:ext cx="1828800" cy="274320"/>
+          </a:xfrm>
+          <a:prstGeom prst="rect">
+            <a:avLst/>
+          </a:prstGeom>
+          <a:noFill/>
+          <a:ln/>
+        </p:spPr>
+        <p:txBody>
+          <a:bodyPr wrap="square" lIns="0" tIns="0" rIns="0" bIns="0" rtlCol="0" anchor="ctr"/>
+          <a:lstStyle/>
+          <a:p>
+            <a:pPr algn="ctr" indent="0" marL="0">
+              <a:buNone/>
+            </a:pPr>
+            <a:r>
+              <a:rPr lang="en-US" sz="900" b="1" dirty="0">
+                <a:solidFill>
+                  <a:srgbClr val="6B7280"/>
+                </a:solidFill>
+                <a:latin typeface="Calibri" pitchFamily="34" charset="0"/>
+                <a:ea typeface="Calibri" pitchFamily="34" charset="-122"/>
+                <a:cs typeface="Calibri" pitchFamily="34" charset="-120"/>
+              </a:rPr>
+              <a:t>p.16</a:t>
+            </a:r>
+            <a:endParaRPr lang="en-US" sz="900" dirty="0"/>
+          </a:p>
+        </p:txBody>
+      </p:sp>
+      <p:sp>
+        <p:nvSpPr>
+          <p:cNvPr id="41" name="Text 34"/>
+          <p:cNvSpPr/>
+          <p:nvPr/>
+        </p:nvSpPr>
+        <p:spPr>
+          <a:xfrm>
+            <a:off x="11521440" y="6446520"/>
+            <a:ext cx="548640" cy="274320"/>
+          </a:xfrm>
+          <a:prstGeom prst="rect">
+            <a:avLst/>
+          </a:prstGeom>
+          <a:noFill/>
+          <a:ln/>
+        </p:spPr>
+        <p:txBody>
+          <a:bodyPr wrap="square" lIns="0" tIns="0" rIns="0" bIns="0" rtlCol="0" anchor="ctr"/>
+          <a:lstStyle/>
+          <a:p>
+            <a:pPr algn="r" indent="0" marL="0">
+              <a:buNone/>
+            </a:pPr>
+            <a:r>
+              <a:rPr lang="en-US" sz="1000" dirty="0">
+                <a:solidFill>
+                  <a:srgbClr val="6B7280"/>
+                </a:solidFill>
+                <a:latin typeface="Calibri" pitchFamily="34" charset="0"/>
+                <a:ea typeface="Calibri" pitchFamily="34" charset="-122"/>
+                <a:cs typeface="Calibri" pitchFamily="34" charset="-120"/>
+              </a:rPr>
+              <a:t>11</a:t>
+            </a:r>
+            <a:endParaRPr lang="en-US" sz="1000" dirty="0"/>
+          </a:p>
+        </p:txBody>
+      </p:sp>
+    </p:spTree>
+  </p:cSld>
+  <p:clrMapOvr>
+    <a:masterClrMapping/>
+  </p:clrMapOvr>
+</p:sld>
+</file>
+
+<file path=ppt/slides/slide12.xml><?xml version="1.0" encoding="utf-8"?>
+<p:sld xmlns:a="http://schemas.openxmlformats.org/drawingml/2006/main" xmlns:r="http://schemas.openxmlformats.org/officeDocument/2006/relationships" xmlns:p="http://schemas.openxmlformats.org/presentationml/2006/main">
+  <p:cSld name="Slide 12">
+    <p:bg>
+      <p:bgPr>
+        <a:solidFill>
+          <a:srgbClr val="FFFFFF"/>
+        </a:solidFill>
+      </p:bgPr>
+    </p:bg>
+    <p:spTree>
+      <p:nvGrpSpPr>
+        <p:cNvPr id="1" name=""/>
+        <p:cNvGrpSpPr/>
+        <p:nvPr/>
+      </p:nvGrpSpPr>
+      <p:grpSpPr>
+        <a:xfrm>
+          <a:off x="0" y="0"/>
+          <a:ext cx="0" cy="0"/>
+          <a:chOff x="0" y="0"/>
+          <a:chExt cx="0" cy="0"/>
+        </a:xfrm>
+      </p:grpSpPr>
+      <p:sp>
+        <p:nvSpPr>
+          <p:cNvPr id="2" name="Text 0"/>
+          <p:cNvSpPr/>
+          <p:nvPr/>
+        </p:nvSpPr>
+        <p:spPr>
+          <a:xfrm>
+            <a:off x="548640" y="320040"/>
+            <a:ext cx="7315200" cy="320040"/>
+          </a:xfrm>
+          <a:prstGeom prst="rect">
+            <a:avLst/>
+          </a:prstGeom>
+          <a:noFill/>
+          <a:ln/>
+        </p:spPr>
+        <p:txBody>
+          <a:bodyPr wrap="square" lIns="0" tIns="0" rIns="0" bIns="0" rtlCol="0" anchor="ctr"/>
+          <a:lstStyle/>
+          <a:p>
+            <a:pPr indent="0" marL="0">
+              <a:buNone/>
+            </a:pPr>
+            <a:r>
+              <a:rPr lang="en-US" sz="1200" b="1" spc="200" kern="0" dirty="0">
+                <a:solidFill>
+                  <a:srgbClr val="FF4B2B"/>
+                </a:solidFill>
+                <a:latin typeface="Calibri" pitchFamily="34" charset="0"/>
+                <a:ea typeface="Calibri" pitchFamily="34" charset="-122"/>
+                <a:cs typeface="Calibri" pitchFamily="34" charset="-120"/>
+              </a:rPr>
+              <a:t>12 / LOCALIZATION/ (SLAM / VSLAM / ARUCO / AMCL)</a:t>
+            </a:r>
+            <a:endParaRPr lang="en-US" sz="1200" dirty="0"/>
+          </a:p>
+        </p:txBody>
+      </p:sp>
+      <p:sp>
+        <p:nvSpPr>
+          <p:cNvPr id="3" name="Text 1"/>
+          <p:cNvSpPr/>
+          <p:nvPr/>
+        </p:nvSpPr>
+        <p:spPr>
+          <a:xfrm>
+            <a:off x="548640" y="594360"/>
+            <a:ext cx="10515600" cy="640080"/>
+          </a:xfrm>
+          <a:prstGeom prst="rect">
+            <a:avLst/>
+          </a:prstGeom>
+          <a:noFill/>
+          <a:ln/>
+        </p:spPr>
+        <p:txBody>
+          <a:bodyPr wrap="square" lIns="0" tIns="0" rIns="0" bIns="0" rtlCol="0" anchor="ctr"/>
+          <a:lstStyle/>
+          <a:p>
+            <a:pPr indent="0" marL="0">
+              <a:buNone/>
+            </a:pPr>
+            <a:r>
+              <a:rPr lang="en-US" sz="3000" b="1" dirty="0">
+                <a:solidFill>
+                  <a:srgbClr val="16192A"/>
+                </a:solidFill>
+                <a:latin typeface="Cambria" pitchFamily="34" charset="0"/>
+                <a:ea typeface="Cambria" pitchFamily="34" charset="-122"/>
+                <a:cs typeface="Cambria" pitchFamily="34" charset="-120"/>
+              </a:rPr>
+              <a:t>自己位置推定 ― 「今どこにいるか」を知る</a:t>
+            </a:r>
+            <a:endParaRPr lang="en-US" sz="3000" dirty="0"/>
+          </a:p>
+        </p:txBody>
+      </p:sp>
+      <p:sp>
+        <p:nvSpPr>
+          <p:cNvPr id="4" name="Text 2"/>
+          <p:cNvSpPr/>
+          <p:nvPr/>
+        </p:nvSpPr>
+        <p:spPr>
+          <a:xfrm>
+            <a:off x="548640" y="1600200"/>
+            <a:ext cx="10881360" cy="502920"/>
+          </a:xfrm>
+          <a:prstGeom prst="rect">
+            <a:avLst/>
+          </a:prstGeom>
+          <a:noFill/>
+          <a:ln/>
+        </p:spPr>
+        <p:txBody>
+          <a:bodyPr wrap="square" lIns="0" tIns="0" rIns="0" bIns="0" rtlCol="0" anchor="ctr"/>
+          <a:lstStyle/>
+          <a:p>
+            <a:pPr indent="0" marL="0">
+              <a:lnSpc>
+                <a:spcPct val="120000"/>
+              </a:lnSpc>
+              <a:buNone/>
+            </a:pPr>
+            <a:r>
+              <a:rPr lang="en-US" sz="1300" dirty="0">
+                <a:solidFill>
+                  <a:srgbClr val="16192A"/>
+                </a:solidFill>
+                <a:latin typeface="Calibri" pitchFamily="34" charset="0"/>
+                <a:ea typeface="Calibri" pitchFamily="34" charset="-122"/>
+                <a:cs typeface="Calibri" pitchFamily="34" charset="-120"/>
+              </a:rPr>
+              <a:t>経路追従や最適制御を行うには、まず「自分が地図上のどこに・どの向きにいるか」を推定する必要がある。用途に応じて4種類の方式が用意されている。</a:t>
+            </a:r>
+            <a:endParaRPr lang="en-US" sz="1300" dirty="0"/>
+          </a:p>
+        </p:txBody>
+      </p:sp>
+      <p:graphicFrame>
+        <p:nvGraphicFramePr>
+          <p:cNvPr id="13" name="Table 0"/>
+          <p:cNvGraphicFramePr>
+            <a:graphicFrameLocks noGrp="1"/>
+          </p:cNvGraphicFramePr>
+          <p:nvPr>
+            <p:extLst>
+              <p:ext uri="{D42A27DB-BD31-4B8C-83A1-F6EECF244321}">
+                <p14:modId xmlns:p14="http://schemas.microsoft.com/office/powerpoint/2010/main" val="1579011935"/>
+              </p:ext>
+            </p:extLst>
+          </p:nvPr>
+        </p:nvGraphicFramePr>
+        <p:xfrm>
+          <a:off x="548640" y="2286000"/>
+          <a:ext cx="11091672" cy="2651760"/>
+        </p:xfrm>
+        <a:graphic>
+          <a:graphicData uri="http://schemas.openxmlformats.org/drawingml/2006/table">
+            <a:tbl>
+              <a:tblPr/>
+              <a:tblGrid>
+                <a:gridCol w="2103120"/>
+                <a:gridCol w="2286000"/>
+                <a:gridCol w="2560320"/>
+                <a:gridCol w="4142232"/>
+              </a:tblGrid>
+              <a:tr h="441960">
+                <a:tc>
+                  <a:txBody>
+                    <a:bodyPr/>
+                    <a:lstStyle/>
+                    <a:p>
+                      <a:pPr indent="0" marL="0">
+                        <a:buNone/>
+                      </a:pPr>
+                      <a:r>
+                        <a:rPr lang="en-US" sz="1050" b="1" dirty="0">
+                          <a:solidFill>
+                            <a:srgbClr val="FFFFFF"/>
+                          </a:solidFill>
+                          <a:latin typeface="Calibri" pitchFamily="34" charset="0"/>
+                          <a:ea typeface="Calibri" pitchFamily="34" charset="-122"/>
+                          <a:cs typeface="Calibri" pitchFamily="34" charset="-120"/>
+                        </a:rPr>
+                        <a:t>バックエンド</a:t>
+                      </a:r>
+                      <a:endParaRPr lang="en-US" sz="1050" dirty="0">
+                        <a:latin typeface="Calibri" charset="0"/>
+                        <a:ea typeface="Calibri" charset="0"/>
+                        <a:cs typeface="Calibri" charset="0"/>
+                      </a:endParaRPr>
+                    </a:p>
+                  </a:txBody>
+                  <a:tcPr marL="91440" marR="91440" marT="45720" marB="45720">
+                    <a:lnL w="0" cap="flat" cmpd="sng" algn="ctr">
+                      <a:noFill/>
+                    </a:lnL>
+                    <a:lnR w="0" cap="flat" cmpd="sng" algn="ctr">
+                      <a:noFill/>
+                    </a:lnR>
+                    <a:lnT w="0" cap="flat" cmpd="sng" algn="ctr">
+                      <a:noFill/>
+                    </a:lnT>
+                    <a:lnB w="0" cap="flat" cmpd="sng" algn="ctr">
+                      <a:noFill/>
+                    </a:lnB>
+                    <a:solidFill>
+                      <a:srgbClr val="10131A"/>
+                    </a:solidFill>
+                  </a:tcPr>
+                </a:tc>
+                <a:tc>
+                  <a:txBody>
+                    <a:bodyPr/>
+                    <a:lstStyle/>
+                    <a:p>
+                      <a:pPr indent="0" marL="0">
+                        <a:buNone/>
+                      </a:pPr>
+                      <a:r>
+                        <a:rPr lang="en-US" sz="1050" b="1" dirty="0">
+                          <a:solidFill>
+                            <a:srgbClr val="FFFFFF"/>
+                          </a:solidFill>
+                          <a:latin typeface="Calibri" pitchFamily="34" charset="0"/>
+                          <a:ea typeface="Calibri" pitchFamily="34" charset="-122"/>
+                          <a:cs typeface="Calibri" pitchFamily="34" charset="-120"/>
+                        </a:rPr>
+                        <a:t>使用センサー</a:t>
+                      </a:r>
+                      <a:endParaRPr lang="en-US" sz="1050" dirty="0">
+                        <a:latin typeface="Calibri" charset="0"/>
+                        <a:ea typeface="Calibri" charset="0"/>
+                        <a:cs typeface="Calibri" charset="0"/>
+                      </a:endParaRPr>
+                    </a:p>
+                  </a:txBody>
+                  <a:tcPr marL="91440" marR="91440" marT="45720" marB="45720">
+                    <a:lnL w="0" cap="flat" cmpd="sng" algn="ctr">
+                      <a:noFill/>
+                    </a:lnL>
+                    <a:lnR w="0" cap="flat" cmpd="sng" algn="ctr">
+                      <a:noFill/>
+                    </a:lnR>
+                    <a:lnT w="0" cap="flat" cmpd="sng" algn="ctr">
+                      <a:noFill/>
+                    </a:lnT>
+                    <a:lnB w="0" cap="flat" cmpd="sng" algn="ctr">
+                      <a:noFill/>
+                    </a:lnB>
+                    <a:solidFill>
+                      <a:srgbClr val="10131A"/>
+                    </a:solidFill>
+                  </a:tcPr>
+                </a:tc>
+                <a:tc>
+                  <a:txBody>
+                    <a:bodyPr/>
+                    <a:lstStyle/>
+                    <a:p>
+                      <a:pPr indent="0" marL="0">
+                        <a:buNone/>
+                      </a:pPr>
+                      <a:r>
+                        <a:rPr lang="en-US" sz="1050" b="1" dirty="0">
+                          <a:solidFill>
+                            <a:srgbClr val="FFFFFF"/>
+                          </a:solidFill>
+                          <a:latin typeface="Calibri" pitchFamily="34" charset="0"/>
+                          <a:ea typeface="Calibri" pitchFamily="34" charset="-122"/>
+                          <a:cs typeface="Calibri" pitchFamily="34" charset="-120"/>
+                        </a:rPr>
+                        <a:t>必要環境</a:t>
+                      </a:r>
+                      <a:endParaRPr lang="en-US" sz="1050" dirty="0">
+                        <a:latin typeface="Calibri" charset="0"/>
+                        <a:ea typeface="Calibri" charset="0"/>
+                        <a:cs typeface="Calibri" charset="0"/>
+                      </a:endParaRPr>
+                    </a:p>
+                  </a:txBody>
+                  <a:tcPr marL="91440" marR="91440" marT="45720" marB="45720">
+                    <a:lnL w="0" cap="flat" cmpd="sng" algn="ctr">
+                      <a:noFill/>
+                    </a:lnL>
+                    <a:lnR w="0" cap="flat" cmpd="sng" algn="ctr">
+                      <a:noFill/>
+                    </a:lnR>
+                    <a:lnT w="0" cap="flat" cmpd="sng" algn="ctr">
+                      <a:noFill/>
+                    </a:lnT>
+                    <a:lnB w="0" cap="flat" cmpd="sng" algn="ctr">
+                      <a:noFill/>
+                    </a:lnB>
+                    <a:solidFill>
+                      <a:srgbClr val="10131A"/>
+                    </a:solidFill>
+                  </a:tcPr>
+                </a:tc>
+                <a:tc>
+                  <a:txBody>
+                    <a:bodyPr/>
+                    <a:lstStyle/>
+                    <a:p>
+                      <a:pPr indent="0" marL="0">
+                        <a:buNone/>
+                      </a:pPr>
+                      <a:r>
+                        <a:rPr lang="en-US" sz="1050" b="1" dirty="0">
+                          <a:solidFill>
+                            <a:srgbClr val="FFFFFF"/>
+                          </a:solidFill>
+                          <a:latin typeface="Calibri" pitchFamily="34" charset="0"/>
+                          <a:ea typeface="Calibri" pitchFamily="34" charset="-122"/>
+                          <a:cs typeface="Calibri" pitchFamily="34" charset="-120"/>
+                        </a:rPr>
+                        <a:t>方式</a:t>
+                      </a:r>
+                      <a:endParaRPr lang="en-US" sz="1050" dirty="0">
+                        <a:latin typeface="Calibri" charset="0"/>
+                        <a:ea typeface="Calibri" charset="0"/>
+                        <a:cs typeface="Calibri" charset="0"/>
+                      </a:endParaRPr>
+                    </a:p>
+                  </a:txBody>
+                  <a:tcPr marL="91440" marR="91440" marT="45720" marB="45720">
+                    <a:lnL w="0" cap="flat" cmpd="sng" algn="ctr">
+                      <a:noFill/>
+                    </a:lnL>
+                    <a:lnR w="0" cap="flat" cmpd="sng" algn="ctr">
+                      <a:noFill/>
+                    </a:lnR>
+                    <a:lnT w="0" cap="flat" cmpd="sng" algn="ctr">
+                      <a:noFill/>
+                    </a:lnT>
+                    <a:lnB w="0" cap="flat" cmpd="sng" algn="ctr">
+                      <a:noFill/>
+                    </a:lnB>
+                    <a:solidFill>
+                      <a:srgbClr val="10131A"/>
+                    </a:solidFill>
+                  </a:tcPr>
+                </a:tc>
+              </a:tr>
+              <a:tr h="441960">
+                <a:tc>
+                  <a:txBody>
+                    <a:bodyPr/>
+                    <a:lstStyle/>
+                    <a:p>
+                      <a:pPr indent="0" marL="0">
+                        <a:buNone/>
+                      </a:pPr>
+                      <a:r>
+                        <a:rPr lang="en-US" sz="1000" b="1" dirty="0">
+                          <a:solidFill>
+                            <a:srgbClr val="FF4B2B"/>
+                          </a:solidFill>
+                          <a:latin typeface="Calibri" pitchFamily="34" charset="0"/>
+                          <a:ea typeface="Calibri" pitchFamily="34" charset="-122"/>
+                          <a:cs typeface="Calibri" pitchFamily="34" charset="-120"/>
+                        </a:rPr>
+                        <a:t>lidar_slam</a:t>
+                      </a:r>
+                      <a:endParaRPr lang="en-US" sz="1000" dirty="0">
+                        <a:latin typeface="Calibri" charset="0"/>
+                        <a:ea typeface="Calibri" charset="0"/>
+                        <a:cs typeface="Calibri" charset="0"/>
+                      </a:endParaRPr>
+                    </a:p>
+                  </a:txBody>
+                  <a:tcPr marL="91440" marR="91440" marT="45720" marB="45720">
+                    <a:lnL w="0" cap="flat" cmpd="sng" algn="ctr">
+                      <a:noFill/>
+                    </a:lnL>
+                    <a:lnR w="0" cap="flat" cmpd="sng" algn="ctr">
+                      <a:noFill/>
+                    </a:lnR>
+                    <a:lnT w="0" cap="flat" cmpd="sng" algn="ctr">
+                      <a:noFill/>
+                    </a:lnT>
+                    <a:lnB w="0" cap="flat" cmpd="sng" algn="ctr">
+                      <a:noFill/>
+                    </a:lnB>
+                    <a:solidFill>
+                      <a:srgbClr val="FFFFFF"/>
+                    </a:solidFill>
+                  </a:tcPr>
+                </a:tc>
+                <a:tc>
+                  <a:txBody>
+                    <a:bodyPr/>
+                    <a:lstStyle/>
+                    <a:p>
+                      <a:pPr indent="0" marL="0">
+                        <a:buNone/>
+                      </a:pPr>
+                      <a:r>
+                        <a:rPr lang="en-US" sz="1000" dirty="0">
+                          <a:solidFill>
+                            <a:srgbClr val="16192A"/>
+                          </a:solidFill>
+                          <a:latin typeface="Calibri" pitchFamily="34" charset="0"/>
+                          <a:ea typeface="Calibri" pitchFamily="34" charset="-122"/>
+                          <a:cs typeface="Calibri" pitchFamily="34" charset="-120"/>
+                        </a:rPr>
+                        <a:t>2D LiDAR</a:t>
+                      </a:r>
+                      <a:endParaRPr lang="en-US" sz="1000" dirty="0">
+                        <a:latin typeface="Calibri" charset="0"/>
+                        <a:ea typeface="Calibri" charset="0"/>
+                        <a:cs typeface="Calibri" charset="0"/>
+                      </a:endParaRPr>
+                    </a:p>
+                  </a:txBody>
+                  <a:tcPr marL="91440" marR="91440" marT="45720" marB="45720">
+                    <a:lnL w="0" cap="flat" cmpd="sng" algn="ctr">
+                      <a:noFill/>
+                    </a:lnL>
+                    <a:lnR w="0" cap="flat" cmpd="sng" algn="ctr">
+                      <a:noFill/>
+                    </a:lnR>
+                    <a:lnT w="0" cap="flat" cmpd="sng" algn="ctr">
+                      <a:noFill/>
+                    </a:lnT>
+                    <a:lnB w="0" cap="flat" cmpd="sng" algn="ctr">
+                      <a:noFill/>
+                    </a:lnB>
+                    <a:solidFill>
+                      <a:srgbClr val="FFFFFF"/>
+                    </a:solidFill>
+                  </a:tcPr>
+                </a:tc>
+                <a:tc>
+                  <a:txBody>
+                    <a:bodyPr/>
+                    <a:lstStyle/>
+                    <a:p>
+                      <a:pPr indent="0" marL="0">
+                        <a:buNone/>
+                      </a:pPr>
+                      <a:r>
+                        <a:rPr lang="en-US" sz="1000" dirty="0">
+                          <a:solidFill>
+                            <a:srgbClr val="16192A"/>
+                          </a:solidFill>
+                          <a:latin typeface="Calibri" pitchFamily="34" charset="0"/>
+                          <a:ea typeface="Calibri" pitchFamily="34" charset="-122"/>
+                          <a:cs typeface="Calibri" pitchFamily="34" charset="-120"/>
+                        </a:rPr>
+                        <a:t>不要(numpy/scipyのみ)</a:t>
+                      </a:r>
+                      <a:endParaRPr lang="en-US" sz="1000" dirty="0">
+                        <a:latin typeface="Calibri" charset="0"/>
+                        <a:ea typeface="Calibri" charset="0"/>
+                        <a:cs typeface="Calibri" charset="0"/>
+                      </a:endParaRPr>
+                    </a:p>
+                  </a:txBody>
+                  <a:tcPr marL="91440" marR="91440" marT="45720" marB="45720">
+                    <a:lnL w="0" cap="flat" cmpd="sng" algn="ctr">
+                      <a:noFill/>
+                    </a:lnL>
+                    <a:lnR w="0" cap="flat" cmpd="sng" algn="ctr">
+                      <a:noFill/>
+                    </a:lnR>
+                    <a:lnT w="0" cap="flat" cmpd="sng" algn="ctr">
+                      <a:noFill/>
+                    </a:lnT>
+                    <a:lnB w="0" cap="flat" cmpd="sng" algn="ctr">
+                      <a:noFill/>
+                    </a:lnB>
+                    <a:solidFill>
+                      <a:srgbClr val="FFFFFF"/>
+                    </a:solidFill>
+                  </a:tcPr>
+                </a:tc>
+                <a:tc>
+                  <a:txBody>
+                    <a:bodyPr/>
+                    <a:lstStyle/>
+                    <a:p>
+                      <a:pPr indent="0" marL="0">
+                        <a:buNone/>
+                      </a:pPr>
+                      <a:r>
+                        <a:rPr lang="en-US" sz="1000" dirty="0">
+                          <a:solidFill>
+                            <a:srgbClr val="16192A"/>
+                          </a:solidFill>
+                          <a:latin typeface="Calibri" pitchFamily="34" charset="0"/>
+                          <a:ea typeface="Calibri" pitchFamily="34" charset="-122"/>
+                          <a:cs typeface="Calibri" pitchFamily="34" charset="-120"/>
+                        </a:rPr>
+                        <a:t>占有格子地図 + スキャンマッチング(自前実装)</a:t>
+                      </a:r>
+                      <a:endParaRPr lang="en-US" sz="1000" dirty="0">
+                        <a:latin typeface="Calibri" charset="0"/>
+                        <a:ea typeface="Calibri" charset="0"/>
+                        <a:cs typeface="Calibri" charset="0"/>
+                      </a:endParaRPr>
+                    </a:p>
+                  </a:txBody>
+                  <a:tcPr marL="91440" marR="91440" marT="45720" marB="45720">
+                    <a:lnL w="0" cap="flat" cmpd="sng" algn="ctr">
+                      <a:noFill/>
+                    </a:lnL>
+                    <a:lnR w="0" cap="flat" cmpd="sng" algn="ctr">
+                      <a:noFill/>
+                    </a:lnR>
+                    <a:lnT w="0" cap="flat" cmpd="sng" algn="ctr">
+                      <a:noFill/>
+                    </a:lnT>
+                    <a:lnB w="0" cap="flat" cmpd="sng" algn="ctr">
+                      <a:noFill/>
+                    </a:lnB>
+                    <a:solidFill>
+                      <a:srgbClr val="FFFFFF"/>
+                    </a:solidFill>
+                  </a:tcPr>
+                </a:tc>
+              </a:tr>
+              <a:tr h="441960">
+                <a:tc>
+                  <a:txBody>
+                    <a:bodyPr/>
+                    <a:lstStyle/>
+                    <a:p>
+                      <a:pPr indent="0" marL="0">
+                        <a:buNone/>
+                      </a:pPr>
+                      <a:r>
+                        <a:rPr lang="en-US" sz="1000" b="1" dirty="0">
+                          <a:solidFill>
+                            <a:srgbClr val="FF4B2B"/>
+                          </a:solidFill>
+                          <a:latin typeface="Calibri" pitchFamily="34" charset="0"/>
+                          <a:ea typeface="Calibri" pitchFamily="34" charset="-122"/>
+                          <a:cs typeface="Calibri" pitchFamily="34" charset="-120"/>
+                        </a:rPr>
+                        <a:t>slam_toolbox</a:t>
+                      </a:r>
+                      <a:endParaRPr lang="en-US" sz="1000" dirty="0">
+                        <a:latin typeface="Calibri" charset="0"/>
+                        <a:ea typeface="Calibri" charset="0"/>
+                        <a:cs typeface="Calibri" charset="0"/>
+                      </a:endParaRPr>
+                    </a:p>
+                  </a:txBody>
+                  <a:tcPr marL="91440" marR="91440" marT="45720" marB="45720">
+                    <a:lnL w="0" cap="flat" cmpd="sng" algn="ctr">
+                      <a:noFill/>
+                    </a:lnL>
+                    <a:lnR w="0" cap="flat" cmpd="sng" algn="ctr">
+                      <a:noFill/>
+                    </a:lnR>
+                    <a:lnT w="0" cap="flat" cmpd="sng" algn="ctr">
+                      <a:noFill/>
+                    </a:lnT>
+                    <a:lnB w="0" cap="flat" cmpd="sng" algn="ctr">
+                      <a:noFill/>
+                    </a:lnB>
+                    <a:solidFill>
+                      <a:srgbClr val="F3F5FA"/>
+                    </a:solidFill>
+                  </a:tcPr>
+                </a:tc>
+                <a:tc>
+                  <a:txBody>
+                    <a:bodyPr/>
+                    <a:lstStyle/>
+                    <a:p>
+                      <a:pPr indent="0" marL="0">
+                        <a:buNone/>
+                      </a:pPr>
+                      <a:r>
+                        <a:rPr lang="en-US" sz="1000" dirty="0">
+                          <a:solidFill>
+                            <a:srgbClr val="16192A"/>
+                          </a:solidFill>
+                          <a:latin typeface="Calibri" pitchFamily="34" charset="0"/>
+                          <a:ea typeface="Calibri" pitchFamily="34" charset="-122"/>
+                          <a:cs typeface="Calibri" pitchFamily="34" charset="-120"/>
+                        </a:rPr>
+                        <a:t>2D LiDAR</a:t>
+                      </a:r>
+                      <a:endParaRPr lang="en-US" sz="1000" dirty="0">
+                        <a:latin typeface="Calibri" charset="0"/>
+                        <a:ea typeface="Calibri" charset="0"/>
+                        <a:cs typeface="Calibri" charset="0"/>
+                      </a:endParaRPr>
+                    </a:p>
+                  </a:txBody>
+                  <a:tcPr marL="91440" marR="91440" marT="45720" marB="45720">
+                    <a:lnL w="0" cap="flat" cmpd="sng" algn="ctr">
+                      <a:noFill/>
+                    </a:lnL>
+                    <a:lnR w="0" cap="flat" cmpd="sng" algn="ctr">
+                      <a:noFill/>
+                    </a:lnR>
+                    <a:lnT w="0" cap="flat" cmpd="sng" algn="ctr">
+                      <a:noFill/>
+                    </a:lnT>
+                    <a:lnB w="0" cap="flat" cmpd="sng" algn="ctr">
+                      <a:noFill/>
+                    </a:lnB>
+                    <a:solidFill>
+                      <a:srgbClr val="F3F5FA"/>
+                    </a:solidFill>
+                  </a:tcPr>
+                </a:tc>
+                <a:tc>
+                  <a:txBody>
+                    <a:bodyPr/>
+                    <a:lstStyle/>
+                    <a:p>
+                      <a:pPr indent="0" marL="0">
+                        <a:buNone/>
+                      </a:pPr>
+                      <a:r>
+                        <a:rPr lang="en-US" sz="1000" dirty="0">
+                          <a:solidFill>
+                            <a:srgbClr val="16192A"/>
+                          </a:solidFill>
+                          <a:latin typeface="Calibri" pitchFamily="34" charset="0"/>
+                          <a:ea typeface="Calibri" pitchFamily="34" charset="-122"/>
+                          <a:cs typeface="Calibri" pitchFamily="34" charset="-120"/>
+                        </a:rPr>
+                        <a:t>ROS2必須</a:t>
+                      </a:r>
+                      <a:endParaRPr lang="en-US" sz="1000" dirty="0">
+                        <a:latin typeface="Calibri" charset="0"/>
+                        <a:ea typeface="Calibri" charset="0"/>
+                        <a:cs typeface="Calibri" charset="0"/>
+                      </a:endParaRPr>
+                    </a:p>
+                  </a:txBody>
+                  <a:tcPr marL="91440" marR="91440" marT="45720" marB="45720">
+                    <a:lnL w="0" cap="flat" cmpd="sng" algn="ctr">
+                      <a:noFill/>
+                    </a:lnL>
+                    <a:lnR w="0" cap="flat" cmpd="sng" algn="ctr">
+                      <a:noFill/>
+                    </a:lnR>
+                    <a:lnT w="0" cap="flat" cmpd="sng" algn="ctr">
+                      <a:noFill/>
+                    </a:lnT>
+                    <a:lnB w="0" cap="flat" cmpd="sng" algn="ctr">
+                      <a:noFill/>
+                    </a:lnB>
+                    <a:solidFill>
+                      <a:srgbClr val="F3F5FA"/>
+                    </a:solidFill>
+                  </a:tcPr>
+                </a:tc>
+                <a:tc>
+                  <a:txBody>
+                    <a:bodyPr/>
+                    <a:lstStyle/>
+                    <a:p>
+                      <a:pPr indent="0" marL="0">
+                        <a:buNone/>
+                      </a:pPr>
+                      <a:r>
+                        <a:rPr lang="en-US" sz="1000" dirty="0">
+                          <a:solidFill>
+                            <a:srgbClr val="16192A"/>
+                          </a:solidFill>
+                          <a:latin typeface="Calibri" pitchFamily="34" charset="0"/>
+                          <a:ea typeface="Calibri" pitchFamily="34" charset="-122"/>
+                          <a:cs typeface="Calibri" pitchFamily="34" charset="-120"/>
+                        </a:rPr>
+                        <a:t>ポーズグラフSLAM。ループクロージャ対応</a:t>
+                      </a:r>
+                      <a:endParaRPr lang="en-US" sz="1000" dirty="0">
+                        <a:latin typeface="Calibri" charset="0"/>
+                        <a:ea typeface="Calibri" charset="0"/>
+                        <a:cs typeface="Calibri" charset="0"/>
+                      </a:endParaRPr>
+                    </a:p>
+                  </a:txBody>
+                  <a:tcPr marL="91440" marR="91440" marT="45720" marB="45720">
+                    <a:lnL w="0" cap="flat" cmpd="sng" algn="ctr">
+                      <a:noFill/>
+                    </a:lnL>
+                    <a:lnR w="0" cap="flat" cmpd="sng" algn="ctr">
+                      <a:noFill/>
+                    </a:lnR>
+                    <a:lnT w="0" cap="flat" cmpd="sng" algn="ctr">
+                      <a:noFill/>
+                    </a:lnT>
+                    <a:lnB w="0" cap="flat" cmpd="sng" algn="ctr">
+                      <a:noFill/>
+                    </a:lnB>
+                    <a:solidFill>
+                      <a:srgbClr val="F3F5FA"/>
+                    </a:solidFill>
+                  </a:tcPr>
+                </a:tc>
+              </a:tr>
+              <a:tr h="441960">
+                <a:tc>
+                  <a:txBody>
+                    <a:bodyPr/>
+                    <a:lstStyle/>
+                    <a:p>
+                      <a:pPr indent="0" marL="0">
+                        <a:buNone/>
+                      </a:pPr>
+                      <a:r>
+                        <a:rPr lang="en-US" sz="1000" b="1" dirty="0">
+                          <a:solidFill>
+                            <a:srgbClr val="FF4B2B"/>
+                          </a:solidFill>
+                          <a:latin typeface="Calibri" pitchFamily="34" charset="0"/>
+                          <a:ea typeface="Calibri" pitchFamily="34" charset="-122"/>
+                          <a:cs typeface="Calibri" pitchFamily="34" charset="-120"/>
+                        </a:rPr>
+                        <a:t>amcl</a:t>
+                      </a:r>
+                      <a:endParaRPr lang="en-US" sz="1000" dirty="0">
+                        <a:latin typeface="Calibri" charset="0"/>
+                        <a:ea typeface="Calibri" charset="0"/>
+                        <a:cs typeface="Calibri" charset="0"/>
+                      </a:endParaRPr>
+                    </a:p>
+                  </a:txBody>
+                  <a:tcPr marL="91440" marR="91440" marT="45720" marB="45720">
+                    <a:lnL w="0" cap="flat" cmpd="sng" algn="ctr">
+                      <a:noFill/>
+                    </a:lnL>
+                    <a:lnR w="0" cap="flat" cmpd="sng" algn="ctr">
+                      <a:noFill/>
+                    </a:lnR>
+                    <a:lnT w="0" cap="flat" cmpd="sng" algn="ctr">
+                      <a:noFill/>
+                    </a:lnT>
+                    <a:lnB w="0" cap="flat" cmpd="sng" algn="ctr">
+                      <a:noFill/>
+                    </a:lnB>
+                    <a:solidFill>
+                      <a:srgbClr val="FFFFFF"/>
+                    </a:solidFill>
+                  </a:tcPr>
+                </a:tc>
+                <a:tc>
+                  <a:txBody>
+                    <a:bodyPr/>
+                    <a:lstStyle/>
+                    <a:p>
+                      <a:pPr indent="0" marL="0">
+                        <a:buNone/>
+                      </a:pPr>
+                      <a:r>
+                        <a:rPr lang="en-US" sz="1000" dirty="0">
+                          <a:solidFill>
+                            <a:srgbClr val="16192A"/>
+                          </a:solidFill>
+                          <a:latin typeface="Calibri" pitchFamily="34" charset="0"/>
+                          <a:ea typeface="Calibri" pitchFamily="34" charset="-122"/>
+                          <a:cs typeface="Calibri" pitchFamily="34" charset="-120"/>
+                        </a:rPr>
+                        <a:t>LiDAR + 事前地図</a:t>
+                      </a:r>
+                      <a:endParaRPr lang="en-US" sz="1000" dirty="0">
+                        <a:latin typeface="Calibri" charset="0"/>
+                        <a:ea typeface="Calibri" charset="0"/>
+                        <a:cs typeface="Calibri" charset="0"/>
+                      </a:endParaRPr>
+                    </a:p>
+                  </a:txBody>
+                  <a:tcPr marL="91440" marR="91440" marT="45720" marB="45720">
+                    <a:lnL w="0" cap="flat" cmpd="sng" algn="ctr">
+                      <a:noFill/>
+                    </a:lnL>
+                    <a:lnR w="0" cap="flat" cmpd="sng" algn="ctr">
+                      <a:noFill/>
+                    </a:lnR>
+                    <a:lnT w="0" cap="flat" cmpd="sng" algn="ctr">
+                      <a:noFill/>
+                    </a:lnT>
+                    <a:lnB w="0" cap="flat" cmpd="sng" algn="ctr">
+                      <a:noFill/>
+                    </a:lnB>
+                    <a:solidFill>
+                      <a:srgbClr val="FFFFFF"/>
+                    </a:solidFill>
+                  </a:tcPr>
+                </a:tc>
+                <a:tc>
+                  <a:txBody>
+                    <a:bodyPr/>
+                    <a:lstStyle/>
+                    <a:p>
+                      <a:pPr indent="0" marL="0">
+                        <a:buNone/>
+                      </a:pPr>
+                      <a:r>
+                        <a:rPr lang="en-US" sz="1000" dirty="0">
+                          <a:solidFill>
+                            <a:srgbClr val="16192A"/>
+                          </a:solidFill>
+                          <a:latin typeface="Calibri" pitchFamily="34" charset="0"/>
+                          <a:ea typeface="Calibri" pitchFamily="34" charset="-122"/>
+                          <a:cs typeface="Calibri" pitchFamily="34" charset="-120"/>
+                        </a:rPr>
+                        <a:t>ROS2必須</a:t>
+                      </a:r>
+                      <a:endParaRPr lang="en-US" sz="1000" dirty="0">
+                        <a:latin typeface="Calibri" charset="0"/>
+                        <a:ea typeface="Calibri" charset="0"/>
+                        <a:cs typeface="Calibri" charset="0"/>
+                      </a:endParaRPr>
+                    </a:p>
+                  </a:txBody>
+                  <a:tcPr marL="91440" marR="91440" marT="45720" marB="45720">
+                    <a:lnL w="0" cap="flat" cmpd="sng" algn="ctr">
+                      <a:noFill/>
+                    </a:lnL>
+                    <a:lnR w="0" cap="flat" cmpd="sng" algn="ctr">
+                      <a:noFill/>
+                    </a:lnR>
+                    <a:lnT w="0" cap="flat" cmpd="sng" algn="ctr">
+                      <a:noFill/>
+                    </a:lnT>
+                    <a:lnB w="0" cap="flat" cmpd="sng" algn="ctr">
+                      <a:noFill/>
+                    </a:lnB>
+                    <a:solidFill>
+                      <a:srgbClr val="FFFFFF"/>
+                    </a:solidFill>
+                  </a:tcPr>
+                </a:tc>
+                <a:tc>
+                  <a:txBody>
+                    <a:bodyPr/>
+                    <a:lstStyle/>
+                    <a:p>
+                      <a:pPr indent="0" marL="0">
+                        <a:buNone/>
+                      </a:pPr>
+                      <a:r>
+                        <a:rPr lang="en-US" sz="1000" dirty="0">
+                          <a:solidFill>
+                            <a:srgbClr val="16192A"/>
+                          </a:solidFill>
+                          <a:latin typeface="Calibri" pitchFamily="34" charset="0"/>
+                          <a:ea typeface="Calibri" pitchFamily="34" charset="-122"/>
+                          <a:cs typeface="Calibri" pitchFamily="34" charset="-120"/>
+                        </a:rPr>
+                        <a:t>パーティクルフィルタで保存済み地図に対して自己位置推定</a:t>
+                      </a:r>
+                      <a:endParaRPr lang="en-US" sz="1000" dirty="0">
+                        <a:latin typeface="Calibri" charset="0"/>
+                        <a:ea typeface="Calibri" charset="0"/>
+                        <a:cs typeface="Calibri" charset="0"/>
+                      </a:endParaRPr>
+                    </a:p>
+                  </a:txBody>
+                  <a:tcPr marL="91440" marR="91440" marT="45720" marB="45720">
+                    <a:lnL w="0" cap="flat" cmpd="sng" algn="ctr">
+                      <a:noFill/>
+                    </a:lnL>
+                    <a:lnR w="0" cap="flat" cmpd="sng" algn="ctr">
+                      <a:noFill/>
+                    </a:lnR>
+                    <a:lnT w="0" cap="flat" cmpd="sng" algn="ctr">
+                      <a:noFill/>
+                    </a:lnT>
+                    <a:lnB w="0" cap="flat" cmpd="sng" algn="ctr">
+                      <a:noFill/>
+                    </a:lnB>
+                    <a:solidFill>
+                      <a:srgbClr val="FFFFFF"/>
+                    </a:solidFill>
+                  </a:tcPr>
+                </a:tc>
+              </a:tr>
+              <a:tr h="441960">
+                <a:tc>
+                  <a:txBody>
+                    <a:bodyPr/>
+                    <a:lstStyle/>
+                    <a:p>
+                      <a:pPr indent="0" marL="0">
+                        <a:buNone/>
+                      </a:pPr>
+                      <a:r>
+                        <a:rPr lang="en-US" sz="1000" b="1" dirty="0">
+                          <a:solidFill>
+                            <a:srgbClr val="FF4B2B"/>
+                          </a:solidFill>
+                          <a:latin typeface="Calibri" pitchFamily="34" charset="0"/>
+                          <a:ea typeface="Calibri" pitchFamily="34" charset="-122"/>
+                          <a:cs typeface="Calibri" pitchFamily="34" charset="-120"/>
+                        </a:rPr>
+                        <a:t>visual_slam (VSLAM)</a:t>
+                      </a:r>
+                      <a:endParaRPr lang="en-US" sz="1000" dirty="0">
+                        <a:latin typeface="Calibri" charset="0"/>
+                        <a:ea typeface="Calibri" charset="0"/>
+                        <a:cs typeface="Calibri" charset="0"/>
+                      </a:endParaRPr>
+                    </a:p>
+                  </a:txBody>
+                  <a:tcPr marL="91440" marR="91440" marT="45720" marB="45720">
+                    <a:lnL w="0" cap="flat" cmpd="sng" algn="ctr">
+                      <a:noFill/>
+                    </a:lnL>
+                    <a:lnR w="0" cap="flat" cmpd="sng" algn="ctr">
+                      <a:noFill/>
+                    </a:lnR>
+                    <a:lnT w="0" cap="flat" cmpd="sng" algn="ctr">
+                      <a:noFill/>
+                    </a:lnT>
+                    <a:lnB w="0" cap="flat" cmpd="sng" algn="ctr">
+                      <a:noFill/>
+                    </a:lnB>
+                    <a:solidFill>
+                      <a:srgbClr val="F3F5FA"/>
+                    </a:solidFill>
+                  </a:tcPr>
+                </a:tc>
+                <a:tc>
+                  <a:txBody>
+                    <a:bodyPr/>
+                    <a:lstStyle/>
+                    <a:p>
+                      <a:pPr indent="0" marL="0">
+                        <a:buNone/>
+                      </a:pPr>
+                      <a:r>
+                        <a:rPr lang="en-US" sz="1000" dirty="0">
+                          <a:solidFill>
+                            <a:srgbClr val="16192A"/>
+                          </a:solidFill>
+                          <a:latin typeface="Calibri" pitchFamily="34" charset="0"/>
+                          <a:ea typeface="Calibri" pitchFamily="34" charset="-122"/>
+                          <a:cs typeface="Calibri" pitchFamily="34" charset="-120"/>
+                        </a:rPr>
+                        <a:t>RealSense D435i</a:t>
+                      </a:r>
+                      <a:endParaRPr lang="en-US" sz="1000" dirty="0">
+                        <a:latin typeface="Calibri" charset="0"/>
+                        <a:ea typeface="Calibri" charset="0"/>
+                        <a:cs typeface="Calibri" charset="0"/>
+                      </a:endParaRPr>
+                    </a:p>
+                  </a:txBody>
+                  <a:tcPr marL="91440" marR="91440" marT="45720" marB="45720">
+                    <a:lnL w="0" cap="flat" cmpd="sng" algn="ctr">
+                      <a:noFill/>
+                    </a:lnL>
+                    <a:lnR w="0" cap="flat" cmpd="sng" algn="ctr">
+                      <a:noFill/>
+                    </a:lnR>
+                    <a:lnT w="0" cap="flat" cmpd="sng" algn="ctr">
+                      <a:noFill/>
+                    </a:lnT>
+                    <a:lnB w="0" cap="flat" cmpd="sng" algn="ctr">
+                      <a:noFill/>
+                    </a:lnB>
+                    <a:solidFill>
+                      <a:srgbClr val="F3F5FA"/>
+                    </a:solidFill>
+                  </a:tcPr>
+                </a:tc>
+                <a:tc>
+                  <a:txBody>
+                    <a:bodyPr/>
+                    <a:lstStyle/>
+                    <a:p>
+                      <a:pPr indent="0" marL="0">
+                        <a:buNone/>
+                      </a:pPr>
+                      <a:r>
+                        <a:rPr lang="en-US" sz="1000" dirty="0">
+                          <a:solidFill>
+                            <a:srgbClr val="16192A"/>
+                          </a:solidFill>
+                          <a:latin typeface="Calibri" pitchFamily="34" charset="0"/>
+                          <a:ea typeface="Calibri" pitchFamily="34" charset="-122"/>
+                          <a:cs typeface="Calibri" pitchFamily="34" charset="-120"/>
+                        </a:rPr>
+                        <a:t>ROS2 + Isaac ROS必須</a:t>
+                      </a:r>
+                      <a:endParaRPr lang="en-US" sz="1000" dirty="0">
+                        <a:latin typeface="Calibri" charset="0"/>
+                        <a:ea typeface="Calibri" charset="0"/>
+                        <a:cs typeface="Calibri" charset="0"/>
+                      </a:endParaRPr>
+                    </a:p>
+                  </a:txBody>
+                  <a:tcPr marL="91440" marR="91440" marT="45720" marB="45720">
+                    <a:lnL w="0" cap="flat" cmpd="sng" algn="ctr">
+                      <a:noFill/>
+                    </a:lnL>
+                    <a:lnR w="0" cap="flat" cmpd="sng" algn="ctr">
+                      <a:noFill/>
+                    </a:lnR>
+                    <a:lnT w="0" cap="flat" cmpd="sng" algn="ctr">
+                      <a:noFill/>
+                    </a:lnT>
+                    <a:lnB w="0" cap="flat" cmpd="sng" algn="ctr">
+                      <a:noFill/>
+                    </a:lnB>
+                    <a:solidFill>
+                      <a:srgbClr val="F3F5FA"/>
+                    </a:solidFill>
+                  </a:tcPr>
+                </a:tc>
+                <a:tc>
+                  <a:txBody>
+                    <a:bodyPr/>
+                    <a:lstStyle/>
+                    <a:p>
+                      <a:pPr indent="0" marL="0">
+                        <a:buNone/>
+                      </a:pPr>
+                      <a:r>
+                        <a:rPr lang="en-US" sz="1000" dirty="0">
+                          <a:solidFill>
+                            <a:srgbClr val="16192A"/>
+                          </a:solidFill>
+                          <a:latin typeface="Calibri" pitchFamily="34" charset="0"/>
+                          <a:ea typeface="Calibri" pitchFamily="34" charset="-122"/>
+                          <a:cs typeface="Calibri" pitchFamily="34" charset="-120"/>
+                        </a:rPr>
+                        <a:t>cuVSLAM(視覚慣性オドメトリ)。vio/mapping/localizeの3モード</a:t>
+                      </a:r>
+                      <a:endParaRPr lang="en-US" sz="1000" dirty="0">
+                        <a:latin typeface="Calibri" charset="0"/>
+                        <a:ea typeface="Calibri" charset="0"/>
+                        <a:cs typeface="Calibri" charset="0"/>
+                      </a:endParaRPr>
+                    </a:p>
+                  </a:txBody>
+                  <a:tcPr marL="91440" marR="91440" marT="45720" marB="45720">
+                    <a:lnL w="0" cap="flat" cmpd="sng" algn="ctr">
+                      <a:noFill/>
+                    </a:lnL>
+                    <a:lnR w="0" cap="flat" cmpd="sng" algn="ctr">
+                      <a:noFill/>
+                    </a:lnR>
+                    <a:lnT w="0" cap="flat" cmpd="sng" algn="ctr">
+                      <a:noFill/>
+                    </a:lnT>
+                    <a:lnB w="0" cap="flat" cmpd="sng" algn="ctr">
+                      <a:noFill/>
+                    </a:lnB>
+                    <a:solidFill>
+                      <a:srgbClr val="F3F5FA"/>
+                    </a:solidFill>
+                  </a:tcPr>
+                </a:tc>
+              </a:tr>
+              <a:tr h="441960">
+                <a:tc>
+                  <a:txBody>
+                    <a:bodyPr/>
+                    <a:lstStyle/>
+                    <a:p>
+                      <a:pPr indent="0" marL="0">
+                        <a:buNone/>
+                      </a:pPr>
+                      <a:r>
+                        <a:rPr lang="en-US" sz="1000" b="1" dirty="0">
+                          <a:solidFill>
+                            <a:srgbClr val="FF4B2B"/>
+                          </a:solidFill>
+                          <a:latin typeface="Calibri" pitchFamily="34" charset="0"/>
+                          <a:ea typeface="Calibri" pitchFamily="34" charset="-122"/>
+                          <a:cs typeface="Calibri" pitchFamily="34" charset="-120"/>
+                        </a:rPr>
+                        <a:t>aruco</a:t>
+                      </a:r>
+                      <a:endParaRPr lang="en-US" sz="1000" dirty="0">
+                        <a:latin typeface="Calibri" charset="0"/>
+                        <a:ea typeface="Calibri" charset="0"/>
+                        <a:cs typeface="Calibri" charset="0"/>
+                      </a:endParaRPr>
+                    </a:p>
+                  </a:txBody>
+                  <a:tcPr marL="91440" marR="91440" marT="45720" marB="45720">
+                    <a:lnL w="0" cap="flat" cmpd="sng" algn="ctr">
+                      <a:noFill/>
+                    </a:lnL>
+                    <a:lnR w="0" cap="flat" cmpd="sng" algn="ctr">
+                      <a:noFill/>
+                    </a:lnR>
+                    <a:lnT w="0" cap="flat" cmpd="sng" algn="ctr">
+                      <a:noFill/>
+                    </a:lnT>
+                    <a:lnB w="0" cap="flat" cmpd="sng" algn="ctr">
+                      <a:noFill/>
+                    </a:lnB>
+                    <a:solidFill>
+                      <a:srgbClr val="FFFFFF"/>
+                    </a:solidFill>
+                  </a:tcPr>
+                </a:tc>
+                <a:tc>
+                  <a:txBody>
+                    <a:bodyPr/>
+                    <a:lstStyle/>
+                    <a:p>
+                      <a:pPr indent="0" marL="0">
+                        <a:buNone/>
+                      </a:pPr>
+                      <a:r>
+                        <a:rPr lang="en-US" sz="1000" dirty="0">
+                          <a:solidFill>
+                            <a:srgbClr val="16192A"/>
+                          </a:solidFill>
+                          <a:latin typeface="Calibri" pitchFamily="34" charset="0"/>
+                          <a:ea typeface="Calibri" pitchFamily="34" charset="-122"/>
+                          <a:cs typeface="Calibri" pitchFamily="34" charset="-120"/>
+                        </a:rPr>
+                        <a:t>外部の俯瞰カメラ</a:t>
+                      </a:r>
+                      <a:endParaRPr lang="en-US" sz="1000" dirty="0">
+                        <a:latin typeface="Calibri" charset="0"/>
+                        <a:ea typeface="Calibri" charset="0"/>
+                        <a:cs typeface="Calibri" charset="0"/>
+                      </a:endParaRPr>
+                    </a:p>
+                  </a:txBody>
+                  <a:tcPr marL="91440" marR="91440" marT="45720" marB="45720">
+                    <a:lnL w="0" cap="flat" cmpd="sng" algn="ctr">
+                      <a:noFill/>
+                    </a:lnL>
+                    <a:lnR w="0" cap="flat" cmpd="sng" algn="ctr">
+                      <a:noFill/>
+                    </a:lnR>
+                    <a:lnT w="0" cap="flat" cmpd="sng" algn="ctr">
+                      <a:noFill/>
+                    </a:lnT>
+                    <a:lnB w="0" cap="flat" cmpd="sng" algn="ctr">
+                      <a:noFill/>
+                    </a:lnB>
+                    <a:solidFill>
+                      <a:srgbClr val="FFFFFF"/>
+                    </a:solidFill>
+                  </a:tcPr>
+                </a:tc>
+                <a:tc>
+                  <a:txBody>
+                    <a:bodyPr/>
+                    <a:lstStyle/>
+                    <a:p>
+                      <a:pPr indent="0" marL="0">
+                        <a:buNone/>
+                      </a:pPr>
+                      <a:r>
+                        <a:rPr lang="en-US" sz="1000" dirty="0">
+                          <a:solidFill>
+                            <a:srgbClr val="16192A"/>
+                          </a:solidFill>
+                          <a:latin typeface="Calibri" pitchFamily="34" charset="0"/>
+                          <a:ea typeface="Calibri" pitchFamily="34" charset="-122"/>
+                          <a:cs typeface="Calibri" pitchFamily="34" charset="-120"/>
+                        </a:rPr>
+                        <a:t>UDP受信のみ(ROS不要)</a:t>
+                      </a:r>
+                      <a:endParaRPr lang="en-US" sz="1000" dirty="0">
+                        <a:latin typeface="Calibri" charset="0"/>
+                        <a:ea typeface="Calibri" charset="0"/>
+                        <a:cs typeface="Calibri" charset="0"/>
+                      </a:endParaRPr>
+                    </a:p>
+                  </a:txBody>
+                  <a:tcPr marL="91440" marR="91440" marT="45720" marB="45720">
+                    <a:lnL w="0" cap="flat" cmpd="sng" algn="ctr">
+                      <a:noFill/>
+                    </a:lnL>
+                    <a:lnR w="0" cap="flat" cmpd="sng" algn="ctr">
+                      <a:noFill/>
+                    </a:lnR>
+                    <a:lnT w="0" cap="flat" cmpd="sng" algn="ctr">
+                      <a:noFill/>
+                    </a:lnT>
+                    <a:lnB w="0" cap="flat" cmpd="sng" algn="ctr">
+                      <a:noFill/>
+                    </a:lnB>
+                    <a:solidFill>
+                      <a:srgbClr val="FFFFFF"/>
+                    </a:solidFill>
+                  </a:tcPr>
+                </a:tc>
+                <a:tc>
+                  <a:txBody>
+                    <a:bodyPr/>
+                    <a:lstStyle/>
+                    <a:p>
+                      <a:pPr indent="0" marL="0">
+                        <a:buNone/>
+                      </a:pPr>
+                      <a:r>
+                        <a:rPr lang="en-US" sz="1000" dirty="0">
+                          <a:solidFill>
+                            <a:srgbClr val="16192A"/>
+                          </a:solidFill>
+                          <a:latin typeface="Calibri" pitchFamily="34" charset="0"/>
+                          <a:ea typeface="Calibri" pitchFamily="34" charset="-122"/>
+                          <a:cs typeface="Calibri" pitchFamily="34" charset="-120"/>
+                        </a:rPr>
+                        <a:t>天井/コース脇のカメラでARマーカーを検出し三角測量</a:t>
+                      </a:r>
+                      <a:endParaRPr lang="en-US" sz="1000" dirty="0">
+                        <a:latin typeface="Calibri" charset="0"/>
+                        <a:ea typeface="Calibri" charset="0"/>
+                        <a:cs typeface="Calibri" charset="0"/>
+                      </a:endParaRPr>
+                    </a:p>
+                  </a:txBody>
+                  <a:tcPr marL="91440" marR="91440" marT="45720" marB="45720">
+                    <a:lnL w="0" cap="flat" cmpd="sng" algn="ctr">
+                      <a:noFill/>
+                    </a:lnL>
+                    <a:lnR w="0" cap="flat" cmpd="sng" algn="ctr">
+                      <a:noFill/>
+                    </a:lnR>
+                    <a:lnT w="0" cap="flat" cmpd="sng" algn="ctr">
+                      <a:noFill/>
+                    </a:lnT>
+                    <a:lnB w="0" cap="flat" cmpd="sng" algn="ctr">
+                      <a:noFill/>
+                    </a:lnB>
+                    <a:solidFill>
+                      <a:srgbClr val="FFFFFF"/>
+                    </a:solidFill>
+                  </a:tcPr>
+                </a:tc>
+              </a:tr>
+            </a:tbl>
+          </a:graphicData>
+        </a:graphic>
+      </p:graphicFrame>
+      <p:sp>
+        <p:nvSpPr>
+          <p:cNvPr id="6" name="Shape 3"/>
+          <p:cNvSpPr/>
+          <p:nvPr/>
+        </p:nvSpPr>
+        <p:spPr>
+          <a:xfrm>
+            <a:off x="548640" y="5212080"/>
+            <a:ext cx="11091672" cy="868680"/>
+          </a:xfrm>
+          <a:prstGeom prst="roundRect">
+            <a:avLst>
+              <a:gd name="adj" fmla="val 10526"/>
+            </a:avLst>
+          </a:prstGeom>
+          <a:solidFill>
+            <a:srgbClr val="10131A"/>
+          </a:solidFill>
+          <a:ln/>
+        </p:spPr>
+      </p:sp>
+      <p:sp>
+        <p:nvSpPr>
+          <p:cNvPr id="7" name="Text 4"/>
+          <p:cNvSpPr/>
+          <p:nvPr/>
+        </p:nvSpPr>
+        <p:spPr>
+          <a:xfrm>
+            <a:off x="777240" y="5321808"/>
+            <a:ext cx="10607040" cy="685800"/>
+          </a:xfrm>
+          <a:prstGeom prst="rect">
+            <a:avLst/>
+          </a:prstGeom>
+          <a:noFill/>
+          <a:ln/>
+        </p:spPr>
+        <p:txBody>
+          <a:bodyPr wrap="square" lIns="0" tIns="0" rIns="0" bIns="0" rtlCol="0" anchor="ctr"/>
+          <a:lstStyle/>
+          <a:p>
+            <a:pPr indent="0" marL="0">
+              <a:lnSpc>
+                <a:spcPct val="120000"/>
+              </a:lnSpc>
+              <a:buNone/>
+            </a:pPr>
+            <a:r>
+              <a:rPr lang="en-US" sz="1050" b="1" dirty="0">
+                <a:solidFill>
+                  <a:srgbClr val="FF4B2B"/>
+                </a:solidFill>
+                <a:latin typeface="Calibri" pitchFamily="34" charset="0"/>
+                <a:ea typeface="Calibri" pitchFamily="34" charset="-122"/>
+                <a:cs typeface="Calibri" pitchFamily="34" charset="-120"/>
+              </a:rPr>
+              <a:t>💡 「map frame」と「odom frame」の違い： </a:t>
+            </a:r>
+            <a:endParaRPr lang="en-US" sz="1050" dirty="0"/>
+          </a:p>
+          <a:p>
+            <a:pPr indent="0" marL="0">
+              <a:lnSpc>
+                <a:spcPct val="120000"/>
+              </a:lnSpc>
+              <a:buNone/>
+            </a:pPr>
+            <a:r>
+              <a:rPr lang="en-US" sz="1050" dirty="0">
+                <a:solidFill>
+                  <a:srgbClr val="C7CEDE"/>
+                </a:solidFill>
+                <a:latin typeface="Calibri" pitchFamily="34" charset="0"/>
+                <a:ea typeface="Calibri" pitchFamily="34" charset="-122"/>
+                <a:cs typeface="Calibri" pitchFamily="34" charset="-120"/>
+              </a:rPr>
+              <a:t>aruco / lidar_slam / slam_toolbox は絶対座標(map)を返すが、VSLAM は単体では相対座標(odom)止まり。経路追従には絶対座標が必要なため、VSLAMは VSLAM_MODE="localize" で使う。</a:t>
+            </a:r>
+            <a:endParaRPr lang="en-US" sz="1050" dirty="0"/>
+          </a:p>
+        </p:txBody>
+      </p:sp>
+      <p:sp>
+        <p:nvSpPr>
+          <p:cNvPr id="8" name="Text 5"/>
+          <p:cNvSpPr/>
+          <p:nvPr/>
+        </p:nvSpPr>
+        <p:spPr>
+          <a:xfrm>
+            <a:off x="11521440" y="6446520"/>
+            <a:ext cx="548640" cy="274320"/>
+          </a:xfrm>
+          <a:prstGeom prst="rect">
+            <a:avLst/>
+          </a:prstGeom>
+          <a:noFill/>
+          <a:ln/>
+        </p:spPr>
+        <p:txBody>
+          <a:bodyPr wrap="square" lIns="0" tIns="0" rIns="0" bIns="0" rtlCol="0" anchor="ctr"/>
+          <a:lstStyle/>
+          <a:p>
+            <a:pPr algn="r" indent="0" marL="0">
+              <a:buNone/>
+            </a:pPr>
+            <a:r>
+              <a:rPr lang="en-US" sz="1000" dirty="0">
+                <a:solidFill>
+                  <a:srgbClr val="6B7280"/>
+                </a:solidFill>
+                <a:latin typeface="Calibri" pitchFamily="34" charset="0"/>
+                <a:ea typeface="Calibri" pitchFamily="34" charset="-122"/>
+                <a:cs typeface="Calibri" pitchFamily="34" charset="-120"/>
+              </a:rPr>
+              <a:t>12</a:t>
+            </a:r>
+            <a:endParaRPr lang="en-US" sz="1000" dirty="0"/>
+          </a:p>
+        </p:txBody>
+      </p:sp>
+    </p:spTree>
+  </p:cSld>
+  <p:clrMapOvr>
+    <a:masterClrMapping/>
+  </p:clrMapOvr>
+</p:sld>
+</file>
+
+<file path=ppt/slides/slide13.xml><?xml version="1.0" encoding="utf-8"?>
+<p:sld xmlns:a="http://schemas.openxmlformats.org/drawingml/2006/main" xmlns:r="http://schemas.openxmlformats.org/officeDocument/2006/relationships" xmlns:p="http://schemas.openxmlformats.org/presentationml/2006/main">
+  <p:cSld name="Slide 13">
+    <p:bg>
+      <p:bgPr>
+        <a:solidFill>
+          <a:srgbClr val="FFFFFF"/>
+        </a:solidFill>
+      </p:bgPr>
+    </p:bg>
+    <p:spTree>
+      <p:nvGrpSpPr>
+        <p:cNvPr id="1" name=""/>
+        <p:cNvGrpSpPr/>
+        <p:nvPr/>
+      </p:nvGrpSpPr>
+      <p:grpSpPr>
+        <a:xfrm>
+          <a:off x="0" y="0"/>
+          <a:ext cx="0" cy="0"/>
+          <a:chOff x="0" y="0"/>
+          <a:chExt cx="0" cy="0"/>
+        </a:xfrm>
+      </p:grpSpPr>
+      <p:sp>
+        <p:nvSpPr>
+          <p:cNvPr id="2" name="Text 0"/>
+          <p:cNvSpPr/>
+          <p:nvPr/>
+        </p:nvSpPr>
+        <p:spPr>
+          <a:xfrm>
+            <a:off x="548640" y="320040"/>
+            <a:ext cx="7315200" cy="320040"/>
+          </a:xfrm>
+          <a:prstGeom prst="rect">
+            <a:avLst/>
+          </a:prstGeom>
+          <a:noFill/>
+          <a:ln/>
+        </p:spPr>
+        <p:txBody>
+          <a:bodyPr wrap="square" lIns="0" tIns="0" rIns="0" bIns="0" rtlCol="0" anchor="ctr"/>
+          <a:lstStyle/>
+          <a:p>
+            <a:pPr indent="0" marL="0">
+              <a:buNone/>
+            </a:pPr>
+            <a:r>
+              <a:rPr lang="en-US" sz="1200" b="1" spc="200" kern="0" dirty="0">
+                <a:solidFill>
+                  <a:srgbClr val="FF4B2B"/>
+                </a:solidFill>
+                <a:latin typeface="Calibri" pitchFamily="34" charset="0"/>
+                <a:ea typeface="Calibri" pitchFamily="34" charset="-122"/>
+                <a:cs typeface="Calibri" pitchFamily="34" charset="-120"/>
+              </a:rPr>
+              <a:t>13 / LOCALIZATION/ (PATH_NAV / WAYPOINT_NAV / MPC / MPPI)</a:t>
+            </a:r>
+            <a:endParaRPr lang="en-US" sz="1200" dirty="0"/>
+          </a:p>
+        </p:txBody>
+      </p:sp>
+      <p:sp>
+        <p:nvSpPr>
+          <p:cNvPr id="3" name="Text 1"/>
+          <p:cNvSpPr/>
+          <p:nvPr/>
+        </p:nvSpPr>
+        <p:spPr>
+          <a:xfrm>
+            <a:off x="548640" y="594360"/>
+            <a:ext cx="10515600" cy="640080"/>
+          </a:xfrm>
+          <a:prstGeom prst="rect">
+            <a:avLst/>
+          </a:prstGeom>
+          <a:noFill/>
+          <a:ln/>
+        </p:spPr>
+        <p:txBody>
+          <a:bodyPr wrap="square" lIns="0" tIns="0" rIns="0" bIns="0" rtlCol="0" anchor="ctr"/>
+          <a:lstStyle/>
+          <a:p>
+            <a:pPr indent="0" marL="0">
+              <a:buNone/>
+            </a:pPr>
+            <a:r>
+              <a:rPr lang="en-US" sz="3000" b="1" dirty="0">
+                <a:solidFill>
+                  <a:srgbClr val="16192A"/>
+                </a:solidFill>
+                <a:latin typeface="Cambria" pitchFamily="34" charset="0"/>
+                <a:ea typeface="Cambria" pitchFamily="34" charset="-122"/>
+                <a:cs typeface="Cambria" pitchFamily="34" charset="-120"/>
+              </a:rPr>
+              <a:t>経路追従 ― 自己位置を使って正確に走る</a:t>
+            </a:r>
+            <a:endParaRPr lang="en-US" sz="3000" dirty="0"/>
+          </a:p>
+        </p:txBody>
+      </p:sp>
+      <p:sp>
+        <p:nvSpPr>
+          <p:cNvPr id="4" name="Text 2"/>
+          <p:cNvSpPr/>
+          <p:nvPr/>
+        </p:nvSpPr>
+        <p:spPr>
+          <a:xfrm>
+            <a:off x="548640" y="1600200"/>
+            <a:ext cx="10881360" cy="548640"/>
+          </a:xfrm>
+          <a:prstGeom prst="rect">
+            <a:avLst/>
+          </a:prstGeom>
+          <a:noFill/>
+          <a:ln/>
+        </p:spPr>
+        <p:txBody>
+          <a:bodyPr wrap="square" lIns="0" tIns="0" rIns="0" bIns="0" rtlCol="0" anchor="ctr"/>
+          <a:lstStyle/>
+          <a:p>
+            <a:pPr indent="0" marL="0">
+              <a:lnSpc>
+                <a:spcPct val="120000"/>
+              </a:lnSpc>
+              <a:buNone/>
+            </a:pPr>
+            <a:r>
+              <a:rPr lang="en-US" sz="1300" dirty="0">
+                <a:solidFill>
+                  <a:srgbClr val="16192A"/>
+                </a:solidFill>
+                <a:latin typeface="Calibri" pitchFamily="34" charset="0"/>
+                <a:ea typeface="Calibri" pitchFamily="34" charset="-122"/>
+                <a:cs typeface="Calibri" pitchFamily="34" charset="-120"/>
+              </a:rPr>
+              <a:t>自己位置が分かれば、あらかじめ記録した経路や目標点に向かって走れる。シンプルな幾何学的追従から、数手先を予測する最適制御まで、精度と計算コストが異なる複数の方式がある。</a:t>
+            </a:r>
+            <a:endParaRPr lang="en-US" sz="1300" dirty="0"/>
+          </a:p>
+        </p:txBody>
+      </p:sp>
+      <p:sp>
+        <p:nvSpPr>
+          <p:cNvPr id="5" name="Shape 3"/>
+          <p:cNvSpPr/>
+          <p:nvPr/>
+        </p:nvSpPr>
+        <p:spPr>
+          <a:xfrm>
+            <a:off x="548640" y="2331720"/>
+            <a:ext cx="11091672" cy="960120"/>
+          </a:xfrm>
+          <a:prstGeom prst="roundRect">
+            <a:avLst>
+              <a:gd name="adj" fmla="val 9524"/>
+            </a:avLst>
+          </a:prstGeom>
+          <a:solidFill>
+            <a:srgbClr val="E4FAFC"/>
+          </a:solidFill>
+          <a:ln/>
+        </p:spPr>
+      </p:sp>
+      <p:sp>
+        <p:nvSpPr>
+          <p:cNvPr id="6" name="Text 4"/>
+          <p:cNvSpPr/>
+          <p:nvPr/>
+        </p:nvSpPr>
+        <p:spPr>
+          <a:xfrm>
+            <a:off x="822960" y="2468880"/>
+            <a:ext cx="1463040" cy="274320"/>
+          </a:xfrm>
+          <a:prstGeom prst="rect">
+            <a:avLst/>
+          </a:prstGeom>
+          <a:noFill/>
+          <a:ln/>
+        </p:spPr>
+        <p:txBody>
+          <a:bodyPr wrap="square" lIns="0" tIns="0" rIns="0" bIns="0" rtlCol="0" anchor="ctr"/>
+          <a:lstStyle/>
+          <a:p>
+            <a:pPr indent="0" marL="0">
+              <a:buNone/>
+            </a:pPr>
+            <a:r>
+              <a:rPr lang="en-US" sz="950" b="1" spc="100" kern="0" dirty="0">
+                <a:solidFill>
+                  <a:srgbClr val="FF4B2B"/>
+                </a:solidFill>
+                <a:latin typeface="Calibri" pitchFamily="34" charset="0"/>
+                <a:ea typeface="Calibri" pitchFamily="34" charset="-122"/>
+                <a:cs typeface="Calibri" pitchFamily="34" charset="-120"/>
+              </a:rPr>
+              <a:t>STEP 1</a:t>
+            </a:r>
+            <a:endParaRPr lang="en-US" sz="950" dirty="0"/>
+          </a:p>
+        </p:txBody>
+      </p:sp>
+      <p:sp>
+        <p:nvSpPr>
+          <p:cNvPr id="7" name="Text 5"/>
+          <p:cNvSpPr/>
+          <p:nvPr/>
+        </p:nvSpPr>
+        <p:spPr>
+          <a:xfrm>
+            <a:off x="822960" y="2715768"/>
+            <a:ext cx="2926080" cy="457200"/>
+          </a:xfrm>
+          <a:prstGeom prst="rect">
+            <a:avLst/>
+          </a:prstGeom>
+          <a:noFill/>
+          <a:ln/>
+        </p:spPr>
+        <p:txBody>
+          <a:bodyPr wrap="square" lIns="0" tIns="0" rIns="0" bIns="0" rtlCol="0" anchor="ctr"/>
+          <a:lstStyle/>
+          <a:p>
+            <a:pPr indent="0" marL="0">
+              <a:buNone/>
+            </a:pPr>
+            <a:r>
+              <a:rPr lang="en-US" sz="1500" b="1" dirty="0">
+                <a:solidFill>
+                  <a:srgbClr val="16192A"/>
+                </a:solidFill>
+                <a:latin typeface="Cambria" pitchFamily="34" charset="0"/>
+                <a:ea typeface="Cambria" pitchFamily="34" charset="-122"/>
+                <a:cs typeface="Cambria" pitchFamily="34" charset="-120"/>
+              </a:rPr>
+              <a:t>path_nav / waypoint_nav</a:t>
+            </a:r>
+            <a:endParaRPr lang="en-US" sz="1500" dirty="0"/>
+          </a:p>
+        </p:txBody>
+      </p:sp>
+      <p:sp>
+        <p:nvSpPr>
+          <p:cNvPr id="8" name="Text 6"/>
+          <p:cNvSpPr/>
+          <p:nvPr/>
+        </p:nvSpPr>
+        <p:spPr>
+          <a:xfrm>
+            <a:off x="3931920" y="2331720"/>
+            <a:ext cx="7434072" cy="960120"/>
+          </a:xfrm>
+          <a:prstGeom prst="rect">
+            <a:avLst/>
+          </a:prstGeom>
+          <a:noFill/>
+          <a:ln/>
+        </p:spPr>
+        <p:txBody>
+          <a:bodyPr wrap="square" lIns="0" tIns="0" rIns="0" bIns="0" rtlCol="0" anchor="ctr"/>
+          <a:lstStyle/>
+          <a:p>
+            <a:pPr indent="0" marL="0">
+              <a:lnSpc>
+                <a:spcPct val="120000"/>
+              </a:lnSpc>
+              <a:buNone/>
+            </a:pPr>
+            <a:r>
+              <a:rPr lang="en-US" sz="1100" dirty="0">
+                <a:solidFill>
+                  <a:srgbClr val="6B7280"/>
+                </a:solidFill>
+                <a:latin typeface="Calibri" pitchFamily="34" charset="0"/>
+                <a:ea typeface="Calibri" pitchFamily="34" charset="-122"/>
+                <a:cs typeface="Calibri" pitchFamily="34" charset="-120"/>
+              </a:rPr>
+              <a:t>pure pursuit法。記録した経路や目標点列へ、幾何学的に滑らかに追従する基本形。</a:t>
+            </a:r>
+            <a:endParaRPr lang="en-US" sz="1100" dirty="0"/>
+          </a:p>
+        </p:txBody>
+      </p:sp>
+      <p:sp>
+        <p:nvSpPr>
+          <p:cNvPr id="9" name="Text 7"/>
+          <p:cNvSpPr/>
+          <p:nvPr/>
+        </p:nvSpPr>
+        <p:spPr>
+          <a:xfrm>
+            <a:off x="548640" y="3291840"/>
+            <a:ext cx="1097280" cy="137160"/>
+          </a:xfrm>
+          <a:prstGeom prst="rect">
+            <a:avLst/>
+          </a:prstGeom>
+          <a:noFill/>
+          <a:ln/>
+        </p:spPr>
+        <p:txBody>
+          <a:bodyPr wrap="square" lIns="0" tIns="0" rIns="0" bIns="0" rtlCol="0" anchor="ctr"/>
+          <a:lstStyle/>
+          <a:p>
+            <a:pPr algn="ctr" indent="0" marL="0">
+              <a:buNone/>
+            </a:pPr>
+            <a:r>
+              <a:rPr lang="en-US" sz="1100" dirty="0">
+                <a:solidFill>
+                  <a:srgbClr val="6B7280"/>
+                </a:solidFill>
+                <a:latin typeface="Calibri" pitchFamily="34" charset="0"/>
+                <a:ea typeface="Calibri" pitchFamily="34" charset="-122"/>
+                <a:cs typeface="Calibri" pitchFamily="34" charset="-120"/>
+              </a:rPr>
+              <a:t>↓</a:t>
+            </a:r>
+            <a:endParaRPr lang="en-US" sz="1100" dirty="0"/>
+          </a:p>
+        </p:txBody>
+      </p:sp>
+      <p:sp>
+        <p:nvSpPr>
+          <p:cNvPr id="10" name="Shape 8"/>
+          <p:cNvSpPr/>
+          <p:nvPr/>
+        </p:nvSpPr>
+        <p:spPr>
+          <a:xfrm>
+            <a:off x="548640" y="3429000"/>
+            <a:ext cx="11091672" cy="960120"/>
+          </a:xfrm>
+          <a:prstGeom prst="roundRect">
+            <a:avLst>
+              <a:gd name="adj" fmla="val 9524"/>
+            </a:avLst>
+          </a:prstGeom>
+          <a:solidFill>
+            <a:srgbClr val="EAEEF6"/>
+          </a:solidFill>
+          <a:ln/>
+        </p:spPr>
+      </p:sp>
+      <p:sp>
+        <p:nvSpPr>
+          <p:cNvPr id="11" name="Text 9"/>
+          <p:cNvSpPr/>
+          <p:nvPr/>
+        </p:nvSpPr>
+        <p:spPr>
+          <a:xfrm>
+            <a:off x="822960" y="3566160"/>
+            <a:ext cx="1463040" cy="274320"/>
+          </a:xfrm>
+          <a:prstGeom prst="rect">
+            <a:avLst/>
+          </a:prstGeom>
+          <a:noFill/>
+          <a:ln/>
+        </p:spPr>
+        <p:txBody>
+          <a:bodyPr wrap="square" lIns="0" tIns="0" rIns="0" bIns="0" rtlCol="0" anchor="ctr"/>
+          <a:lstStyle/>
+          <a:p>
+            <a:pPr indent="0" marL="0">
+              <a:buNone/>
+            </a:pPr>
+            <a:r>
+              <a:rPr lang="en-US" sz="950" b="1" spc="100" kern="0" dirty="0">
+                <a:solidFill>
+                  <a:srgbClr val="FF4B2B"/>
+                </a:solidFill>
+                <a:latin typeface="Calibri" pitchFamily="34" charset="0"/>
+                <a:ea typeface="Calibri" pitchFamily="34" charset="-122"/>
+                <a:cs typeface="Calibri" pitchFamily="34" charset="-120"/>
+              </a:rPr>
+              <a:t>STEP 2</a:t>
+            </a:r>
+            <a:endParaRPr lang="en-US" sz="950" dirty="0"/>
+          </a:p>
+        </p:txBody>
+      </p:sp>
+      <p:sp>
+        <p:nvSpPr>
+          <p:cNvPr id="12" name="Text 10"/>
+          <p:cNvSpPr/>
+          <p:nvPr/>
+        </p:nvSpPr>
+        <p:spPr>
+          <a:xfrm>
+            <a:off x="822960" y="3813048"/>
+            <a:ext cx="2926080" cy="457200"/>
+          </a:xfrm>
+          <a:prstGeom prst="rect">
+            <a:avLst/>
+          </a:prstGeom>
+          <a:noFill/>
+          <a:ln/>
+        </p:spPr>
+        <p:txBody>
+          <a:bodyPr wrap="square" lIns="0" tIns="0" rIns="0" bIns="0" rtlCol="0" anchor="ctr"/>
+          <a:lstStyle/>
+          <a:p>
+            <a:pPr indent="0" marL="0">
+              <a:buNone/>
+            </a:pPr>
+            <a:r>
+              <a:rPr lang="en-US" sz="1500" b="1" dirty="0">
+                <a:solidFill>
+                  <a:srgbClr val="16192A"/>
+                </a:solidFill>
+                <a:latin typeface="Cambria" pitchFamily="34" charset="0"/>
+                <a:ea typeface="Cambria" pitchFamily="34" charset="-122"/>
+                <a:cs typeface="Cambria" pitchFamily="34" charset="-120"/>
+              </a:rPr>
+              <a:t>mpc</a:t>
+            </a:r>
+            <a:endParaRPr lang="en-US" sz="1500" dirty="0"/>
+          </a:p>
+        </p:txBody>
+      </p:sp>
+      <p:sp>
+        <p:nvSpPr>
+          <p:cNvPr id="13" name="Text 11"/>
+          <p:cNvSpPr/>
+          <p:nvPr/>
+        </p:nvSpPr>
+        <p:spPr>
+          <a:xfrm>
+            <a:off x="3931920" y="3429000"/>
+            <a:ext cx="7434072" cy="960120"/>
+          </a:xfrm>
+          <a:prstGeom prst="rect">
+            <a:avLst/>
+          </a:prstGeom>
+          <a:noFill/>
+          <a:ln/>
+        </p:spPr>
+        <p:txBody>
+          <a:bodyPr wrap="square" lIns="0" tIns="0" rIns="0" bIns="0" rtlCol="0" anchor="ctr"/>
+          <a:lstStyle/>
+          <a:p>
+            <a:pPr indent="0" marL="0">
+              <a:lnSpc>
+                <a:spcPct val="120000"/>
+              </a:lnSpc>
+              <a:buNone/>
+            </a:pPr>
+            <a:r>
+              <a:rPr lang="en-US" sz="1100" dirty="0">
+                <a:solidFill>
+                  <a:srgbClr val="6B7280"/>
+                </a:solidFill>
+                <a:latin typeface="Calibri" pitchFamily="34" charset="0"/>
+                <a:ea typeface="Calibri" pitchFamily="34" charset="-122"/>
+                <a:cs typeface="Calibri" pitchFamily="34" charset="-120"/>
+              </a:rPr>
+              <a:t>非線形モデル予測制御(iLQR)。数手先の動きまで計算し、path_navより精密に追従する上位互換。</a:t>
+            </a:r>
+            <a:endParaRPr lang="en-US" sz="1100" dirty="0"/>
+          </a:p>
+        </p:txBody>
+      </p:sp>
+      <p:sp>
+        <p:nvSpPr>
+          <p:cNvPr id="14" name="Text 12"/>
+          <p:cNvSpPr/>
+          <p:nvPr/>
+        </p:nvSpPr>
+        <p:spPr>
+          <a:xfrm>
+            <a:off x="548640" y="4389120"/>
+            <a:ext cx="1097280" cy="137160"/>
+          </a:xfrm>
+          <a:prstGeom prst="rect">
+            <a:avLst/>
+          </a:prstGeom>
+          <a:noFill/>
+          <a:ln/>
+        </p:spPr>
+        <p:txBody>
+          <a:bodyPr wrap="square" lIns="0" tIns="0" rIns="0" bIns="0" rtlCol="0" anchor="ctr"/>
+          <a:lstStyle/>
+          <a:p>
+            <a:pPr algn="ctr" indent="0" marL="0">
+              <a:buNone/>
+            </a:pPr>
+            <a:r>
+              <a:rPr lang="en-US" sz="1100" dirty="0">
+                <a:solidFill>
+                  <a:srgbClr val="6B7280"/>
+                </a:solidFill>
+                <a:latin typeface="Calibri" pitchFamily="34" charset="0"/>
+                <a:ea typeface="Calibri" pitchFamily="34" charset="-122"/>
+                <a:cs typeface="Calibri" pitchFamily="34" charset="-120"/>
+              </a:rPr>
+              <a:t>↓</a:t>
+            </a:r>
+            <a:endParaRPr lang="en-US" sz="1100" dirty="0"/>
+          </a:p>
+        </p:txBody>
+      </p:sp>
+      <p:sp>
+        <p:nvSpPr>
+          <p:cNvPr id="15" name="Shape 13"/>
+          <p:cNvSpPr/>
+          <p:nvPr/>
+        </p:nvSpPr>
+        <p:spPr>
+          <a:xfrm>
+            <a:off x="548640" y="4526280"/>
+            <a:ext cx="11091672" cy="960120"/>
+          </a:xfrm>
+          <a:prstGeom prst="roundRect">
+            <a:avLst>
+              <a:gd name="adj" fmla="val 9524"/>
+            </a:avLst>
+          </a:prstGeom>
+          <a:solidFill>
+            <a:srgbClr val="FFEDE9"/>
+          </a:solidFill>
+          <a:ln/>
+        </p:spPr>
+      </p:sp>
+      <p:sp>
+        <p:nvSpPr>
+          <p:cNvPr id="16" name="Text 14"/>
+          <p:cNvSpPr/>
+          <p:nvPr/>
+        </p:nvSpPr>
+        <p:spPr>
+          <a:xfrm>
+            <a:off x="822960" y="4663440"/>
+            <a:ext cx="1463040" cy="274320"/>
+          </a:xfrm>
+          <a:prstGeom prst="rect">
+            <a:avLst/>
+          </a:prstGeom>
+          <a:noFill/>
+          <a:ln/>
+        </p:spPr>
+        <p:txBody>
+          <a:bodyPr wrap="square" lIns="0" tIns="0" rIns="0" bIns="0" rtlCol="0" anchor="ctr"/>
+          <a:lstStyle/>
+          <a:p>
+            <a:pPr indent="0" marL="0">
+              <a:buNone/>
+            </a:pPr>
+            <a:r>
+              <a:rPr lang="en-US" sz="950" b="1" spc="100" kern="0" dirty="0">
+                <a:solidFill>
+                  <a:srgbClr val="FF4B2B"/>
+                </a:solidFill>
+                <a:latin typeface="Calibri" pitchFamily="34" charset="0"/>
+                <a:ea typeface="Calibri" pitchFamily="34" charset="-122"/>
+                <a:cs typeface="Calibri" pitchFamily="34" charset="-120"/>
+              </a:rPr>
+              <a:t>STEP 3</a:t>
+            </a:r>
+            <a:endParaRPr lang="en-US" sz="950" dirty="0"/>
+          </a:p>
+        </p:txBody>
+      </p:sp>
+      <p:sp>
+        <p:nvSpPr>
+          <p:cNvPr id="17" name="Text 15"/>
+          <p:cNvSpPr/>
+          <p:nvPr/>
+        </p:nvSpPr>
+        <p:spPr>
+          <a:xfrm>
+            <a:off x="822960" y="4910328"/>
+            <a:ext cx="2926080" cy="457200"/>
+          </a:xfrm>
+          <a:prstGeom prst="rect">
+            <a:avLst/>
+          </a:prstGeom>
+          <a:noFill/>
+          <a:ln/>
+        </p:spPr>
+        <p:txBody>
+          <a:bodyPr wrap="square" lIns="0" tIns="0" rIns="0" bIns="0" rtlCol="0" anchor="ctr"/>
+          <a:lstStyle/>
+          <a:p>
+            <a:pPr indent="0" marL="0">
+              <a:buNone/>
+            </a:pPr>
+            <a:r>
+              <a:rPr lang="en-US" sz="1500" b="1" dirty="0">
+                <a:solidFill>
+                  <a:srgbClr val="16192A"/>
+                </a:solidFill>
+                <a:latin typeface="Cambria" pitchFamily="34" charset="0"/>
+                <a:ea typeface="Cambria" pitchFamily="34" charset="-122"/>
+                <a:cs typeface="Cambria" pitchFamily="34" charset="-120"/>
+              </a:rPr>
+              <a:t>mppi</a:t>
+            </a:r>
+            <a:endParaRPr lang="en-US" sz="1500" dirty="0"/>
+          </a:p>
+        </p:txBody>
+      </p:sp>
+      <p:sp>
+        <p:nvSpPr>
+          <p:cNvPr id="18" name="Text 16"/>
+          <p:cNvSpPr/>
+          <p:nvPr/>
+        </p:nvSpPr>
+        <p:spPr>
+          <a:xfrm>
+            <a:off x="3931920" y="4526280"/>
+            <a:ext cx="7434072" cy="960120"/>
+          </a:xfrm>
+          <a:prstGeom prst="rect">
+            <a:avLst/>
+          </a:prstGeom>
+          <a:noFill/>
+          <a:ln/>
+        </p:spPr>
+        <p:txBody>
+          <a:bodyPr wrap="square" lIns="0" tIns="0" rIns="0" bIns="0" rtlCol="0" anchor="ctr"/>
+          <a:lstStyle/>
+          <a:p>
+            <a:pPr indent="0" marL="0">
+              <a:lnSpc>
+                <a:spcPct val="120000"/>
+              </a:lnSpc>
+              <a:buNone/>
+            </a:pPr>
+            <a:r>
+              <a:rPr lang="en-US" sz="1100" dirty="0">
+                <a:solidFill>
+                  <a:srgbClr val="6B7280"/>
+                </a:solidFill>
+                <a:latin typeface="Calibri" pitchFamily="34" charset="0"/>
+                <a:ea typeface="Calibri" pitchFamily="34" charset="-122"/>
+                <a:cs typeface="Calibri" pitchFamily="34" charset="-120"/>
+              </a:rPr>
+              <a:t>サンプリングベースの最適制御。経路追従に加え、LiDARで検知した障害物回避もコストに織り込む。</a:t>
+            </a:r>
+            <a:endParaRPr lang="en-US" sz="1100" dirty="0"/>
+          </a:p>
+        </p:txBody>
+      </p:sp>
+      <p:sp>
+        <p:nvSpPr>
+          <p:cNvPr id="19" name="Text 17"/>
+          <p:cNvSpPr/>
+          <p:nvPr/>
+        </p:nvSpPr>
+        <p:spPr>
+          <a:xfrm>
+            <a:off x="548640" y="5486400"/>
+            <a:ext cx="1097280" cy="137160"/>
+          </a:xfrm>
+          <a:prstGeom prst="rect">
+            <a:avLst/>
+          </a:prstGeom>
+          <a:noFill/>
+          <a:ln/>
+        </p:spPr>
+        <p:txBody>
+          <a:bodyPr wrap="square" lIns="0" tIns="0" rIns="0" bIns="0" rtlCol="0" anchor="ctr"/>
+          <a:lstStyle/>
+          <a:p>
+            <a:pPr algn="ctr" indent="0" marL="0">
+              <a:buNone/>
+            </a:pPr>
+            <a:r>
+              <a:rPr lang="en-US" sz="1100" dirty="0">
+                <a:solidFill>
+                  <a:srgbClr val="6B7280"/>
+                </a:solidFill>
+                <a:latin typeface="Calibri" pitchFamily="34" charset="0"/>
+                <a:ea typeface="Calibri" pitchFamily="34" charset="-122"/>
+                <a:cs typeface="Calibri" pitchFamily="34" charset="-120"/>
+              </a:rPr>
+              <a:t>↓</a:t>
+            </a:r>
+            <a:endParaRPr lang="en-US" sz="1100" dirty="0"/>
+          </a:p>
+        </p:txBody>
+      </p:sp>
+      <p:sp>
+        <p:nvSpPr>
+          <p:cNvPr id="20" name="Shape 18"/>
+          <p:cNvSpPr/>
+          <p:nvPr/>
+        </p:nvSpPr>
+        <p:spPr>
+          <a:xfrm>
+            <a:off x="548640" y="5623560"/>
+            <a:ext cx="11091672" cy="960120"/>
+          </a:xfrm>
+          <a:prstGeom prst="roundRect">
+            <a:avLst>
+              <a:gd name="adj" fmla="val 9524"/>
+            </a:avLst>
+          </a:prstGeom>
+          <a:solidFill>
+            <a:srgbClr val="10131A"/>
+          </a:solidFill>
+          <a:ln/>
+        </p:spPr>
+      </p:sp>
+      <p:sp>
+        <p:nvSpPr>
+          <p:cNvPr id="21" name="Text 19"/>
+          <p:cNvSpPr/>
+          <p:nvPr/>
+        </p:nvSpPr>
+        <p:spPr>
+          <a:xfrm>
+            <a:off x="822960" y="5760720"/>
+            <a:ext cx="1463040" cy="274320"/>
+          </a:xfrm>
+          <a:prstGeom prst="rect">
+            <a:avLst/>
+          </a:prstGeom>
+          <a:noFill/>
+          <a:ln/>
+        </p:spPr>
+        <p:txBody>
+          <a:bodyPr wrap="square" lIns="0" tIns="0" rIns="0" bIns="0" rtlCol="0" anchor="ctr"/>
+          <a:lstStyle/>
+          <a:p>
+            <a:pPr indent="0" marL="0">
+              <a:buNone/>
+            </a:pPr>
+            <a:r>
+              <a:rPr lang="en-US" sz="950" b="1" spc="100" kern="0" dirty="0">
+                <a:solidFill>
+                  <a:srgbClr val="FF4B2B"/>
+                </a:solidFill>
+                <a:latin typeface="Calibri" pitchFamily="34" charset="0"/>
+                <a:ea typeface="Calibri" pitchFamily="34" charset="-122"/>
+                <a:cs typeface="Calibri" pitchFamily="34" charset="-120"/>
+              </a:rPr>
+              <a:t>STEP 4</a:t>
+            </a:r>
+            <a:endParaRPr lang="en-US" sz="950" dirty="0"/>
+          </a:p>
+        </p:txBody>
+      </p:sp>
+      <p:sp>
+        <p:nvSpPr>
+          <p:cNvPr id="22" name="Text 20"/>
+          <p:cNvSpPr/>
+          <p:nvPr/>
+        </p:nvSpPr>
+        <p:spPr>
+          <a:xfrm>
+            <a:off x="822960" y="6007608"/>
+            <a:ext cx="2926080" cy="457200"/>
+          </a:xfrm>
+          <a:prstGeom prst="rect">
+            <a:avLst/>
+          </a:prstGeom>
+          <a:noFill/>
+          <a:ln/>
+        </p:spPr>
+        <p:txBody>
+          <a:bodyPr wrap="square" lIns="0" tIns="0" rIns="0" bIns="0" rtlCol="0" anchor="ctr"/>
+          <a:lstStyle/>
+          <a:p>
+            <a:pPr indent="0" marL="0">
+              <a:buNone/>
+            </a:pPr>
+            <a:r>
+              <a:rPr lang="en-US" sz="1500" b="1" dirty="0">
+                <a:solidFill>
+                  <a:srgbClr val="FFFFFF"/>
+                </a:solidFill>
+                <a:latin typeface="Cambria" pitchFamily="34" charset="0"/>
+                <a:ea typeface="Cambria" pitchFamily="34" charset="-122"/>
+                <a:cs typeface="Cambria" pitchFamily="34" charset="-120"/>
+              </a:rPr>
+              <a:t>mppi_local</a:t>
+            </a:r>
+            <a:endParaRPr lang="en-US" sz="1500" dirty="0"/>
+          </a:p>
+        </p:txBody>
+      </p:sp>
+      <p:sp>
+        <p:nvSpPr>
+          <p:cNvPr id="23" name="Text 21"/>
+          <p:cNvSpPr/>
+          <p:nvPr/>
+        </p:nvSpPr>
+        <p:spPr>
+          <a:xfrm>
+            <a:off x="3931920" y="5623560"/>
+            <a:ext cx="7434072" cy="960120"/>
+          </a:xfrm>
+          <a:prstGeom prst="rect">
+            <a:avLst/>
+          </a:prstGeom>
+          <a:noFill/>
+          <a:ln/>
+        </p:spPr>
+        <p:txBody>
+          <a:bodyPr wrap="square" lIns="0" tIns="0" rIns="0" bIns="0" rtlCol="0" anchor="ctr"/>
+          <a:lstStyle/>
+          <a:p>
+            <a:pPr indent="0" marL="0">
+              <a:lnSpc>
+                <a:spcPct val="120000"/>
+              </a:lnSpc>
+              <a:buNone/>
+            </a:pPr>
+            <a:r>
+              <a:rPr lang="en-US" sz="1100" dirty="0">
+                <a:solidFill>
+                  <a:srgbClr val="C7CEDE"/>
+                </a:solidFill>
+                <a:latin typeface="Calibri" pitchFamily="34" charset="0"/>
+                <a:ea typeface="Calibri" pitchFamily="34" charset="-122"/>
+                <a:cs typeface="Calibri" pitchFamily="34" charset="-120"/>
+              </a:rPr>
+              <a:t>地図も自己位置も使わない発展形。LiDAR点群だけを見て、その場で開いた空間へ向かう。</a:t>
+            </a:r>
+            <a:endParaRPr lang="en-US" sz="1100" dirty="0"/>
+          </a:p>
+        </p:txBody>
+      </p:sp>
+      <p:sp>
+        <p:nvSpPr>
+          <p:cNvPr id="24" name="Text 22"/>
+          <p:cNvSpPr/>
+          <p:nvPr/>
+        </p:nvSpPr>
+        <p:spPr>
+          <a:xfrm>
+            <a:off x="11521440" y="6446520"/>
+            <a:ext cx="548640" cy="274320"/>
+          </a:xfrm>
+          <a:prstGeom prst="rect">
+            <a:avLst/>
+          </a:prstGeom>
+          <a:noFill/>
+          <a:ln/>
+        </p:spPr>
+        <p:txBody>
+          <a:bodyPr wrap="square" lIns="0" tIns="0" rIns="0" bIns="0" rtlCol="0" anchor="ctr"/>
+          <a:lstStyle/>
+          <a:p>
+            <a:pPr algn="r" indent="0" marL="0">
+              <a:buNone/>
+            </a:pPr>
+            <a:r>
+              <a:rPr lang="en-US" sz="1000" dirty="0">
+                <a:solidFill>
+                  <a:srgbClr val="6B7280"/>
+                </a:solidFill>
+                <a:latin typeface="Calibri" pitchFamily="34" charset="0"/>
+                <a:ea typeface="Calibri" pitchFamily="34" charset="-122"/>
+                <a:cs typeface="Calibri" pitchFamily="34" charset="-120"/>
+              </a:rPr>
+              <a:t>13</a:t>
+            </a:r>
+            <a:endParaRPr lang="en-US" sz="1000" dirty="0"/>
+          </a:p>
+        </p:txBody>
+      </p:sp>
+    </p:spTree>
+  </p:cSld>
+  <p:clrMapOvr>
+    <a:masterClrMapping/>
+  </p:clrMapOvr>
+</p:sld>
+</file>
+
+<file path=ppt/slides/slide14.xml><?xml version="1.0" encoding="utf-8"?>
+<p:sld xmlns:a="http://schemas.openxmlformats.org/drawingml/2006/main" xmlns:r="http://schemas.openxmlformats.org/officeDocument/2006/relationships" xmlns:p="http://schemas.openxmlformats.org/presentationml/2006/main">
+  <p:cSld name="Slide 14">
+    <p:bg>
+      <p:bgPr>
+        <a:solidFill>
+          <a:srgbClr val="FFFFFF"/>
+        </a:solidFill>
+      </p:bgPr>
+    </p:bg>
+    <p:spTree>
+      <p:nvGrpSpPr>
+        <p:cNvPr id="1" name=""/>
+        <p:cNvGrpSpPr/>
+        <p:nvPr/>
+      </p:nvGrpSpPr>
+      <p:grpSpPr>
+        <a:xfrm>
+          <a:off x="0" y="0"/>
+          <a:ext cx="0" cy="0"/>
+          <a:chOff x="0" y="0"/>
+          <a:chExt cx="0" cy="0"/>
+        </a:xfrm>
+      </p:grpSpPr>
+      <p:sp>
+        <p:nvSpPr>
+          <p:cNvPr id="2" name="Text 0"/>
+          <p:cNvSpPr/>
+          <p:nvPr/>
+        </p:nvSpPr>
+        <p:spPr>
+          <a:xfrm>
+            <a:off x="548640" y="320040"/>
+            <a:ext cx="7315200" cy="320040"/>
+          </a:xfrm>
+          <a:prstGeom prst="rect">
+            <a:avLst/>
+          </a:prstGeom>
+          <a:noFill/>
+          <a:ln/>
+        </p:spPr>
+        <p:txBody>
+          <a:bodyPr wrap="square" lIns="0" tIns="0" rIns="0" bIns="0" rtlCol="0" anchor="ctr"/>
+          <a:lstStyle/>
+          <a:p>
+            <a:pPr indent="0" marL="0">
+              <a:buNone/>
+            </a:pPr>
+            <a:r>
+              <a:rPr lang="en-US" sz="1200" b="1" spc="200" kern="0" dirty="0">
+                <a:solidFill>
+                  <a:srgbClr val="FF4B2B"/>
+                </a:solidFill>
+                <a:latin typeface="Calibri" pitchFamily="34" charset="0"/>
+                <a:ea typeface="Calibri" pitchFamily="34" charset="-122"/>
+                <a:cs typeface="Calibri" pitchFamily="34" charset="-120"/>
+              </a:rPr>
+              <a:t>14 / YOLO_DETECTION.PY</a:t>
+            </a:r>
+            <a:endParaRPr lang="en-US" sz="1200" dirty="0"/>
+          </a:p>
+        </p:txBody>
+      </p:sp>
+      <p:sp>
+        <p:nvSpPr>
+          <p:cNvPr id="3" name="Text 1"/>
+          <p:cNvSpPr/>
+          <p:nvPr/>
+        </p:nvSpPr>
+        <p:spPr>
+          <a:xfrm>
+            <a:off x="548640" y="594360"/>
+            <a:ext cx="10515600" cy="640080"/>
+          </a:xfrm>
+          <a:prstGeom prst="rect">
+            <a:avLst/>
+          </a:prstGeom>
+          <a:noFill/>
+          <a:ln/>
+        </p:spPr>
+        <p:txBody>
+          <a:bodyPr wrap="square" lIns="0" tIns="0" rIns="0" bIns="0" rtlCol="0" anchor="ctr"/>
+          <a:lstStyle/>
+          <a:p>
+            <a:pPr indent="0" marL="0">
+              <a:buNone/>
+            </a:pPr>
+            <a:r>
+              <a:rPr lang="en-US" sz="3000" b="1" dirty="0">
+                <a:solidFill>
+                  <a:srgbClr val="16192A"/>
+                </a:solidFill>
+                <a:latin typeface="Cambria" pitchFamily="34" charset="0"/>
+                <a:ea typeface="Cambria" pitchFamily="34" charset="-122"/>
+                <a:cs typeface="Cambria" pitchFamily="34" charset="-120"/>
+              </a:rPr>
+              <a:t>YOLO ― カメラで物体を見分ける</a:t>
+            </a:r>
+            <a:endParaRPr lang="en-US" sz="3000" dirty="0"/>
+          </a:p>
+        </p:txBody>
+      </p:sp>
+      <p:sp>
+        <p:nvSpPr>
+          <p:cNvPr id="4" name="Text 2"/>
+          <p:cNvSpPr/>
+          <p:nvPr/>
+        </p:nvSpPr>
+        <p:spPr>
+          <a:xfrm>
+            <a:off x="548640" y="1600200"/>
+            <a:ext cx="10881360" cy="502920"/>
+          </a:xfrm>
+          <a:prstGeom prst="rect">
+            <a:avLst/>
+          </a:prstGeom>
+          <a:noFill/>
+          <a:ln/>
+        </p:spPr>
+        <p:txBody>
+          <a:bodyPr wrap="square" lIns="0" tIns="0" rIns="0" bIns="0" rtlCol="0" anchor="ctr"/>
+          <a:lstStyle/>
+          <a:p>
+            <a:pPr indent="0" marL="0">
+              <a:lnSpc>
+                <a:spcPct val="120000"/>
+              </a:lnSpc>
+              <a:buNone/>
+            </a:pPr>
+            <a:r>
+              <a:rPr lang="en-US" sz="1300" dirty="0">
+                <a:solidFill>
+                  <a:srgbClr val="16192A"/>
+                </a:solidFill>
+                <a:latin typeface="Calibri" pitchFamily="34" charset="0"/>
+                <a:ea typeface="Calibri" pitchFamily="34" charset="-122"/>
+                <a:cs typeface="Calibri" pitchFamily="34" charset="-120"/>
+              </a:rPr>
+              <a:t>カメラ画像に写る物体(標識・障害物など)をYOLOで検知し、結果を3つの方法で走行に活かす。config.py の USE_YOLO_* フラグで個別にON/OFFできる。</a:t>
+            </a:r>
+            <a:endParaRPr lang="en-US" sz="1300" dirty="0"/>
+          </a:p>
+        </p:txBody>
+      </p:sp>
+      <p:sp>
+        <p:nvSpPr>
+          <p:cNvPr id="5" name="Shape 3"/>
+          <p:cNvSpPr/>
+          <p:nvPr/>
+        </p:nvSpPr>
+        <p:spPr>
+          <a:xfrm>
+            <a:off x="632308" y="2423160"/>
+            <a:ext cx="3429000" cy="3200400"/>
+          </a:xfrm>
+          <a:prstGeom prst="roundRect">
+            <a:avLst>
+              <a:gd name="adj" fmla="val 3429"/>
+            </a:avLst>
+          </a:prstGeom>
+          <a:solidFill>
+            <a:srgbClr val="F3F5FA"/>
+          </a:solidFill>
+          <a:ln/>
+        </p:spPr>
+      </p:sp>
+      <p:sp>
+        <p:nvSpPr>
+          <p:cNvPr id="6" name="Shape 4"/>
+          <p:cNvSpPr/>
+          <p:nvPr/>
+        </p:nvSpPr>
+        <p:spPr>
+          <a:xfrm>
+            <a:off x="1866748" y="2720340"/>
+            <a:ext cx="960120" cy="960120"/>
+          </a:xfrm>
+          <a:prstGeom prst="ellipse">
+            <a:avLst/>
+          </a:prstGeom>
+          <a:solidFill>
+            <a:srgbClr val="E4FAFC"/>
+          </a:solidFill>
+          <a:ln/>
+        </p:spPr>
+      </p:sp>
+      <p:pic>
+        <p:nvPicPr>
+          <p:cNvPr id="7" name="Image 0" descr="preencoded.png">    </p:cNvPr>
+          <p:cNvPicPr>
+            <a:picLocks noChangeAspect="1"/>
+          </p:cNvPicPr>
+          <p:nvPr/>
+        </p:nvPicPr>
+        <p:blipFill>
+          <a:blip r:embed="rId1"/>
+          <a:stretch>
+            <a:fillRect/>
+          </a:stretch>
+        </p:blipFill>
+        <p:spPr>
+          <a:xfrm>
+            <a:off x="2097176" y="2950769"/>
+            <a:ext cx="499262" cy="499262"/>
+          </a:xfrm>
+          <a:prstGeom prst="rect">
+            <a:avLst/>
+          </a:prstGeom>
+        </p:spPr>
+      </p:pic>
+      <p:sp>
+        <p:nvSpPr>
+          <p:cNvPr id="8" name="Text 5"/>
+          <p:cNvSpPr/>
+          <p:nvPr/>
+        </p:nvSpPr>
+        <p:spPr>
+          <a:xfrm>
+            <a:off x="860908" y="3840480"/>
+            <a:ext cx="2971800" cy="502920"/>
+          </a:xfrm>
+          <a:prstGeom prst="rect">
+            <a:avLst/>
+          </a:prstGeom>
+          <a:noFill/>
+          <a:ln/>
+        </p:spPr>
+        <p:txBody>
+          <a:bodyPr wrap="square" lIns="0" tIns="0" rIns="0" bIns="0" rtlCol="0" anchor="ctr"/>
+          <a:lstStyle/>
+          <a:p>
+            <a:pPr algn="ctr" indent="0" marL="0">
+              <a:lnSpc>
+                <a:spcPct val="105000"/>
+              </a:lnSpc>
+              <a:buNone/>
+            </a:pPr>
+            <a:r>
+              <a:rPr lang="en-US" sz="1400" b="1" dirty="0">
+                <a:solidFill>
+                  <a:srgbClr val="16192A"/>
+                </a:solidFill>
+                <a:latin typeface="Cambria" pitchFamily="34" charset="0"/>
+                <a:ea typeface="Cambria" pitchFamily="34" charset="-122"/>
+                <a:cs typeface="Cambria" pitchFamily="34" charset="-120"/>
+              </a:rPr>
+              <a:t>01  ルールで操作を上書き</a:t>
+            </a:r>
+            <a:endParaRPr lang="en-US" sz="1400" dirty="0"/>
+          </a:p>
+        </p:txBody>
+      </p:sp>
+      <p:sp>
+        <p:nvSpPr>
+          <p:cNvPr id="9" name="Text 6"/>
+          <p:cNvSpPr/>
+          <p:nvPr/>
+        </p:nvSpPr>
+        <p:spPr>
+          <a:xfrm>
+            <a:off x="906628" y="4389120"/>
+            <a:ext cx="2880360" cy="1097280"/>
+          </a:xfrm>
+          <a:prstGeom prst="rect">
+            <a:avLst/>
+          </a:prstGeom>
+          <a:noFill/>
+          <a:ln/>
+        </p:spPr>
+        <p:txBody>
+          <a:bodyPr wrap="square" lIns="0" tIns="0" rIns="0" bIns="0" rtlCol="0" anchor="ctr"/>
+          <a:lstStyle/>
+          <a:p>
+            <a:pPr algn="ctr" indent="0" marL="0">
+              <a:lnSpc>
+                <a:spcPct val="125000"/>
+              </a:lnSpc>
+              <a:buNone/>
+            </a:pPr>
+            <a:r>
+              <a:rPr lang="en-US" sz="1050" dirty="0">
+                <a:solidFill>
+                  <a:srgbClr val="6B7280"/>
+                </a:solidFill>
+                <a:latin typeface="Calibri" pitchFamily="34" charset="0"/>
+                <a:ea typeface="Calibri" pitchFamily="34" charset="-122"/>
+                <a:cs typeface="Calibri" pitchFamily="34" charset="-120"/>
+              </a:rPr>
+              <a:t>検知したクラスに応じて、あらかじめ決めたステアリング補正・減速ルールを適用する(例: 停止標識を見たら減速)。</a:t>
+            </a:r>
+            <a:endParaRPr lang="en-US" sz="1050" dirty="0"/>
+          </a:p>
+        </p:txBody>
+      </p:sp>
+      <p:sp>
+        <p:nvSpPr>
+          <p:cNvPr id="10" name="Shape 7"/>
+          <p:cNvSpPr/>
+          <p:nvPr/>
+        </p:nvSpPr>
+        <p:spPr>
+          <a:xfrm>
+            <a:off x="4381348" y="2423160"/>
+            <a:ext cx="3429000" cy="3200400"/>
+          </a:xfrm>
+          <a:prstGeom prst="roundRect">
+            <a:avLst>
+              <a:gd name="adj" fmla="val 3429"/>
+            </a:avLst>
+          </a:prstGeom>
+          <a:solidFill>
+            <a:srgbClr val="F3F5FA"/>
+          </a:solidFill>
+          <a:ln/>
+        </p:spPr>
+      </p:sp>
+      <p:sp>
+        <p:nvSpPr>
+          <p:cNvPr id="11" name="Shape 8"/>
+          <p:cNvSpPr/>
+          <p:nvPr/>
+        </p:nvSpPr>
+        <p:spPr>
+          <a:xfrm>
+            <a:off x="5615788" y="2720340"/>
+            <a:ext cx="960120" cy="960120"/>
+          </a:xfrm>
+          <a:prstGeom prst="ellipse">
+            <a:avLst/>
+          </a:prstGeom>
+          <a:solidFill>
+            <a:srgbClr val="FFEDE9"/>
+          </a:solidFill>
+          <a:ln/>
+        </p:spPr>
+      </p:sp>
+      <p:pic>
+        <p:nvPicPr>
+          <p:cNvPr id="12" name="Image 1" descr="preencoded.png">    </p:cNvPr>
+          <p:cNvPicPr>
+            <a:picLocks noChangeAspect="1"/>
+          </p:cNvPicPr>
+          <p:nvPr/>
+        </p:nvPicPr>
+        <p:blipFill>
+          <a:blip r:embed="rId2"/>
+          <a:stretch>
+            <a:fillRect/>
+          </a:stretch>
+        </p:blipFill>
+        <p:spPr>
+          <a:xfrm>
+            <a:off x="5846216" y="2950769"/>
+            <a:ext cx="499262" cy="499262"/>
+          </a:xfrm>
+          <a:prstGeom prst="rect">
+            <a:avLst/>
+          </a:prstGeom>
+        </p:spPr>
+      </p:pic>
+      <p:sp>
+        <p:nvSpPr>
+          <p:cNvPr id="13" name="Text 9"/>
+          <p:cNvSpPr/>
+          <p:nvPr/>
+        </p:nvSpPr>
+        <p:spPr>
+          <a:xfrm>
+            <a:off x="4609948" y="3840480"/>
+            <a:ext cx="2971800" cy="502920"/>
+          </a:xfrm>
+          <a:prstGeom prst="rect">
+            <a:avLst/>
+          </a:prstGeom>
+          <a:noFill/>
+          <a:ln/>
+        </p:spPr>
+        <p:txBody>
+          <a:bodyPr wrap="square" lIns="0" tIns="0" rIns="0" bIns="0" rtlCol="0" anchor="ctr"/>
+          <a:lstStyle/>
+          <a:p>
+            <a:pPr algn="ctr" indent="0" marL="0">
+              <a:lnSpc>
+                <a:spcPct val="105000"/>
+              </a:lnSpc>
+              <a:buNone/>
+            </a:pPr>
+            <a:r>
+              <a:rPr lang="en-US" sz="1400" b="1" dirty="0">
+                <a:solidFill>
+                  <a:srgbClr val="16192A"/>
+                </a:solidFill>
+                <a:latin typeface="Cambria" pitchFamily="34" charset="0"/>
+                <a:ea typeface="Cambria" pitchFamily="34" charset="-122"/>
+                <a:cs typeface="Cambria" pitchFamily="34" charset="-120"/>
+              </a:rPr>
+              <a:t>02  モデルを自動で切替</a:t>
+            </a:r>
+            <a:endParaRPr lang="en-US" sz="1400" dirty="0"/>
+          </a:p>
+        </p:txBody>
+      </p:sp>
+      <p:sp>
+        <p:nvSpPr>
+          <p:cNvPr id="14" name="Text 10"/>
+          <p:cNvSpPr/>
+          <p:nvPr/>
+        </p:nvSpPr>
+        <p:spPr>
+          <a:xfrm>
+            <a:off x="4655668" y="4389120"/>
+            <a:ext cx="2880360" cy="1097280"/>
+          </a:xfrm>
+          <a:prstGeom prst="rect">
+            <a:avLst/>
+          </a:prstGeom>
+          <a:noFill/>
+          <a:ln/>
+        </p:spPr>
+        <p:txBody>
+          <a:bodyPr wrap="square" lIns="0" tIns="0" rIns="0" bIns="0" rtlCol="0" anchor="ctr"/>
+          <a:lstStyle/>
+          <a:p>
+            <a:pPr algn="ctr" indent="0" marL="0">
+              <a:lnSpc>
+                <a:spcPct val="125000"/>
+              </a:lnSpc>
+              <a:buNone/>
+            </a:pPr>
+            <a:r>
+              <a:rPr lang="en-US" sz="1050" dirty="0">
+                <a:solidFill>
+                  <a:srgbClr val="6B7280"/>
+                </a:solidFill>
+                <a:latin typeface="Calibri" pitchFamily="34" charset="0"/>
+                <a:ea typeface="Calibri" pitchFamily="34" charset="-122"/>
+                <a:cs typeface="Calibri" pitchFamily="34" charset="-120"/>
+              </a:rPr>
+              <a:t>検知した物体の種類に応じて、使用する走行モデル自体を切り替える。計算負荷を抑えるため数フレームに1回だけ実行。</a:t>
+            </a:r>
+            <a:endParaRPr lang="en-US" sz="1050" dirty="0"/>
+          </a:p>
+        </p:txBody>
+      </p:sp>
+      <p:sp>
+        <p:nvSpPr>
+          <p:cNvPr id="15" name="Shape 11"/>
+          <p:cNvSpPr/>
+          <p:nvPr/>
+        </p:nvSpPr>
+        <p:spPr>
+          <a:xfrm>
+            <a:off x="8130388" y="2423160"/>
+            <a:ext cx="3429000" cy="3200400"/>
+          </a:xfrm>
+          <a:prstGeom prst="roundRect">
+            <a:avLst>
+              <a:gd name="adj" fmla="val 3429"/>
+            </a:avLst>
+          </a:prstGeom>
+          <a:solidFill>
+            <a:srgbClr val="F3F5FA"/>
+          </a:solidFill>
+          <a:ln/>
+        </p:spPr>
+      </p:sp>
+      <p:sp>
+        <p:nvSpPr>
+          <p:cNvPr id="16" name="Shape 12"/>
+          <p:cNvSpPr/>
+          <p:nvPr/>
+        </p:nvSpPr>
+        <p:spPr>
+          <a:xfrm>
+            <a:off x="9364828" y="2720340"/>
+            <a:ext cx="960120" cy="960120"/>
+          </a:xfrm>
+          <a:prstGeom prst="ellipse">
+            <a:avLst/>
+          </a:prstGeom>
+          <a:solidFill>
+            <a:srgbClr val="EAEEF6"/>
+          </a:solidFill>
+          <a:ln/>
+        </p:spPr>
+      </p:sp>
+      <p:pic>
+        <p:nvPicPr>
+          <p:cNvPr id="17" name="Image 2" descr="preencoded.png">    </p:cNvPr>
+          <p:cNvPicPr>
+            <a:picLocks noChangeAspect="1"/>
+          </p:cNvPicPr>
+          <p:nvPr/>
+        </p:nvPicPr>
+        <p:blipFill>
+          <a:blip r:embed="rId3"/>
+          <a:stretch>
+            <a:fillRect/>
+          </a:stretch>
+        </p:blipFill>
+        <p:spPr>
+          <a:xfrm>
+            <a:off x="9595256" y="2950769"/>
+            <a:ext cx="499262" cy="499262"/>
+          </a:xfrm>
+          <a:prstGeom prst="rect">
+            <a:avLst/>
+          </a:prstGeom>
+        </p:spPr>
+      </p:pic>
+      <p:sp>
+        <p:nvSpPr>
+          <p:cNvPr id="18" name="Text 13"/>
+          <p:cNvSpPr/>
+          <p:nvPr/>
+        </p:nvSpPr>
+        <p:spPr>
+          <a:xfrm>
+            <a:off x="8358988" y="3840480"/>
+            <a:ext cx="2971800" cy="502920"/>
+          </a:xfrm>
+          <a:prstGeom prst="rect">
+            <a:avLst/>
+          </a:prstGeom>
+          <a:noFill/>
+          <a:ln/>
+        </p:spPr>
+        <p:txBody>
+          <a:bodyPr wrap="square" lIns="0" tIns="0" rIns="0" bIns="0" rtlCol="0" anchor="ctr"/>
+          <a:lstStyle/>
+          <a:p>
+            <a:pPr algn="ctr" indent="0" marL="0">
+              <a:lnSpc>
+                <a:spcPct val="105000"/>
+              </a:lnSpc>
+              <a:buNone/>
+            </a:pPr>
+            <a:r>
+              <a:rPr lang="en-US" sz="1400" b="1" dirty="0">
+                <a:solidFill>
+                  <a:srgbClr val="16192A"/>
+                </a:solidFill>
+                <a:latin typeface="Cambria" pitchFamily="34" charset="0"/>
+                <a:ea typeface="Cambria" pitchFamily="34" charset="-122"/>
+                <a:cs typeface="Cambria" pitchFamily="34" charset="-120"/>
+              </a:rPr>
+              <a:t>03  物体追従・回避</a:t>
+            </a:r>
+            <a:endParaRPr lang="en-US" sz="1400" dirty="0"/>
+          </a:p>
+        </p:txBody>
+      </p:sp>
+      <p:sp>
+        <p:nvSpPr>
+          <p:cNvPr id="19" name="Text 14"/>
+          <p:cNvSpPr/>
+          <p:nvPr/>
+        </p:nvSpPr>
+        <p:spPr>
+          <a:xfrm>
+            <a:off x="8404708" y="4389120"/>
+            <a:ext cx="2880360" cy="1097280"/>
+          </a:xfrm>
+          <a:prstGeom prst="rect">
+            <a:avLst/>
+          </a:prstGeom>
+          <a:noFill/>
+          <a:ln/>
+        </p:spPr>
+        <p:txBody>
+          <a:bodyPr wrap="square" lIns="0" tIns="0" rIns="0" bIns="0" rtlCol="0" anchor="ctr"/>
+          <a:lstStyle/>
+          <a:p>
+            <a:pPr algn="ctr" indent="0" marL="0">
+              <a:lnSpc>
+                <a:spcPct val="125000"/>
+              </a:lnSpc>
+              <a:buNone/>
+            </a:pPr>
+            <a:r>
+              <a:rPr lang="en-US" sz="1050" dirty="0">
+                <a:solidFill>
+                  <a:srgbClr val="6B7280"/>
+                </a:solidFill>
+                <a:latin typeface="Calibri" pitchFamily="34" charset="0"/>
+                <a:ea typeface="Calibri" pitchFamily="34" charset="-122"/>
+                <a:cs typeface="Calibri" pitchFamily="34" charset="-120"/>
+              </a:rPr>
+              <a:t>検知した箱(バウンディングボックス)の画面中心からのズレに応じて、比例制御でステアリングを補正する。</a:t>
+            </a:r>
+            <a:endParaRPr lang="en-US" sz="1050" dirty="0"/>
+          </a:p>
+        </p:txBody>
+      </p:sp>
+      <p:sp>
+        <p:nvSpPr>
+          <p:cNvPr id="20" name="Shape 15"/>
+          <p:cNvSpPr/>
+          <p:nvPr/>
+        </p:nvSpPr>
+        <p:spPr>
+          <a:xfrm>
+            <a:off x="632308" y="5852160"/>
+            <a:ext cx="10927080" cy="457200"/>
+          </a:xfrm>
+          <a:prstGeom prst="roundRect">
+            <a:avLst>
+              <a:gd name="adj" fmla="val 16000"/>
+            </a:avLst>
+          </a:prstGeom>
+          <a:solidFill>
+            <a:srgbClr val="F3F5FA"/>
+          </a:solidFill>
+          <a:ln/>
+        </p:spPr>
+      </p:sp>
+      <p:sp>
+        <p:nvSpPr>
+          <p:cNvPr id="21" name="Text 16"/>
+          <p:cNvSpPr/>
+          <p:nvPr/>
+        </p:nvSpPr>
+        <p:spPr>
+          <a:xfrm>
+            <a:off x="860908" y="5852160"/>
+            <a:ext cx="10469880" cy="457200"/>
+          </a:xfrm>
+          <a:prstGeom prst="rect">
+            <a:avLst/>
+          </a:prstGeom>
+          <a:noFill/>
+          <a:ln/>
+        </p:spPr>
+        <p:txBody>
+          <a:bodyPr wrap="square" lIns="0" tIns="0" rIns="0" bIns="0" rtlCol="0" anchor="ctr"/>
+          <a:lstStyle/>
+          <a:p>
+            <a:pPr indent="0" marL="0">
+              <a:buNone/>
+            </a:pPr>
+            <a:r>
+              <a:rPr lang="en-US" sz="1050" dirty="0">
+                <a:solidFill>
+                  <a:srgbClr val="16192A"/>
+                </a:solidFill>
+                <a:latin typeface="Calibri" pitchFamily="34" charset="0"/>
+                <a:ea typeface="Calibri" pitchFamily="34" charset="-122"/>
+                <a:cs typeface="Calibri" pitchFamily="34" charset="-120"/>
+              </a:rPr>
+              <a:t>💡 yolo11n〜yolo11x はモデルサイズの違い(nが最速・軽量、xが最高精度・低速)</a:t>
+            </a:r>
+            <a:endParaRPr lang="en-US" sz="1050" dirty="0"/>
+          </a:p>
+        </p:txBody>
+      </p:sp>
+      <p:sp>
+        <p:nvSpPr>
+          <p:cNvPr id="22" name="Text 17"/>
+          <p:cNvSpPr/>
+          <p:nvPr/>
+        </p:nvSpPr>
+        <p:spPr>
+          <a:xfrm>
+            <a:off x="11521440" y="6446520"/>
+            <a:ext cx="548640" cy="274320"/>
+          </a:xfrm>
+          <a:prstGeom prst="rect">
+            <a:avLst/>
+          </a:prstGeom>
+          <a:noFill/>
+          <a:ln/>
+        </p:spPr>
+        <p:txBody>
+          <a:bodyPr wrap="square" lIns="0" tIns="0" rIns="0" bIns="0" rtlCol="0" anchor="ctr"/>
+          <a:lstStyle/>
+          <a:p>
+            <a:pPr algn="r" indent="0" marL="0">
+              <a:buNone/>
+            </a:pPr>
+            <a:r>
+              <a:rPr lang="en-US" sz="1000" dirty="0">
+                <a:solidFill>
+                  <a:srgbClr val="6B7280"/>
+                </a:solidFill>
+                <a:latin typeface="Calibri" pitchFamily="34" charset="0"/>
+                <a:ea typeface="Calibri" pitchFamily="34" charset="-122"/>
+                <a:cs typeface="Calibri" pitchFamily="34" charset="-120"/>
+              </a:rPr>
+              <a:t>14</a:t>
+            </a:r>
+            <a:endParaRPr lang="en-US" sz="1000" dirty="0"/>
+          </a:p>
+        </p:txBody>
+      </p:sp>
+    </p:spTree>
+  </p:cSld>
+  <p:clrMapOvr>
+    <a:masterClrMapping/>
+  </p:clrMapOvr>
+</p:sld>
+</file>
+
+<file path=ppt/slides/slide15.xml><?xml version="1.0" encoding="utf-8"?>
+<p:sld xmlns:a="http://schemas.openxmlformats.org/drawingml/2006/main" xmlns:r="http://schemas.openxmlformats.org/officeDocument/2006/relationships" xmlns:p="http://schemas.openxmlformats.org/presentationml/2006/main">
+  <p:cSld name="Slide 15">
+    <p:bg>
+      <p:bgPr>
+        <a:solidFill>
+          <a:srgbClr val="FFFFFF"/>
+        </a:solidFill>
+      </p:bgPr>
+    </p:bg>
+    <p:spTree>
+      <p:nvGrpSpPr>
+        <p:cNvPr id="1" name=""/>
+        <p:cNvGrpSpPr/>
+        <p:nvPr/>
+      </p:nvGrpSpPr>
+      <p:grpSpPr>
+        <a:xfrm>
+          <a:off x="0" y="0"/>
+          <a:ext cx="0" cy="0"/>
+          <a:chOff x="0" y="0"/>
+          <a:chExt cx="0" cy="0"/>
+        </a:xfrm>
+      </p:grpSpPr>
+      <p:sp>
+        <p:nvSpPr>
+          <p:cNvPr id="2" name="Text 0"/>
+          <p:cNvSpPr/>
+          <p:nvPr/>
+        </p:nvSpPr>
+        <p:spPr>
+          <a:xfrm>
+            <a:off x="548640" y="320040"/>
+            <a:ext cx="7315200" cy="320040"/>
+          </a:xfrm>
+          <a:prstGeom prst="rect">
+            <a:avLst/>
+          </a:prstGeom>
+          <a:noFill/>
+          <a:ln/>
+        </p:spPr>
+        <p:txBody>
+          <a:bodyPr wrap="square" lIns="0" tIns="0" rIns="0" bIns="0" rtlCol="0" anchor="ctr"/>
+          <a:lstStyle/>
+          <a:p>
+            <a:pPr indent="0" marL="0">
+              <a:buNone/>
+            </a:pPr>
+            <a:r>
+              <a:rPr lang="en-US" sz="1200" b="1" spc="200" kern="0" dirty="0">
+                <a:solidFill>
+                  <a:srgbClr val="FF4B2B"/>
+                </a:solidFill>
+                <a:latin typeface="Calibri" pitchFamily="34" charset="0"/>
+                <a:ea typeface="Calibri" pitchFamily="34" charset="-122"/>
+                <a:cs typeface="Calibri" pitchFamily="34" charset="-120"/>
+              </a:rPr>
+              <a:t>15 / ARBITER.PY</a:t>
+            </a:r>
+            <a:endParaRPr lang="en-US" sz="1200" dirty="0"/>
+          </a:p>
+        </p:txBody>
+      </p:sp>
+      <p:sp>
+        <p:nvSpPr>
+          <p:cNvPr id="3" name="Text 1"/>
+          <p:cNvSpPr/>
+          <p:nvPr/>
+        </p:nvSpPr>
+        <p:spPr>
+          <a:xfrm>
+            <a:off x="548640" y="594360"/>
+            <a:ext cx="10515600" cy="640080"/>
+          </a:xfrm>
+          <a:prstGeom prst="rect">
+            <a:avLst/>
+          </a:prstGeom>
+          <a:noFill/>
+          <a:ln/>
+        </p:spPr>
+        <p:txBody>
+          <a:bodyPr wrap="square" lIns="0" tIns="0" rIns="0" bIns="0" rtlCol="0" anchor="ctr"/>
+          <a:lstStyle/>
+          <a:p>
+            <a:pPr indent="0" marL="0">
+              <a:buNone/>
+            </a:pPr>
+            <a:r>
+              <a:rPr lang="en-US" sz="3000" b="1" dirty="0">
+                <a:solidFill>
+                  <a:srgbClr val="16192A"/>
+                </a:solidFill>
+                <a:latin typeface="Cambria" pitchFamily="34" charset="0"/>
+                <a:ea typeface="Cambria" pitchFamily="34" charset="-122"/>
+                <a:cs typeface="Cambria" pitchFamily="34" charset="-120"/>
+              </a:rPr>
+              <a:t>ControlArbiter ― 判断を二重チェックする安全弁</a:t>
+            </a:r>
+            <a:endParaRPr lang="en-US" sz="3000" dirty="0"/>
+          </a:p>
+        </p:txBody>
+      </p:sp>
+      <p:sp>
+        <p:nvSpPr>
+          <p:cNvPr id="4" name="Text 2"/>
+          <p:cNvSpPr/>
+          <p:nvPr/>
+        </p:nvSpPr>
+        <p:spPr>
+          <a:xfrm>
+            <a:off x="548640" y="1600200"/>
+            <a:ext cx="10881360" cy="502920"/>
+          </a:xfrm>
+          <a:prstGeom prst="rect">
+            <a:avLst/>
+          </a:prstGeom>
+          <a:noFill/>
+          <a:ln/>
+        </p:spPr>
+        <p:txBody>
+          <a:bodyPr wrap="square" lIns="0" tIns="0" rIns="0" bIns="0" rtlCol="0" anchor="ctr"/>
+          <a:lstStyle/>
+          <a:p>
+            <a:pPr indent="0" marL="0">
+              <a:lnSpc>
+                <a:spcPct val="120000"/>
+              </a:lnSpc>
+              <a:buNone/>
+            </a:pPr>
+            <a:r>
+              <a:rPr lang="en-US" sz="1300" dirty="0">
+                <a:solidFill>
+                  <a:srgbClr val="16192A"/>
+                </a:solidFill>
+                <a:latin typeface="Calibri" pitchFamily="34" charset="0"/>
+                <a:ea typeface="Calibri" pitchFamily="34" charset="-122"/>
+                <a:cs typeface="Calibri" pitchFamily="34" charset="-120"/>
+              </a:rPr>
+              <a:t>planner.py が出した判断(steering, throttle)を、状況に応じて上書きできる「安全弁」。planner.py の内部から毎フレーム呼び出される、走行ロジックの裏方。</a:t>
+            </a:r>
+            <a:endParaRPr lang="en-US" sz="1300" dirty="0"/>
+          </a:p>
+        </p:txBody>
+      </p:sp>
+      <p:sp>
+        <p:nvSpPr>
+          <p:cNvPr id="5" name="Shape 3"/>
+          <p:cNvSpPr/>
+          <p:nvPr/>
+        </p:nvSpPr>
+        <p:spPr>
+          <a:xfrm>
+            <a:off x="548640" y="2377440"/>
+            <a:ext cx="4937760" cy="548640"/>
+          </a:xfrm>
+          <a:prstGeom prst="roundRect">
+            <a:avLst>
+              <a:gd name="adj" fmla="val 13333"/>
+            </a:avLst>
+          </a:prstGeom>
+          <a:solidFill>
+            <a:srgbClr val="10131A"/>
+          </a:solidFill>
+          <a:ln/>
+        </p:spPr>
+      </p:sp>
+      <p:sp>
+        <p:nvSpPr>
+          <p:cNvPr id="6" name="Text 4"/>
+          <p:cNvSpPr/>
+          <p:nvPr/>
+        </p:nvSpPr>
+        <p:spPr>
+          <a:xfrm>
+            <a:off x="777240" y="2377440"/>
+            <a:ext cx="4480560" cy="548640"/>
+          </a:xfrm>
+          <a:prstGeom prst="rect">
+            <a:avLst/>
+          </a:prstGeom>
+          <a:noFill/>
+          <a:ln/>
+        </p:spPr>
+        <p:txBody>
+          <a:bodyPr wrap="square" lIns="0" tIns="0" rIns="0" bIns="0" rtlCol="0" anchor="ctr"/>
+          <a:lstStyle/>
+          <a:p>
+            <a:pPr algn="ctr" indent="0" marL="0">
+              <a:buNone/>
+            </a:pPr>
+            <a:r>
+              <a:rPr lang="en-US" sz="1250" b="1" dirty="0">
+                <a:solidFill>
+                  <a:srgbClr val="FFFFFF"/>
+                </a:solidFill>
+                <a:latin typeface="Calibri" pitchFamily="34" charset="0"/>
+                <a:ea typeface="Calibri" pitchFamily="34" charset="-122"/>
+                <a:cs typeface="Calibri" pitchFamily="34" charset="-120"/>
+              </a:rPr>
+              <a:t>planner.py が主判断(steering, throttle)を計算</a:t>
+            </a:r>
+            <a:endParaRPr lang="en-US" sz="1250" dirty="0"/>
+          </a:p>
+        </p:txBody>
+      </p:sp>
+      <p:sp>
+        <p:nvSpPr>
+          <p:cNvPr id="7" name="Text 5"/>
+          <p:cNvSpPr/>
+          <p:nvPr/>
+        </p:nvSpPr>
+        <p:spPr>
+          <a:xfrm>
+            <a:off x="548640" y="2926080"/>
+            <a:ext cx="4937760" cy="274320"/>
+          </a:xfrm>
+          <a:prstGeom prst="rect">
+            <a:avLst/>
+          </a:prstGeom>
+          <a:noFill/>
+          <a:ln/>
+        </p:spPr>
+        <p:txBody>
+          <a:bodyPr wrap="square" lIns="0" tIns="0" rIns="0" bIns="0" rtlCol="0" anchor="ctr"/>
+          <a:lstStyle/>
+          <a:p>
+            <a:pPr algn="ctr" indent="0" marL="0">
+              <a:buNone/>
+            </a:pPr>
+            <a:r>
+              <a:rPr lang="en-US" sz="1600" dirty="0">
+                <a:solidFill>
+                  <a:srgbClr val="6B7280"/>
+                </a:solidFill>
+                <a:latin typeface="Calibri" pitchFamily="34" charset="0"/>
+                <a:ea typeface="Calibri" pitchFamily="34" charset="-122"/>
+                <a:cs typeface="Calibri" pitchFamily="34" charset="-120"/>
+              </a:rPr>
+              <a:t>↓</a:t>
+            </a:r>
+            <a:endParaRPr lang="en-US" sz="1600" dirty="0"/>
+          </a:p>
+        </p:txBody>
+      </p:sp>
+      <p:sp>
+        <p:nvSpPr>
+          <p:cNvPr id="8" name="Shape 6"/>
+          <p:cNvSpPr/>
+          <p:nvPr/>
+        </p:nvSpPr>
+        <p:spPr>
+          <a:xfrm>
+            <a:off x="548640" y="3200400"/>
+            <a:ext cx="4937760" cy="548640"/>
+          </a:xfrm>
+          <a:prstGeom prst="roundRect">
+            <a:avLst>
+              <a:gd name="adj" fmla="val 13333"/>
+            </a:avLst>
+          </a:prstGeom>
+          <a:solidFill>
+            <a:srgbClr val="FF4B2B"/>
+          </a:solidFill>
+          <a:ln/>
+        </p:spPr>
+      </p:sp>
+      <p:sp>
+        <p:nvSpPr>
+          <p:cNvPr id="9" name="Text 7"/>
+          <p:cNvSpPr/>
+          <p:nvPr/>
+        </p:nvSpPr>
+        <p:spPr>
+          <a:xfrm>
+            <a:off x="777240" y="3200400"/>
+            <a:ext cx="4480560" cy="548640"/>
+          </a:xfrm>
+          <a:prstGeom prst="rect">
+            <a:avLst/>
+          </a:prstGeom>
+          <a:noFill/>
+          <a:ln/>
+        </p:spPr>
+        <p:txBody>
+          <a:bodyPr wrap="square" lIns="0" tIns="0" rIns="0" bIns="0" rtlCol="0" anchor="ctr"/>
+          <a:lstStyle/>
+          <a:p>
+            <a:pPr algn="ctr" indent="0" marL="0">
+              <a:buNone/>
+            </a:pPr>
+            <a:r>
+              <a:rPr lang="en-US" sz="1250" b="1" dirty="0">
+                <a:solidFill>
+                  <a:srgbClr val="FFFFFF"/>
+                </a:solidFill>
+                <a:latin typeface="Calibri" pitchFamily="34" charset="0"/>
+                <a:ea typeface="Calibri" pitchFamily="34" charset="-122"/>
+                <a:cs typeface="Calibri" pitchFamily="34" charset="-120"/>
+              </a:rPr>
+              <a:t>ControlArbiter.arbitrate()</a:t>
+            </a:r>
+            <a:endParaRPr lang="en-US" sz="1250" dirty="0"/>
+          </a:p>
+        </p:txBody>
+      </p:sp>
+      <p:sp>
+        <p:nvSpPr>
+          <p:cNvPr id="10" name="Text 8"/>
+          <p:cNvSpPr/>
+          <p:nvPr/>
+        </p:nvSpPr>
+        <p:spPr>
+          <a:xfrm>
+            <a:off x="548640" y="3749040"/>
+            <a:ext cx="4937760" cy="274320"/>
+          </a:xfrm>
+          <a:prstGeom prst="rect">
+            <a:avLst/>
+          </a:prstGeom>
+          <a:noFill/>
+          <a:ln/>
+        </p:spPr>
+        <p:txBody>
+          <a:bodyPr wrap="square" lIns="0" tIns="0" rIns="0" bIns="0" rtlCol="0" anchor="ctr"/>
+          <a:lstStyle/>
+          <a:p>
+            <a:pPr algn="ctr" indent="0" marL="0">
+              <a:buNone/>
+            </a:pPr>
+            <a:r>
+              <a:rPr lang="en-US" sz="1600" dirty="0">
+                <a:solidFill>
+                  <a:srgbClr val="6B7280"/>
+                </a:solidFill>
+                <a:latin typeface="Calibri" pitchFamily="34" charset="0"/>
+                <a:ea typeface="Calibri" pitchFamily="34" charset="-122"/>
+                <a:cs typeface="Calibri" pitchFamily="34" charset="-120"/>
+              </a:rPr>
+              <a:t>↓</a:t>
+            </a:r>
+            <a:endParaRPr lang="en-US" sz="1600" dirty="0"/>
+          </a:p>
+        </p:txBody>
+      </p:sp>
+      <p:sp>
+        <p:nvSpPr>
+          <p:cNvPr id="11" name="Shape 9"/>
+          <p:cNvSpPr/>
+          <p:nvPr/>
+        </p:nvSpPr>
+        <p:spPr>
+          <a:xfrm>
+            <a:off x="548640" y="4023360"/>
+            <a:ext cx="4937760" cy="548640"/>
+          </a:xfrm>
+          <a:prstGeom prst="roundRect">
+            <a:avLst>
+              <a:gd name="adj" fmla="val 13333"/>
+            </a:avLst>
+          </a:prstGeom>
+          <a:solidFill>
+            <a:srgbClr val="1F2A44"/>
+          </a:solidFill>
+          <a:ln/>
+        </p:spPr>
+      </p:sp>
+      <p:sp>
+        <p:nvSpPr>
+          <p:cNvPr id="12" name="Text 10"/>
+          <p:cNvSpPr/>
+          <p:nvPr/>
+        </p:nvSpPr>
+        <p:spPr>
+          <a:xfrm>
+            <a:off x="777240" y="4023360"/>
+            <a:ext cx="4480560" cy="548640"/>
+          </a:xfrm>
+          <a:prstGeom prst="rect">
+            <a:avLst/>
+          </a:prstGeom>
+          <a:noFill/>
+          <a:ln/>
+        </p:spPr>
+        <p:txBody>
+          <a:bodyPr wrap="square" lIns="0" tIns="0" rIns="0" bIns="0" rtlCol="0" anchor="ctr"/>
+          <a:lstStyle/>
+          <a:p>
+            <a:pPr algn="ctr" indent="0" marL="0">
+              <a:buNone/>
+            </a:pPr>
+            <a:r>
+              <a:rPr lang="en-US" sz="1250" b="1" dirty="0">
+                <a:solidFill>
+                  <a:srgbClr val="FFFFFF"/>
+                </a:solidFill>
+                <a:latin typeface="Calibri" pitchFamily="34" charset="0"/>
+                <a:ea typeface="Calibri" pitchFamily="34" charset="-122"/>
+                <a:cs typeface="Calibri" pitchFamily="34" charset="-120"/>
+              </a:rPr>
+              <a:t>motor.py へ出力(必要なら上書き済み)</a:t>
+            </a:r>
+            <a:endParaRPr lang="en-US" sz="1250" dirty="0"/>
+          </a:p>
+        </p:txBody>
+      </p:sp>
+      <p:sp>
+        <p:nvSpPr>
+          <p:cNvPr id="13" name="Text 11"/>
+          <p:cNvSpPr/>
+          <p:nvPr/>
+        </p:nvSpPr>
+        <p:spPr>
+          <a:xfrm>
+            <a:off x="6126480" y="2286000"/>
+            <a:ext cx="5486400" cy="320040"/>
+          </a:xfrm>
+          <a:prstGeom prst="rect">
+            <a:avLst/>
+          </a:prstGeom>
+          <a:noFill/>
+          <a:ln/>
+        </p:spPr>
+        <p:txBody>
+          <a:bodyPr wrap="square" lIns="0" tIns="0" rIns="0" bIns="0" rtlCol="0" anchor="ctr"/>
+          <a:lstStyle/>
+          <a:p>
+            <a:pPr indent="0" marL="0">
+              <a:buNone/>
+            </a:pPr>
+            <a:r>
+              <a:rPr lang="en-US" sz="1400" b="1" dirty="0">
+                <a:solidFill>
+                  <a:srgbClr val="16192A"/>
+                </a:solidFill>
+                <a:latin typeface="Cambria" pitchFamily="34" charset="0"/>
+                <a:ea typeface="Cambria" pitchFamily="34" charset="-122"/>
+                <a:cs typeface="Cambria" pitchFamily="34" charset="-120"/>
+              </a:rPr>
+              <a:t>3つの発動モード(ARBITER_MODE)</a:t>
+            </a:r>
+            <a:endParaRPr lang="en-US" sz="1400" dirty="0"/>
+          </a:p>
+        </p:txBody>
+      </p:sp>
+      <p:sp>
+        <p:nvSpPr>
+          <p:cNvPr id="14" name="Shape 12"/>
+          <p:cNvSpPr/>
+          <p:nvPr/>
+        </p:nvSpPr>
+        <p:spPr>
+          <a:xfrm>
+            <a:off x="6126480" y="2697480"/>
+            <a:ext cx="5513832" cy="914400"/>
+          </a:xfrm>
+          <a:prstGeom prst="roundRect">
+            <a:avLst>
+              <a:gd name="adj" fmla="val 8000"/>
+            </a:avLst>
+          </a:prstGeom>
+          <a:solidFill>
+            <a:srgbClr val="E4FAFC"/>
+          </a:solidFill>
+          <a:ln/>
+        </p:spPr>
+      </p:sp>
+      <p:sp>
+        <p:nvSpPr>
+          <p:cNvPr id="15" name="Text 13"/>
+          <p:cNvSpPr/>
+          <p:nvPr/>
+        </p:nvSpPr>
+        <p:spPr>
+          <a:xfrm>
+            <a:off x="6355080" y="2788920"/>
+            <a:ext cx="5029200" cy="274320"/>
+          </a:xfrm>
+          <a:prstGeom prst="rect">
+            <a:avLst/>
+          </a:prstGeom>
+          <a:noFill/>
+          <a:ln/>
+        </p:spPr>
+        <p:txBody>
+          <a:bodyPr wrap="square" lIns="0" tIns="0" rIns="0" bIns="0" rtlCol="0" anchor="ctr"/>
+          <a:lstStyle/>
+          <a:p>
+            <a:pPr indent="0" marL="0">
+              <a:buNone/>
+            </a:pPr>
+            <a:r>
+              <a:rPr lang="en-US" sz="1250" b="1" dirty="0">
+                <a:solidFill>
+                  <a:srgbClr val="16192A"/>
+                </a:solidFill>
+                <a:latin typeface="Cambria" pitchFamily="34" charset="0"/>
+                <a:ea typeface="Cambria" pitchFamily="34" charset="-122"/>
+                <a:cs typeface="Cambria" pitchFamily="34" charset="-120"/>
+              </a:rPr>
+              <a:t>fallback</a:t>
+            </a:r>
+            <a:endParaRPr lang="en-US" sz="1250" dirty="0"/>
+          </a:p>
+        </p:txBody>
+      </p:sp>
+      <p:sp>
+        <p:nvSpPr>
+          <p:cNvPr id="16" name="Text 14"/>
+          <p:cNvSpPr/>
+          <p:nvPr/>
+        </p:nvSpPr>
+        <p:spPr>
+          <a:xfrm>
+            <a:off x="6355080" y="3081528"/>
+            <a:ext cx="5029200" cy="457200"/>
+          </a:xfrm>
+          <a:prstGeom prst="rect">
+            <a:avLst/>
+          </a:prstGeom>
+          <a:noFill/>
+          <a:ln/>
+        </p:spPr>
+        <p:txBody>
+          <a:bodyPr wrap="square" lIns="0" tIns="0" rIns="0" bIns="0" rtlCol="0" anchor="ctr"/>
+          <a:lstStyle/>
+          <a:p>
+            <a:pPr indent="0" marL="0">
+              <a:lnSpc>
+                <a:spcPct val="115000"/>
+              </a:lnSpc>
+              <a:buNone/>
+            </a:pPr>
+            <a:r>
+              <a:rPr lang="en-US" sz="980" dirty="0">
+                <a:solidFill>
+                  <a:srgbClr val="6B7280"/>
+                </a:solidFill>
+                <a:latin typeface="Calibri" pitchFamily="34" charset="0"/>
+                <a:ea typeface="Calibri" pitchFamily="34" charset="-122"/>
+                <a:cs typeface="Calibri" pitchFamily="34" charset="-120"/>
+              </a:rPr>
+              <a:t>自己位置推定の信頼度が下がったら、副プラン(例: カメラCNN)へ自動切替</a:t>
+            </a:r>
+            <a:endParaRPr lang="en-US" sz="980" dirty="0"/>
+          </a:p>
+        </p:txBody>
+      </p:sp>
+      <p:sp>
+        <p:nvSpPr>
+          <p:cNvPr id="17" name="Shape 15"/>
+          <p:cNvSpPr/>
+          <p:nvPr/>
+        </p:nvSpPr>
+        <p:spPr>
+          <a:xfrm>
+            <a:off x="6126480" y="3749040"/>
+            <a:ext cx="5513832" cy="914400"/>
+          </a:xfrm>
+          <a:prstGeom prst="roundRect">
+            <a:avLst>
+              <a:gd name="adj" fmla="val 8000"/>
+            </a:avLst>
+          </a:prstGeom>
+          <a:solidFill>
+            <a:srgbClr val="FFEDE9"/>
+          </a:solidFill>
+          <a:ln/>
+        </p:spPr>
+      </p:sp>
+      <p:sp>
+        <p:nvSpPr>
+          <p:cNvPr id="18" name="Text 16"/>
+          <p:cNvSpPr/>
+          <p:nvPr/>
+        </p:nvSpPr>
+        <p:spPr>
+          <a:xfrm>
+            <a:off x="6355080" y="3840480"/>
+            <a:ext cx="5029200" cy="274320"/>
+          </a:xfrm>
+          <a:prstGeom prst="rect">
+            <a:avLst/>
+          </a:prstGeom>
+          <a:noFill/>
+          <a:ln/>
+        </p:spPr>
+        <p:txBody>
+          <a:bodyPr wrap="square" lIns="0" tIns="0" rIns="0" bIns="0" rtlCol="0" anchor="ctr"/>
+          <a:lstStyle/>
+          <a:p>
+            <a:pPr indent="0" marL="0">
+              <a:buNone/>
+            </a:pPr>
+            <a:r>
+              <a:rPr lang="en-US" sz="1250" b="1" dirty="0">
+                <a:solidFill>
+                  <a:srgbClr val="16192A"/>
+                </a:solidFill>
+                <a:latin typeface="Cambria" pitchFamily="34" charset="0"/>
+                <a:ea typeface="Cambria" pitchFamily="34" charset="-122"/>
+                <a:cs typeface="Cambria" pitchFamily="34" charset="-120"/>
+              </a:rPr>
+              <a:t>events</a:t>
+            </a:r>
+            <a:endParaRPr lang="en-US" sz="1250" dirty="0"/>
+          </a:p>
+        </p:txBody>
+      </p:sp>
+      <p:sp>
+        <p:nvSpPr>
+          <p:cNvPr id="19" name="Text 17"/>
+          <p:cNvSpPr/>
+          <p:nvPr/>
+        </p:nvSpPr>
+        <p:spPr>
+          <a:xfrm>
+            <a:off x="6355080" y="4133088"/>
+            <a:ext cx="5029200" cy="457200"/>
+          </a:xfrm>
+          <a:prstGeom prst="rect">
+            <a:avLst/>
+          </a:prstGeom>
+          <a:noFill/>
+          <a:ln/>
+        </p:spPr>
+        <p:txBody>
+          <a:bodyPr wrap="square" lIns="0" tIns="0" rIns="0" bIns="0" rtlCol="0" anchor="ctr"/>
+          <a:lstStyle/>
+          <a:p>
+            <a:pPr indent="0" marL="0">
+              <a:lnSpc>
+                <a:spcPct val="115000"/>
+              </a:lnSpc>
+              <a:buNone/>
+            </a:pPr>
+            <a:r>
+              <a:rPr lang="en-US" sz="980" dirty="0">
+                <a:solidFill>
+                  <a:srgbClr val="6B7280"/>
+                </a:solidFill>
+                <a:latin typeface="Calibri" pitchFamily="34" charset="0"/>
+                <a:ea typeface="Calibri" pitchFamily="34" charset="-122"/>
+                <a:cs typeface="Calibri" pitchFamily="34" charset="-120"/>
+              </a:rPr>
+              <a:t>経路からのズレを監視し、逸脱していたら副プランへ切替、または緊急停止</a:t>
+            </a:r>
+            <a:endParaRPr lang="en-US" sz="980" dirty="0"/>
+          </a:p>
+        </p:txBody>
+      </p:sp>
+      <p:sp>
+        <p:nvSpPr>
+          <p:cNvPr id="20" name="Shape 18"/>
+          <p:cNvSpPr/>
+          <p:nvPr/>
+        </p:nvSpPr>
+        <p:spPr>
+          <a:xfrm>
+            <a:off x="6126480" y="4800600"/>
+            <a:ext cx="5513832" cy="914400"/>
+          </a:xfrm>
+          <a:prstGeom prst="roundRect">
+            <a:avLst>
+              <a:gd name="adj" fmla="val 8000"/>
+            </a:avLst>
+          </a:prstGeom>
+          <a:solidFill>
+            <a:srgbClr val="EAEEF6"/>
+          </a:solidFill>
+          <a:ln/>
+        </p:spPr>
+      </p:sp>
+      <p:sp>
+        <p:nvSpPr>
+          <p:cNvPr id="21" name="Text 19"/>
+          <p:cNvSpPr/>
+          <p:nvPr/>
+        </p:nvSpPr>
+        <p:spPr>
+          <a:xfrm>
+            <a:off x="6355080" y="4892040"/>
+            <a:ext cx="5029200" cy="274320"/>
+          </a:xfrm>
+          <a:prstGeom prst="rect">
+            <a:avLst/>
+          </a:prstGeom>
+          <a:noFill/>
+          <a:ln/>
+        </p:spPr>
+        <p:txBody>
+          <a:bodyPr wrap="square" lIns="0" tIns="0" rIns="0" bIns="0" rtlCol="0" anchor="ctr"/>
+          <a:lstStyle/>
+          <a:p>
+            <a:pPr indent="0" marL="0">
+              <a:buNone/>
+            </a:pPr>
+            <a:r>
+              <a:rPr lang="en-US" sz="1250" b="1" dirty="0">
+                <a:solidFill>
+                  <a:srgbClr val="16192A"/>
+                </a:solidFill>
+                <a:latin typeface="Cambria" pitchFamily="34" charset="0"/>
+                <a:ea typeface="Cambria" pitchFamily="34" charset="-122"/>
+                <a:cs typeface="Cambria" pitchFamily="34" charset="-120"/>
+              </a:rPr>
+              <a:t>obstacle</a:t>
+            </a:r>
+            <a:endParaRPr lang="en-US" sz="1250" dirty="0"/>
+          </a:p>
+        </p:txBody>
+      </p:sp>
+      <p:sp>
+        <p:nvSpPr>
+          <p:cNvPr id="22" name="Text 20"/>
+          <p:cNvSpPr/>
+          <p:nvPr/>
+        </p:nvSpPr>
+        <p:spPr>
+          <a:xfrm>
+            <a:off x="6355080" y="5184648"/>
+            <a:ext cx="5029200" cy="457200"/>
+          </a:xfrm>
+          <a:prstGeom prst="rect">
+            <a:avLst/>
+          </a:prstGeom>
+          <a:noFill/>
+          <a:ln/>
+        </p:spPr>
+        <p:txBody>
+          <a:bodyPr wrap="square" lIns="0" tIns="0" rIns="0" bIns="0" rtlCol="0" anchor="ctr"/>
+          <a:lstStyle/>
+          <a:p>
+            <a:pPr indent="0" marL="0">
+              <a:lnSpc>
+                <a:spcPct val="115000"/>
+              </a:lnSpc>
+              <a:buNone/>
+            </a:pPr>
+            <a:r>
+              <a:rPr lang="en-US" sz="980" dirty="0">
+                <a:solidFill>
+                  <a:srgbClr val="6B7280"/>
+                </a:solidFill>
+                <a:latin typeface="Calibri" pitchFamily="34" charset="0"/>
+                <a:ea typeface="Calibri" pitchFamily="34" charset="-122"/>
+                <a:cs typeface="Calibri" pitchFamily="34" charset="-120"/>
+              </a:rPr>
+              <a:t>LiDARが前方の狭い範囲に障害物を検知したら副プラン(例: ローカルMPPI回避)へ切替。ただし直進に近い時のみ判定し、コーナリング中の誤反応を避ける</a:t>
+            </a:r>
+            <a:endParaRPr lang="en-US" sz="980" dirty="0"/>
+          </a:p>
+        </p:txBody>
+      </p:sp>
+      <p:sp>
+        <p:nvSpPr>
+          <p:cNvPr id="23" name="Text 21"/>
+          <p:cNvSpPr/>
+          <p:nvPr/>
+        </p:nvSpPr>
+        <p:spPr>
+          <a:xfrm>
+            <a:off x="11521440" y="6446520"/>
+            <a:ext cx="548640" cy="274320"/>
+          </a:xfrm>
+          <a:prstGeom prst="rect">
+            <a:avLst/>
+          </a:prstGeom>
+          <a:noFill/>
+          <a:ln/>
+        </p:spPr>
+        <p:txBody>
+          <a:bodyPr wrap="square" lIns="0" tIns="0" rIns="0" bIns="0" rtlCol="0" anchor="ctr"/>
+          <a:lstStyle/>
+          <a:p>
+            <a:pPr algn="r" indent="0" marL="0">
+              <a:buNone/>
+            </a:pPr>
+            <a:r>
+              <a:rPr lang="en-US" sz="1000" dirty="0">
+                <a:solidFill>
+                  <a:srgbClr val="6B7280"/>
+                </a:solidFill>
+                <a:latin typeface="Calibri" pitchFamily="34" charset="0"/>
+                <a:ea typeface="Calibri" pitchFamily="34" charset="-122"/>
+                <a:cs typeface="Calibri" pitchFamily="34" charset="-120"/>
+              </a:rPr>
+              <a:t>15</a:t>
+            </a:r>
+            <a:endParaRPr lang="en-US" sz="1000" dirty="0"/>
+          </a:p>
+        </p:txBody>
+      </p:sp>
+    </p:spTree>
+  </p:cSld>
+  <p:clrMapOvr>
+    <a:masterClrMapping/>
+  </p:clrMapOvr>
+</p:sld>
+</file>
+
+<file path=ppt/slides/slide16.xml><?xml version="1.0" encoding="utf-8"?>
+<p:sld xmlns:a="http://schemas.openxmlformats.org/drawingml/2006/main" xmlns:r="http://schemas.openxmlformats.org/officeDocument/2006/relationships" xmlns:p="http://schemas.openxmlformats.org/presentationml/2006/main">
+  <p:cSld name="Slide 16">
+    <p:bg>
+      <p:bgPr>
+        <a:solidFill>
+          <a:srgbClr val="FFFFFF"/>
+        </a:solidFill>
+      </p:bgPr>
+    </p:bg>
+    <p:spTree>
+      <p:nvGrpSpPr>
+        <p:cNvPr id="1" name=""/>
+        <p:cNvGrpSpPr/>
+        <p:nvPr/>
+      </p:nvGrpSpPr>
+      <p:grpSpPr>
+        <a:xfrm>
+          <a:off x="0" y="0"/>
+          <a:ext cx="0" cy="0"/>
+          <a:chOff x="0" y="0"/>
+          <a:chExt cx="0" cy="0"/>
+        </a:xfrm>
+      </p:grpSpPr>
+      <p:sp>
+        <p:nvSpPr>
+          <p:cNvPr id="2" name="Text 0"/>
+          <p:cNvSpPr/>
+          <p:nvPr/>
+        </p:nvSpPr>
+        <p:spPr>
+          <a:xfrm>
+            <a:off x="548640" y="320040"/>
+            <a:ext cx="7315200" cy="320040"/>
+          </a:xfrm>
+          <a:prstGeom prst="rect">
+            <a:avLst/>
+          </a:prstGeom>
+          <a:noFill/>
+          <a:ln/>
+        </p:spPr>
+        <p:txBody>
+          <a:bodyPr wrap="square" lIns="0" tIns="0" rIns="0" bIns="0" rtlCol="0" anchor="ctr"/>
+          <a:lstStyle/>
+          <a:p>
+            <a:pPr indent="0" marL="0">
+              <a:buNone/>
+            </a:pPr>
+            <a:r>
+              <a:rPr lang="en-US" sz="1200" b="1" spc="200" kern="0" dirty="0">
+                <a:solidFill>
+                  <a:srgbClr val="FF4B2B"/>
+                </a:solidFill>
+                <a:latin typeface="Calibri" pitchFamily="34" charset="0"/>
+                <a:ea typeface="Calibri" pitchFamily="34" charset="-122"/>
+                <a:cs typeface="Calibri" pitchFamily="34" charset="-120"/>
+              </a:rPr>
+              <a:t>16 / TOGIKAIDRIVE-SIM/</a:t>
+            </a:r>
+            <a:endParaRPr lang="en-US" sz="1200" dirty="0"/>
+          </a:p>
+        </p:txBody>
+      </p:sp>
+      <p:sp>
+        <p:nvSpPr>
+          <p:cNvPr id="3" name="Text 1"/>
+          <p:cNvSpPr/>
+          <p:nvPr/>
+        </p:nvSpPr>
+        <p:spPr>
+          <a:xfrm>
+            <a:off x="548640" y="594360"/>
+            <a:ext cx="10515600" cy="640080"/>
+          </a:xfrm>
+          <a:prstGeom prst="rect">
+            <a:avLst/>
+          </a:prstGeom>
+          <a:noFill/>
+          <a:ln/>
+        </p:spPr>
+        <p:txBody>
+          <a:bodyPr wrap="square" lIns="0" tIns="0" rIns="0" bIns="0" rtlCol="0" anchor="ctr"/>
+          <a:lstStyle/>
+          <a:p>
+            <a:pPr indent="0" marL="0">
+              <a:buNone/>
+            </a:pPr>
+            <a:r>
+              <a:rPr lang="en-US" sz="3000" b="1" dirty="0">
+                <a:solidFill>
+                  <a:srgbClr val="16192A"/>
+                </a:solidFill>
+                <a:latin typeface="Cambria" pitchFamily="34" charset="0"/>
+                <a:ea typeface="Cambria" pitchFamily="34" charset="-122"/>
+                <a:cs typeface="Cambria" pitchFamily="34" charset="-120"/>
+              </a:rPr>
+              <a:t>togikaidrive-sim ― シミュレーターでAIを鍛える</a:t>
+            </a:r>
+            <a:endParaRPr lang="en-US" sz="3000" dirty="0"/>
+          </a:p>
+        </p:txBody>
+      </p:sp>
+      <p:sp>
+        <p:nvSpPr>
+          <p:cNvPr id="4" name="Text 2"/>
+          <p:cNvSpPr/>
+          <p:nvPr/>
+        </p:nvSpPr>
+        <p:spPr>
+          <a:xfrm>
+            <a:off x="548640" y="1600200"/>
+            <a:ext cx="10881360" cy="502920"/>
+          </a:xfrm>
+          <a:prstGeom prst="rect">
+            <a:avLst/>
+          </a:prstGeom>
+          <a:noFill/>
+          <a:ln/>
+        </p:spPr>
+        <p:txBody>
+          <a:bodyPr wrap="square" lIns="0" tIns="0" rIns="0" bIns="0" rtlCol="0" anchor="ctr"/>
+          <a:lstStyle/>
+          <a:p>
+            <a:pPr indent="0" marL="0">
+              <a:lnSpc>
+                <a:spcPct val="120000"/>
+              </a:lnSpc>
+              <a:buNone/>
+            </a:pPr>
+            <a:r>
+              <a:rPr lang="en-US" sz="1300" dirty="0">
+                <a:solidFill>
+                  <a:srgbClr val="16192A"/>
+                </a:solidFill>
+                <a:latin typeface="Calibri" pitchFamily="34" charset="0"/>
+                <a:ea typeface="Calibri" pitchFamily="34" charset="-122"/>
+                <a:cs typeface="Calibri" pitchFamily="34" charset="-120"/>
+              </a:rPr>
+              <a:t>実車を使わず、f1tenth_gym(レーシングシミュレーター)上でAIに運転を学習させる、研究レベルの高度な機能。plan="rl" で学習済みポリシーを実車に読み込める。</a:t>
+            </a:r>
+            <a:endParaRPr lang="en-US" sz="1300" dirty="0"/>
+          </a:p>
+        </p:txBody>
+      </p:sp>
+      <p:sp>
+        <p:nvSpPr>
+          <p:cNvPr id="5" name="Shape 3"/>
+          <p:cNvSpPr/>
+          <p:nvPr/>
+        </p:nvSpPr>
+        <p:spPr>
+          <a:xfrm>
+            <a:off x="586588" y="2377440"/>
+            <a:ext cx="2514600" cy="2834640"/>
+          </a:xfrm>
+          <a:prstGeom prst="roundRect">
+            <a:avLst>
+              <a:gd name="adj" fmla="val 4364"/>
+            </a:avLst>
+          </a:prstGeom>
+          <a:solidFill>
+            <a:srgbClr val="F3F5FA"/>
+          </a:solidFill>
+          <a:ln/>
+        </p:spPr>
+      </p:sp>
+      <p:sp>
+        <p:nvSpPr>
+          <p:cNvPr id="6" name="Shape 4"/>
+          <p:cNvSpPr/>
+          <p:nvPr/>
+        </p:nvSpPr>
+        <p:spPr>
+          <a:xfrm>
+            <a:off x="723748" y="2514600"/>
+            <a:ext cx="365760" cy="365760"/>
+          </a:xfrm>
+          <a:prstGeom prst="ellipse">
+            <a:avLst/>
+          </a:prstGeom>
+          <a:solidFill>
+            <a:srgbClr val="FF4B2B"/>
+          </a:solidFill>
+          <a:ln/>
+        </p:spPr>
+      </p:sp>
+      <p:sp>
+        <p:nvSpPr>
+          <p:cNvPr id="7" name="Text 5"/>
+          <p:cNvSpPr/>
+          <p:nvPr/>
+        </p:nvSpPr>
+        <p:spPr>
+          <a:xfrm>
+            <a:off x="723748" y="2514600"/>
+            <a:ext cx="365760" cy="365760"/>
+          </a:xfrm>
+          <a:prstGeom prst="rect">
+            <a:avLst/>
+          </a:prstGeom>
+          <a:noFill/>
+          <a:ln/>
+        </p:spPr>
+        <p:txBody>
+          <a:bodyPr wrap="square" lIns="0" tIns="0" rIns="0" bIns="0" rtlCol="0" anchor="ctr"/>
+          <a:lstStyle/>
+          <a:p>
+            <a:pPr algn="ctr" indent="0" marL="0">
+              <a:buNone/>
+            </a:pPr>
+            <a:r>
+              <a:rPr lang="en-US" sz="1200" b="1" dirty="0">
+                <a:solidFill>
+                  <a:srgbClr val="FFFFFF"/>
+                </a:solidFill>
+                <a:latin typeface="Calibri" pitchFamily="34" charset="0"/>
+                <a:ea typeface="Calibri" pitchFamily="34" charset="-122"/>
+                <a:cs typeface="Calibri" pitchFamily="34" charset="-120"/>
+              </a:rPr>
+              <a:t>1</a:t>
+            </a:r>
+            <a:endParaRPr lang="en-US" sz="1200" dirty="0"/>
+          </a:p>
+        </p:txBody>
+      </p:sp>
+      <p:sp>
+        <p:nvSpPr>
+          <p:cNvPr id="8" name="Shape 6"/>
+          <p:cNvSpPr/>
+          <p:nvPr/>
+        </p:nvSpPr>
+        <p:spPr>
+          <a:xfrm>
+            <a:off x="1409548" y="2994660"/>
+            <a:ext cx="868680" cy="868680"/>
+          </a:xfrm>
+          <a:prstGeom prst="ellipse">
+            <a:avLst/>
+          </a:prstGeom>
+          <a:solidFill>
+            <a:srgbClr val="E4FAFC"/>
+          </a:solidFill>
+          <a:ln/>
+        </p:spPr>
+      </p:sp>
+      <p:pic>
+        <p:nvPicPr>
+          <p:cNvPr id="9" name="Image 0" descr="preencoded.png">    </p:cNvPr>
+          <p:cNvPicPr>
+            <a:picLocks noChangeAspect="1"/>
+          </p:cNvPicPr>
+          <p:nvPr/>
+        </p:nvPicPr>
+        <p:blipFill>
+          <a:blip r:embed="rId1"/>
+          <a:stretch>
+            <a:fillRect/>
+          </a:stretch>
+        </p:blipFill>
+        <p:spPr>
+          <a:xfrm>
+            <a:off x="1618031" y="3203143"/>
+            <a:ext cx="451714" cy="451714"/>
+          </a:xfrm>
+          <a:prstGeom prst="rect">
+            <a:avLst/>
+          </a:prstGeom>
+        </p:spPr>
+      </p:pic>
+      <p:sp>
+        <p:nvSpPr>
+          <p:cNvPr id="10" name="Text 7"/>
+          <p:cNvSpPr/>
+          <p:nvPr/>
+        </p:nvSpPr>
+        <p:spPr>
+          <a:xfrm>
+            <a:off x="769468" y="3977640"/>
+            <a:ext cx="2148840" cy="320040"/>
+          </a:xfrm>
+          <a:prstGeom prst="rect">
+            <a:avLst/>
+          </a:prstGeom>
+          <a:noFill/>
+          <a:ln/>
+        </p:spPr>
+        <p:txBody>
+          <a:bodyPr wrap="square" lIns="0" tIns="0" rIns="0" bIns="0" rtlCol="0" anchor="ctr"/>
+          <a:lstStyle/>
+          <a:p>
+            <a:pPr algn="ctr" indent="0" marL="0">
+              <a:buNone/>
+            </a:pPr>
+            <a:r>
+              <a:rPr lang="en-US" sz="1400" b="1" dirty="0">
+                <a:solidFill>
+                  <a:srgbClr val="16192A"/>
+                </a:solidFill>
+                <a:latin typeface="Cambria" pitchFamily="34" charset="0"/>
+                <a:ea typeface="Cambria" pitchFamily="34" charset="-122"/>
+                <a:cs typeface="Cambria" pitchFamily="34" charset="-120"/>
+              </a:rPr>
+              <a:t>デモ収集</a:t>
+            </a:r>
+            <a:endParaRPr lang="en-US" sz="1400" dirty="0"/>
+          </a:p>
+        </p:txBody>
+      </p:sp>
+      <p:sp>
+        <p:nvSpPr>
+          <p:cNvPr id="11" name="Text 8"/>
+          <p:cNvSpPr/>
+          <p:nvPr/>
+        </p:nvSpPr>
+        <p:spPr>
+          <a:xfrm>
+            <a:off x="769468" y="4315968"/>
+            <a:ext cx="2148840" cy="777240"/>
+          </a:xfrm>
+          <a:prstGeom prst="rect">
+            <a:avLst/>
+          </a:prstGeom>
+          <a:noFill/>
+          <a:ln/>
+        </p:spPr>
+        <p:txBody>
+          <a:bodyPr wrap="square" lIns="0" tIns="0" rIns="0" bIns="0" rtlCol="0" anchor="ctr"/>
+          <a:lstStyle/>
+          <a:p>
+            <a:pPr algn="ctr" indent="0" marL="0">
+              <a:lnSpc>
+                <a:spcPct val="115000"/>
+              </a:lnSpc>
+              <a:buNone/>
+            </a:pPr>
+            <a:r>
+              <a:rPr lang="en-US" sz="950" dirty="0">
+                <a:solidFill>
+                  <a:srgbClr val="6B7280"/>
+                </a:solidFill>
+                <a:latin typeface="Calibri" pitchFamily="34" charset="0"/>
+                <a:ea typeface="Calibri" pitchFamily="34" charset="-122"/>
+                <a:cs typeface="Calibri" pitchFamily="34" charset="-120"/>
+              </a:rPr>
+              <a:t>collect_demos.py</a:t>
+            </a:r>
+            <a:endParaRPr lang="en-US" sz="950" dirty="0"/>
+          </a:p>
+          <a:p>
+            <a:pPr algn="ctr" indent="0" marL="0">
+              <a:lnSpc>
+                <a:spcPct val="115000"/>
+              </a:lnSpc>
+              <a:buNone/>
+            </a:pPr>
+            <a:r>
+              <a:rPr lang="en-US" sz="950" dirty="0">
+                <a:solidFill>
+                  <a:srgbClr val="6B7280"/>
+                </a:solidFill>
+                <a:latin typeface="Calibri" pitchFamily="34" charset="0"/>
+                <a:ea typeface="Calibri" pitchFamily="34" charset="-122"/>
+                <a:cs typeface="Calibri" pitchFamily="34" charset="-120"/>
+              </a:rPr>
+              <a:t>ルールベースplannerが</a:t>
+            </a:r>
+            <a:endParaRPr lang="en-US" sz="950" dirty="0"/>
+          </a:p>
+          <a:p>
+            <a:pPr algn="ctr" indent="0" marL="0">
+              <a:lnSpc>
+                <a:spcPct val="115000"/>
+              </a:lnSpc>
+              <a:buNone/>
+            </a:pPr>
+            <a:r>
+              <a:rPr lang="en-US" sz="950" dirty="0">
+                <a:solidFill>
+                  <a:srgbClr val="6B7280"/>
+                </a:solidFill>
+                <a:latin typeface="Calibri" pitchFamily="34" charset="0"/>
+                <a:ea typeface="Calibri" pitchFamily="34" charset="-122"/>
+                <a:cs typeface="Calibri" pitchFamily="34" charset="-120"/>
+              </a:rPr>
+              <a:t>シミュレーター内で走行</a:t>
+            </a:r>
+            <a:endParaRPr lang="en-US" sz="950" dirty="0"/>
+          </a:p>
+        </p:txBody>
+      </p:sp>
+      <p:sp>
+        <p:nvSpPr>
+          <p:cNvPr id="12" name="Text 9"/>
+          <p:cNvSpPr/>
+          <p:nvPr/>
+        </p:nvSpPr>
+        <p:spPr>
+          <a:xfrm>
+            <a:off x="3119476" y="3520440"/>
+            <a:ext cx="283464" cy="548640"/>
+          </a:xfrm>
+          <a:prstGeom prst="rect">
+            <a:avLst/>
+          </a:prstGeom>
+          <a:noFill/>
+          <a:ln/>
+        </p:spPr>
+        <p:txBody>
+          <a:bodyPr wrap="square" lIns="0" tIns="0" rIns="0" bIns="0" rtlCol="0" anchor="ctr"/>
+          <a:lstStyle/>
+          <a:p>
+            <a:pPr algn="ctr" indent="0" marL="0">
+              <a:buNone/>
+            </a:pPr>
+            <a:r>
+              <a:rPr lang="en-US" sz="2000" b="1" dirty="0">
+                <a:solidFill>
+                  <a:srgbClr val="6B7280"/>
+                </a:solidFill>
+                <a:latin typeface="Calibri" pitchFamily="34" charset="0"/>
+                <a:ea typeface="Calibri" pitchFamily="34" charset="-122"/>
+                <a:cs typeface="Calibri" pitchFamily="34" charset="-120"/>
+              </a:rPr>
+              <a:t>→</a:t>
+            </a:r>
+            <a:endParaRPr lang="en-US" sz="2000" dirty="0"/>
+          </a:p>
+        </p:txBody>
+      </p:sp>
+      <p:sp>
+        <p:nvSpPr>
+          <p:cNvPr id="13" name="Shape 10"/>
+          <p:cNvSpPr/>
+          <p:nvPr/>
+        </p:nvSpPr>
+        <p:spPr>
+          <a:xfrm>
+            <a:off x="3421228" y="2377440"/>
+            <a:ext cx="2514600" cy="2834640"/>
+          </a:xfrm>
+          <a:prstGeom prst="roundRect">
+            <a:avLst>
+              <a:gd name="adj" fmla="val 4364"/>
+            </a:avLst>
+          </a:prstGeom>
+          <a:solidFill>
+            <a:srgbClr val="F3F5FA"/>
+          </a:solidFill>
+          <a:ln/>
+        </p:spPr>
+      </p:sp>
+      <p:sp>
+        <p:nvSpPr>
+          <p:cNvPr id="14" name="Shape 11"/>
+          <p:cNvSpPr/>
+          <p:nvPr/>
+        </p:nvSpPr>
+        <p:spPr>
+          <a:xfrm>
+            <a:off x="3558388" y="2514600"/>
+            <a:ext cx="365760" cy="365760"/>
+          </a:xfrm>
+          <a:prstGeom prst="ellipse">
+            <a:avLst/>
+          </a:prstGeom>
+          <a:solidFill>
+            <a:srgbClr val="FF4B2B"/>
+          </a:solidFill>
+          <a:ln/>
+        </p:spPr>
+      </p:sp>
+      <p:sp>
+        <p:nvSpPr>
+          <p:cNvPr id="15" name="Text 12"/>
+          <p:cNvSpPr/>
+          <p:nvPr/>
+        </p:nvSpPr>
+        <p:spPr>
+          <a:xfrm>
+            <a:off x="3558388" y="2514600"/>
+            <a:ext cx="365760" cy="365760"/>
+          </a:xfrm>
+          <a:prstGeom prst="rect">
+            <a:avLst/>
+          </a:prstGeom>
+          <a:noFill/>
+          <a:ln/>
+        </p:spPr>
+        <p:txBody>
+          <a:bodyPr wrap="square" lIns="0" tIns="0" rIns="0" bIns="0" rtlCol="0" anchor="ctr"/>
+          <a:lstStyle/>
+          <a:p>
+            <a:pPr algn="ctr" indent="0" marL="0">
+              <a:buNone/>
+            </a:pPr>
+            <a:r>
+              <a:rPr lang="en-US" sz="1200" b="1" dirty="0">
+                <a:solidFill>
+                  <a:srgbClr val="FFFFFF"/>
+                </a:solidFill>
+                <a:latin typeface="Calibri" pitchFamily="34" charset="0"/>
+                <a:ea typeface="Calibri" pitchFamily="34" charset="-122"/>
+                <a:cs typeface="Calibri" pitchFamily="34" charset="-120"/>
+              </a:rPr>
+              <a:t>2</a:t>
+            </a:r>
+            <a:endParaRPr lang="en-US" sz="1200" dirty="0"/>
+          </a:p>
+        </p:txBody>
+      </p:sp>
+      <p:sp>
+        <p:nvSpPr>
+          <p:cNvPr id="16" name="Shape 13"/>
+          <p:cNvSpPr/>
+          <p:nvPr/>
+        </p:nvSpPr>
+        <p:spPr>
+          <a:xfrm>
+            <a:off x="4244188" y="2994660"/>
+            <a:ext cx="868680" cy="868680"/>
+          </a:xfrm>
+          <a:prstGeom prst="ellipse">
+            <a:avLst/>
+          </a:prstGeom>
+          <a:solidFill>
+            <a:srgbClr val="EAEEF6"/>
+          </a:solidFill>
+          <a:ln/>
+        </p:spPr>
+      </p:sp>
+      <p:pic>
+        <p:nvPicPr>
+          <p:cNvPr id="17" name="Image 1" descr="preencoded.png">    </p:cNvPr>
+          <p:cNvPicPr>
+            <a:picLocks noChangeAspect="1"/>
+          </p:cNvPicPr>
+          <p:nvPr/>
+        </p:nvPicPr>
+        <p:blipFill>
+          <a:blip r:embed="rId2"/>
+          <a:stretch>
+            <a:fillRect/>
+          </a:stretch>
+        </p:blipFill>
+        <p:spPr>
+          <a:xfrm>
+            <a:off x="4452671" y="3203143"/>
+            <a:ext cx="451714" cy="451714"/>
+          </a:xfrm>
+          <a:prstGeom prst="rect">
+            <a:avLst/>
+          </a:prstGeom>
+        </p:spPr>
+      </p:pic>
+      <p:sp>
+        <p:nvSpPr>
+          <p:cNvPr id="18" name="Text 14"/>
+          <p:cNvSpPr/>
+          <p:nvPr/>
+        </p:nvSpPr>
+        <p:spPr>
+          <a:xfrm>
+            <a:off x="3604108" y="3977640"/>
+            <a:ext cx="2148840" cy="320040"/>
+          </a:xfrm>
+          <a:prstGeom prst="rect">
+            <a:avLst/>
+          </a:prstGeom>
+          <a:noFill/>
+          <a:ln/>
+        </p:spPr>
+        <p:txBody>
+          <a:bodyPr wrap="square" lIns="0" tIns="0" rIns="0" bIns="0" rtlCol="0" anchor="ctr"/>
+          <a:lstStyle/>
+          <a:p>
+            <a:pPr algn="ctr" indent="0" marL="0">
+              <a:buNone/>
+            </a:pPr>
+            <a:r>
+              <a:rPr lang="en-US" sz="1400" b="1" dirty="0">
+                <a:solidFill>
+                  <a:srgbClr val="16192A"/>
+                </a:solidFill>
+                <a:latin typeface="Cambria" pitchFamily="34" charset="0"/>
+                <a:ea typeface="Cambria" pitchFamily="34" charset="-122"/>
+                <a:cs typeface="Cambria" pitchFamily="34" charset="-120"/>
+              </a:rPr>
+              <a:t>事前学習</a:t>
+            </a:r>
+            <a:endParaRPr lang="en-US" sz="1400" dirty="0"/>
+          </a:p>
+        </p:txBody>
+      </p:sp>
+      <p:sp>
+        <p:nvSpPr>
+          <p:cNvPr id="19" name="Text 15"/>
+          <p:cNvSpPr/>
+          <p:nvPr/>
+        </p:nvSpPr>
+        <p:spPr>
+          <a:xfrm>
+            <a:off x="3604108" y="4315968"/>
+            <a:ext cx="2148840" cy="777240"/>
+          </a:xfrm>
+          <a:prstGeom prst="rect">
+            <a:avLst/>
+          </a:prstGeom>
+          <a:noFill/>
+          <a:ln/>
+        </p:spPr>
+        <p:txBody>
+          <a:bodyPr wrap="square" lIns="0" tIns="0" rIns="0" bIns="0" rtlCol="0" anchor="ctr"/>
+          <a:lstStyle/>
+          <a:p>
+            <a:pPr algn="ctr" indent="0" marL="0">
+              <a:lnSpc>
+                <a:spcPct val="115000"/>
+              </a:lnSpc>
+              <a:buNone/>
+            </a:pPr>
+            <a:r>
+              <a:rPr lang="en-US" sz="950" dirty="0">
+                <a:solidFill>
+                  <a:srgbClr val="6B7280"/>
+                </a:solidFill>
+                <a:latin typeface="Calibri" pitchFamily="34" charset="0"/>
+                <a:ea typeface="Calibri" pitchFamily="34" charset="-122"/>
+                <a:cs typeface="Calibri" pitchFamily="34" charset="-120"/>
+              </a:rPr>
+              <a:t>pretrain_bc.py</a:t>
+            </a:r>
+            <a:endParaRPr lang="en-US" sz="950" dirty="0"/>
+          </a:p>
+          <a:p>
+            <a:pPr algn="ctr" indent="0" marL="0">
+              <a:lnSpc>
+                <a:spcPct val="115000"/>
+              </a:lnSpc>
+              <a:buNone/>
+            </a:pPr>
+            <a:r>
+              <a:rPr lang="en-US" sz="950" dirty="0">
+                <a:solidFill>
+                  <a:srgbClr val="6B7280"/>
+                </a:solidFill>
+                <a:latin typeface="Calibri" pitchFamily="34" charset="0"/>
+                <a:ea typeface="Calibri" pitchFamily="34" charset="-122"/>
+                <a:cs typeface="Calibri" pitchFamily="34" charset="-120"/>
+              </a:rPr>
+              <a:t>模倣学習(Behavioral</a:t>
+            </a:r>
+            <a:endParaRPr lang="en-US" sz="950" dirty="0"/>
+          </a:p>
+          <a:p>
+            <a:pPr algn="ctr" indent="0" marL="0">
+              <a:lnSpc>
+                <a:spcPct val="115000"/>
+              </a:lnSpc>
+              <a:buNone/>
+            </a:pPr>
+            <a:r>
+              <a:rPr lang="en-US" sz="950" dirty="0">
+                <a:solidFill>
+                  <a:srgbClr val="6B7280"/>
+                </a:solidFill>
+                <a:latin typeface="Calibri" pitchFamily="34" charset="0"/>
+                <a:ea typeface="Calibri" pitchFamily="34" charset="-122"/>
+                <a:cs typeface="Calibri" pitchFamily="34" charset="-120"/>
+              </a:rPr>
+              <a:t>Cloning)で土台を作る</a:t>
+            </a:r>
+            <a:endParaRPr lang="en-US" sz="950" dirty="0"/>
+          </a:p>
+        </p:txBody>
+      </p:sp>
+      <p:sp>
+        <p:nvSpPr>
+          <p:cNvPr id="20" name="Text 16"/>
+          <p:cNvSpPr/>
+          <p:nvPr/>
+        </p:nvSpPr>
+        <p:spPr>
+          <a:xfrm>
+            <a:off x="5954116" y="3520440"/>
+            <a:ext cx="283464" cy="548640"/>
+          </a:xfrm>
+          <a:prstGeom prst="rect">
+            <a:avLst/>
+          </a:prstGeom>
+          <a:noFill/>
+          <a:ln/>
+        </p:spPr>
+        <p:txBody>
+          <a:bodyPr wrap="square" lIns="0" tIns="0" rIns="0" bIns="0" rtlCol="0" anchor="ctr"/>
+          <a:lstStyle/>
+          <a:p>
+            <a:pPr algn="ctr" indent="0" marL="0">
+              <a:buNone/>
+            </a:pPr>
+            <a:r>
+              <a:rPr lang="en-US" sz="2000" b="1" dirty="0">
+                <a:solidFill>
+                  <a:srgbClr val="6B7280"/>
+                </a:solidFill>
+                <a:latin typeface="Calibri" pitchFamily="34" charset="0"/>
+                <a:ea typeface="Calibri" pitchFamily="34" charset="-122"/>
+                <a:cs typeface="Calibri" pitchFamily="34" charset="-120"/>
+              </a:rPr>
+              <a:t>→</a:t>
+            </a:r>
+            <a:endParaRPr lang="en-US" sz="2000" dirty="0"/>
+          </a:p>
+        </p:txBody>
+      </p:sp>
+      <p:sp>
+        <p:nvSpPr>
+          <p:cNvPr id="21" name="Shape 17"/>
+          <p:cNvSpPr/>
+          <p:nvPr/>
+        </p:nvSpPr>
+        <p:spPr>
+          <a:xfrm>
+            <a:off x="6255868" y="2377440"/>
+            <a:ext cx="2514600" cy="2834640"/>
+          </a:xfrm>
+          <a:prstGeom prst="roundRect">
+            <a:avLst>
+              <a:gd name="adj" fmla="val 4364"/>
+            </a:avLst>
+          </a:prstGeom>
+          <a:solidFill>
+            <a:srgbClr val="F3F5FA"/>
+          </a:solidFill>
+          <a:ln/>
+        </p:spPr>
+      </p:sp>
+      <p:sp>
+        <p:nvSpPr>
+          <p:cNvPr id="22" name="Shape 18"/>
+          <p:cNvSpPr/>
+          <p:nvPr/>
+        </p:nvSpPr>
+        <p:spPr>
+          <a:xfrm>
+            <a:off x="6393028" y="2514600"/>
+            <a:ext cx="365760" cy="365760"/>
+          </a:xfrm>
+          <a:prstGeom prst="ellipse">
+            <a:avLst/>
+          </a:prstGeom>
+          <a:solidFill>
+            <a:srgbClr val="FF4B2B"/>
+          </a:solidFill>
+          <a:ln/>
+        </p:spPr>
+      </p:sp>
+      <p:sp>
+        <p:nvSpPr>
+          <p:cNvPr id="23" name="Text 19"/>
+          <p:cNvSpPr/>
+          <p:nvPr/>
+        </p:nvSpPr>
+        <p:spPr>
+          <a:xfrm>
+            <a:off x="6393028" y="2514600"/>
+            <a:ext cx="365760" cy="365760"/>
+          </a:xfrm>
+          <a:prstGeom prst="rect">
+            <a:avLst/>
+          </a:prstGeom>
+          <a:noFill/>
+          <a:ln/>
+        </p:spPr>
+        <p:txBody>
+          <a:bodyPr wrap="square" lIns="0" tIns="0" rIns="0" bIns="0" rtlCol="0" anchor="ctr"/>
+          <a:lstStyle/>
+          <a:p>
+            <a:pPr algn="ctr" indent="0" marL="0">
+              <a:buNone/>
+            </a:pPr>
+            <a:r>
+              <a:rPr lang="en-US" sz="1200" b="1" dirty="0">
+                <a:solidFill>
+                  <a:srgbClr val="FFFFFF"/>
+                </a:solidFill>
+                <a:latin typeface="Calibri" pitchFamily="34" charset="0"/>
+                <a:ea typeface="Calibri" pitchFamily="34" charset="-122"/>
+                <a:cs typeface="Calibri" pitchFamily="34" charset="-120"/>
+              </a:rPr>
+              <a:t>3</a:t>
+            </a:r>
+            <a:endParaRPr lang="en-US" sz="1200" dirty="0"/>
+          </a:p>
+        </p:txBody>
+      </p:sp>
+      <p:sp>
+        <p:nvSpPr>
+          <p:cNvPr id="24" name="Shape 20"/>
+          <p:cNvSpPr/>
+          <p:nvPr/>
+        </p:nvSpPr>
+        <p:spPr>
+          <a:xfrm>
+            <a:off x="7078828" y="2994660"/>
+            <a:ext cx="868680" cy="868680"/>
+          </a:xfrm>
+          <a:prstGeom prst="ellipse">
+            <a:avLst/>
+          </a:prstGeom>
+          <a:solidFill>
+            <a:srgbClr val="FFEDE9"/>
+          </a:solidFill>
+          <a:ln/>
+        </p:spPr>
+      </p:sp>
+      <p:pic>
+        <p:nvPicPr>
+          <p:cNvPr id="25" name="Image 2" descr="preencoded.png">    </p:cNvPr>
+          <p:cNvPicPr>
+            <a:picLocks noChangeAspect="1"/>
+          </p:cNvPicPr>
+          <p:nvPr/>
+        </p:nvPicPr>
+        <p:blipFill>
+          <a:blip r:embed="rId3"/>
+          <a:stretch>
+            <a:fillRect/>
+          </a:stretch>
+        </p:blipFill>
+        <p:spPr>
+          <a:xfrm>
+            <a:off x="7287311" y="3203143"/>
+            <a:ext cx="451714" cy="451714"/>
+          </a:xfrm>
+          <a:prstGeom prst="rect">
+            <a:avLst/>
+          </a:prstGeom>
+        </p:spPr>
+      </p:pic>
+      <p:sp>
+        <p:nvSpPr>
+          <p:cNvPr id="26" name="Text 21"/>
+          <p:cNvSpPr/>
+          <p:nvPr/>
+        </p:nvSpPr>
+        <p:spPr>
+          <a:xfrm>
+            <a:off x="6438748" y="3977640"/>
+            <a:ext cx="2148840" cy="320040"/>
+          </a:xfrm>
+          <a:prstGeom prst="rect">
+            <a:avLst/>
+          </a:prstGeom>
+          <a:noFill/>
+          <a:ln/>
+        </p:spPr>
+        <p:txBody>
+          <a:bodyPr wrap="square" lIns="0" tIns="0" rIns="0" bIns="0" rtlCol="0" anchor="ctr"/>
+          <a:lstStyle/>
+          <a:p>
+            <a:pPr algn="ctr" indent="0" marL="0">
+              <a:buNone/>
+            </a:pPr>
+            <a:r>
+              <a:rPr lang="en-US" sz="1400" b="1" dirty="0">
+                <a:solidFill>
+                  <a:srgbClr val="16192A"/>
+                </a:solidFill>
+                <a:latin typeface="Cambria" pitchFamily="34" charset="0"/>
+                <a:ea typeface="Cambria" pitchFamily="34" charset="-122"/>
+                <a:cs typeface="Cambria" pitchFamily="34" charset="-120"/>
+              </a:rPr>
+              <a:t>強化学習</a:t>
+            </a:r>
+            <a:endParaRPr lang="en-US" sz="1400" dirty="0"/>
+          </a:p>
+        </p:txBody>
+      </p:sp>
+      <p:sp>
+        <p:nvSpPr>
+          <p:cNvPr id="27" name="Text 22"/>
+          <p:cNvSpPr/>
+          <p:nvPr/>
+        </p:nvSpPr>
+        <p:spPr>
+          <a:xfrm>
+            <a:off x="6438748" y="4315968"/>
+            <a:ext cx="2148840" cy="777240"/>
+          </a:xfrm>
+          <a:prstGeom prst="rect">
+            <a:avLst/>
+          </a:prstGeom>
+          <a:noFill/>
+          <a:ln/>
+        </p:spPr>
+        <p:txBody>
+          <a:bodyPr wrap="square" lIns="0" tIns="0" rIns="0" bIns="0" rtlCol="0" anchor="ctr"/>
+          <a:lstStyle/>
+          <a:p>
+            <a:pPr algn="ctr" indent="0" marL="0">
+              <a:lnSpc>
+                <a:spcPct val="115000"/>
+              </a:lnSpc>
+              <a:buNone/>
+            </a:pPr>
+            <a:r>
+              <a:rPr lang="en-US" sz="950" dirty="0">
+                <a:solidFill>
+                  <a:srgbClr val="6B7280"/>
+                </a:solidFill>
+                <a:latin typeface="Calibri" pitchFamily="34" charset="0"/>
+                <a:ea typeface="Calibri" pitchFamily="34" charset="-122"/>
+                <a:cs typeface="Calibri" pitchFamily="34" charset="-120"/>
+              </a:rPr>
+              <a:t>train_rl.py</a:t>
+            </a:r>
+            <a:endParaRPr lang="en-US" sz="950" dirty="0"/>
+          </a:p>
+          <a:p>
+            <a:pPr algn="ctr" indent="0" marL="0">
+              <a:lnSpc>
+                <a:spcPct val="115000"/>
+              </a:lnSpc>
+              <a:buNone/>
+            </a:pPr>
+            <a:r>
+              <a:rPr lang="en-US" sz="950" dirty="0">
+                <a:solidFill>
+                  <a:srgbClr val="6B7280"/>
+                </a:solidFill>
+                <a:latin typeface="Calibri" pitchFamily="34" charset="0"/>
+                <a:ea typeface="Calibri" pitchFamily="34" charset="-122"/>
+                <a:cs typeface="Calibri" pitchFamily="34" charset="-120"/>
+              </a:rPr>
+              <a:t>SAC/PPO/TD3で</a:t>
+            </a:r>
+            <a:endParaRPr lang="en-US" sz="950" dirty="0"/>
+          </a:p>
+          <a:p>
+            <a:pPr algn="ctr" indent="0" marL="0">
+              <a:lnSpc>
+                <a:spcPct val="115000"/>
+              </a:lnSpc>
+              <a:buNone/>
+            </a:pPr>
+            <a:r>
+              <a:rPr lang="en-US" sz="950" dirty="0">
+                <a:solidFill>
+                  <a:srgbClr val="6B7280"/>
+                </a:solidFill>
+                <a:latin typeface="Calibri" pitchFamily="34" charset="0"/>
+                <a:ea typeface="Calibri" pitchFamily="34" charset="-122"/>
+                <a:cs typeface="Calibri" pitchFamily="34" charset="-120"/>
+              </a:rPr>
+              <a:t>ポリシーを磨き込む</a:t>
+            </a:r>
+            <a:endParaRPr lang="en-US" sz="950" dirty="0"/>
+          </a:p>
+        </p:txBody>
+      </p:sp>
+      <p:sp>
+        <p:nvSpPr>
+          <p:cNvPr id="28" name="Text 23"/>
+          <p:cNvSpPr/>
+          <p:nvPr/>
+        </p:nvSpPr>
+        <p:spPr>
+          <a:xfrm>
+            <a:off x="8788756" y="3520440"/>
+            <a:ext cx="283464" cy="548640"/>
+          </a:xfrm>
+          <a:prstGeom prst="rect">
+            <a:avLst/>
+          </a:prstGeom>
+          <a:noFill/>
+          <a:ln/>
+        </p:spPr>
+        <p:txBody>
+          <a:bodyPr wrap="square" lIns="0" tIns="0" rIns="0" bIns="0" rtlCol="0" anchor="ctr"/>
+          <a:lstStyle/>
+          <a:p>
+            <a:pPr algn="ctr" indent="0" marL="0">
+              <a:buNone/>
+            </a:pPr>
+            <a:r>
+              <a:rPr lang="en-US" sz="2000" b="1" dirty="0">
+                <a:solidFill>
+                  <a:srgbClr val="6B7280"/>
+                </a:solidFill>
+                <a:latin typeface="Calibri" pitchFamily="34" charset="0"/>
+                <a:ea typeface="Calibri" pitchFamily="34" charset="-122"/>
+                <a:cs typeface="Calibri" pitchFamily="34" charset="-120"/>
+              </a:rPr>
+              <a:t>→</a:t>
+            </a:r>
+            <a:endParaRPr lang="en-US" sz="2000" dirty="0"/>
+          </a:p>
+        </p:txBody>
+      </p:sp>
+      <p:sp>
+        <p:nvSpPr>
+          <p:cNvPr id="29" name="Shape 24"/>
+          <p:cNvSpPr/>
+          <p:nvPr/>
+        </p:nvSpPr>
+        <p:spPr>
+          <a:xfrm>
+            <a:off x="9090508" y="2377440"/>
+            <a:ext cx="2514600" cy="2834640"/>
+          </a:xfrm>
+          <a:prstGeom prst="roundRect">
+            <a:avLst>
+              <a:gd name="adj" fmla="val 4364"/>
+            </a:avLst>
+          </a:prstGeom>
+          <a:solidFill>
+            <a:srgbClr val="F3F5FA"/>
+          </a:solidFill>
+          <a:ln/>
+        </p:spPr>
+      </p:sp>
+      <p:sp>
+        <p:nvSpPr>
+          <p:cNvPr id="30" name="Shape 25"/>
+          <p:cNvSpPr/>
+          <p:nvPr/>
+        </p:nvSpPr>
+        <p:spPr>
+          <a:xfrm>
+            <a:off x="9227668" y="2514600"/>
+            <a:ext cx="365760" cy="365760"/>
+          </a:xfrm>
+          <a:prstGeom prst="ellipse">
+            <a:avLst/>
+          </a:prstGeom>
+          <a:solidFill>
+            <a:srgbClr val="FF4B2B"/>
+          </a:solidFill>
+          <a:ln/>
+        </p:spPr>
+      </p:sp>
+      <p:sp>
+        <p:nvSpPr>
+          <p:cNvPr id="31" name="Text 26"/>
+          <p:cNvSpPr/>
+          <p:nvPr/>
+        </p:nvSpPr>
+        <p:spPr>
+          <a:xfrm>
+            <a:off x="9227668" y="2514600"/>
+            <a:ext cx="365760" cy="365760"/>
+          </a:xfrm>
+          <a:prstGeom prst="rect">
+            <a:avLst/>
+          </a:prstGeom>
+          <a:noFill/>
+          <a:ln/>
+        </p:spPr>
+        <p:txBody>
+          <a:bodyPr wrap="square" lIns="0" tIns="0" rIns="0" bIns="0" rtlCol="0" anchor="ctr"/>
+          <a:lstStyle/>
+          <a:p>
+            <a:pPr algn="ctr" indent="0" marL="0">
+              <a:buNone/>
+            </a:pPr>
+            <a:r>
+              <a:rPr lang="en-US" sz="1200" b="1" dirty="0">
+                <a:solidFill>
+                  <a:srgbClr val="FFFFFF"/>
+                </a:solidFill>
+                <a:latin typeface="Calibri" pitchFamily="34" charset="0"/>
+                <a:ea typeface="Calibri" pitchFamily="34" charset="-122"/>
+                <a:cs typeface="Calibri" pitchFamily="34" charset="-120"/>
+              </a:rPr>
+              <a:t>4</a:t>
+            </a:r>
+            <a:endParaRPr lang="en-US" sz="1200" dirty="0"/>
+          </a:p>
+        </p:txBody>
+      </p:sp>
+      <p:sp>
+        <p:nvSpPr>
+          <p:cNvPr id="32" name="Shape 27"/>
+          <p:cNvSpPr/>
+          <p:nvPr/>
+        </p:nvSpPr>
+        <p:spPr>
+          <a:xfrm>
+            <a:off x="9913468" y="2994660"/>
+            <a:ext cx="868680" cy="868680"/>
+          </a:xfrm>
+          <a:prstGeom prst="ellipse">
+            <a:avLst/>
+          </a:prstGeom>
+          <a:solidFill>
+            <a:srgbClr val="E4FAFC"/>
+          </a:solidFill>
+          <a:ln/>
+        </p:spPr>
+      </p:sp>
+      <p:pic>
+        <p:nvPicPr>
+          <p:cNvPr id="33" name="Image 3" descr="preencoded.png">    </p:cNvPr>
+          <p:cNvPicPr>
+            <a:picLocks noChangeAspect="1"/>
+          </p:cNvPicPr>
+          <p:nvPr/>
+        </p:nvPicPr>
+        <p:blipFill>
+          <a:blip r:embed="rId4"/>
+          <a:stretch>
+            <a:fillRect/>
+          </a:stretch>
+        </p:blipFill>
+        <p:spPr>
+          <a:xfrm>
+            <a:off x="10121951" y="3203143"/>
+            <a:ext cx="451714" cy="451714"/>
+          </a:xfrm>
+          <a:prstGeom prst="rect">
+            <a:avLst/>
+          </a:prstGeom>
+        </p:spPr>
+      </p:pic>
+      <p:sp>
+        <p:nvSpPr>
+          <p:cNvPr id="34" name="Text 28"/>
+          <p:cNvSpPr/>
+          <p:nvPr/>
+        </p:nvSpPr>
+        <p:spPr>
+          <a:xfrm>
+            <a:off x="9273388" y="3977640"/>
+            <a:ext cx="2148840" cy="320040"/>
+          </a:xfrm>
+          <a:prstGeom prst="rect">
+            <a:avLst/>
+          </a:prstGeom>
+          <a:noFill/>
+          <a:ln/>
+        </p:spPr>
+        <p:txBody>
+          <a:bodyPr wrap="square" lIns="0" tIns="0" rIns="0" bIns="0" rtlCol="0" anchor="ctr"/>
+          <a:lstStyle/>
+          <a:p>
+            <a:pPr algn="ctr" indent="0" marL="0">
+              <a:buNone/>
+            </a:pPr>
+            <a:r>
+              <a:rPr lang="en-US" sz="1400" b="1" dirty="0">
+                <a:solidFill>
+                  <a:srgbClr val="16192A"/>
+                </a:solidFill>
+                <a:latin typeface="Cambria" pitchFamily="34" charset="0"/>
+                <a:ea typeface="Cambria" pitchFamily="34" charset="-122"/>
+                <a:cs typeface="Cambria" pitchFamily="34" charset="-120"/>
+              </a:rPr>
+              <a:t>実車で使用</a:t>
+            </a:r>
+            <a:endParaRPr lang="en-US" sz="1400" dirty="0"/>
+          </a:p>
+        </p:txBody>
+      </p:sp>
+      <p:sp>
+        <p:nvSpPr>
+          <p:cNvPr id="35" name="Text 29"/>
+          <p:cNvSpPr/>
+          <p:nvPr/>
+        </p:nvSpPr>
+        <p:spPr>
+          <a:xfrm>
+            <a:off x="9273388" y="4315968"/>
+            <a:ext cx="2148840" cy="777240"/>
+          </a:xfrm>
+          <a:prstGeom prst="rect">
+            <a:avLst/>
+          </a:prstGeom>
+          <a:noFill/>
+          <a:ln/>
+        </p:spPr>
+        <p:txBody>
+          <a:bodyPr wrap="square" lIns="0" tIns="0" rIns="0" bIns="0" rtlCol="0" anchor="ctr"/>
+          <a:lstStyle/>
+          <a:p>
+            <a:pPr algn="ctr" indent="0" marL="0">
+              <a:lnSpc>
+                <a:spcPct val="115000"/>
+              </a:lnSpc>
+              <a:buNone/>
+            </a:pPr>
+            <a:r>
+              <a:rPr lang="en-US" sz="950" dirty="0">
+                <a:solidFill>
+                  <a:srgbClr val="6B7280"/>
+                </a:solidFill>
+                <a:latin typeface="Calibri" pitchFamily="34" charset="0"/>
+                <a:ea typeface="Calibri" pitchFamily="34" charset="-122"/>
+                <a:cs typeface="Calibri" pitchFamily="34" charset="-120"/>
+              </a:rPr>
+              <a:t>enjoy_rl.py で評価、</a:t>
+            </a:r>
+            <a:endParaRPr lang="en-US" sz="950" dirty="0"/>
+          </a:p>
+          <a:p>
+            <a:pPr algn="ctr" indent="0" marL="0">
+              <a:lnSpc>
+                <a:spcPct val="115000"/>
+              </a:lnSpc>
+              <a:buNone/>
+            </a:pPr>
+            <a:r>
+              <a:rPr lang="en-US" sz="950" dirty="0">
+                <a:solidFill>
+                  <a:srgbClr val="6B7280"/>
+                </a:solidFill>
+                <a:latin typeface="Calibri" pitchFamily="34" charset="0"/>
+                <a:ea typeface="Calibri" pitchFamily="34" charset="-122"/>
+                <a:cs typeface="Calibri" pitchFamily="34" charset="-120"/>
+              </a:rPr>
+              <a:t>plan="rl" で実車に</a:t>
+            </a:r>
+            <a:endParaRPr lang="en-US" sz="950" dirty="0"/>
+          </a:p>
+          <a:p>
+            <a:pPr algn="ctr" indent="0" marL="0">
+              <a:lnSpc>
+                <a:spcPct val="115000"/>
+              </a:lnSpc>
+              <a:buNone/>
+            </a:pPr>
+            <a:r>
+              <a:rPr lang="en-US" sz="950" dirty="0">
+                <a:solidFill>
+                  <a:srgbClr val="6B7280"/>
+                </a:solidFill>
+                <a:latin typeface="Calibri" pitchFamily="34" charset="0"/>
+                <a:ea typeface="Calibri" pitchFamily="34" charset="-122"/>
+                <a:cs typeface="Calibri" pitchFamily="34" charset="-120"/>
+              </a:rPr>
+              <a:t>読み込んで走行</a:t>
+            </a:r>
+            <a:endParaRPr lang="en-US" sz="950" dirty="0"/>
+          </a:p>
+        </p:txBody>
+      </p:sp>
+      <p:sp>
+        <p:nvSpPr>
+          <p:cNvPr id="36" name="Shape 30"/>
+          <p:cNvSpPr/>
+          <p:nvPr/>
+        </p:nvSpPr>
+        <p:spPr>
+          <a:xfrm>
+            <a:off x="586588" y="5486400"/>
+            <a:ext cx="11018520" cy="502920"/>
+          </a:xfrm>
+          <a:prstGeom prst="roundRect">
+            <a:avLst>
+              <a:gd name="adj" fmla="val 14545"/>
+            </a:avLst>
+          </a:prstGeom>
+          <a:solidFill>
+            <a:srgbClr val="10131A"/>
+          </a:solidFill>
+          <a:ln/>
+        </p:spPr>
+      </p:sp>
+      <p:sp>
+        <p:nvSpPr>
+          <p:cNvPr id="37" name="Text 31"/>
+          <p:cNvSpPr/>
+          <p:nvPr/>
+        </p:nvSpPr>
+        <p:spPr>
+          <a:xfrm>
+            <a:off x="815188" y="5486400"/>
+            <a:ext cx="10561320" cy="502920"/>
+          </a:xfrm>
+          <a:prstGeom prst="rect">
+            <a:avLst/>
+          </a:prstGeom>
+          <a:noFill/>
+          <a:ln/>
+        </p:spPr>
+        <p:txBody>
+          <a:bodyPr wrap="square" lIns="0" tIns="0" rIns="0" bIns="0" rtlCol="0" anchor="ctr"/>
+          <a:lstStyle/>
+          <a:p>
+            <a:pPr indent="0" marL="0">
+              <a:buNone/>
+            </a:pPr>
+            <a:r>
+              <a:rPr lang="en-US" sz="1000" dirty="0">
+                <a:solidFill>
+                  <a:srgbClr val="C7CEDE"/>
+                </a:solidFill>
+                <a:latin typeface="Calibri" pitchFamily="34" charset="0"/>
+                <a:ea typeface="Calibri" pitchFamily="34" charset="-122"/>
+                <a:cs typeface="Calibri" pitchFamily="34" charset="-120"/>
+              </a:rPr>
+              <a:t>💡 観測はLiDAR108本(ダウンサンプリング済み)+速度の計109次元ベクトル。実車と同じLiDAR構成なら、シムで学習したポリシーがそのまま活きる</a:t>
+            </a:r>
+            <a:endParaRPr lang="en-US" sz="1000" dirty="0"/>
+          </a:p>
+        </p:txBody>
+      </p:sp>
+      <p:sp>
+        <p:nvSpPr>
+          <p:cNvPr id="38" name="Text 32"/>
+          <p:cNvSpPr/>
+          <p:nvPr/>
+        </p:nvSpPr>
+        <p:spPr>
+          <a:xfrm>
+            <a:off x="11521440" y="6446520"/>
+            <a:ext cx="548640" cy="274320"/>
+          </a:xfrm>
+          <a:prstGeom prst="rect">
+            <a:avLst/>
+          </a:prstGeom>
+          <a:noFill/>
+          <a:ln/>
+        </p:spPr>
+        <p:txBody>
+          <a:bodyPr wrap="square" lIns="0" tIns="0" rIns="0" bIns="0" rtlCol="0" anchor="ctr"/>
+          <a:lstStyle/>
+          <a:p>
+            <a:pPr algn="r" indent="0" marL="0">
+              <a:buNone/>
+            </a:pPr>
+            <a:r>
+              <a:rPr lang="en-US" sz="1000" dirty="0">
+                <a:solidFill>
+                  <a:srgbClr val="6B7280"/>
+                </a:solidFill>
+                <a:latin typeface="Calibri" pitchFamily="34" charset="0"/>
+                <a:ea typeface="Calibri" pitchFamily="34" charset="-122"/>
+                <a:cs typeface="Calibri" pitchFamily="34" charset="-120"/>
+              </a:rPr>
+              <a:t>16</a:t>
+            </a:r>
+            <a:endParaRPr lang="en-US" sz="1000" dirty="0"/>
+          </a:p>
+        </p:txBody>
+      </p:sp>
+    </p:spTree>
+  </p:cSld>
+  <p:clrMapOvr>
+    <a:masterClrMapping/>
+  </p:clrMapOvr>
+</p:sld>
+</file>
+
+<file path=ppt/slides/slide17.xml><?xml version="1.0" encoding="utf-8"?>
+<p:sld xmlns:a="http://schemas.openxmlformats.org/drawingml/2006/main" xmlns:r="http://schemas.openxmlformats.org/officeDocument/2006/relationships" xmlns:p="http://schemas.openxmlformats.org/presentationml/2006/main">
+  <p:cSld name="Slide 17">
     <p:bg>
       <p:bgPr>
         <a:solidFill>
@@ -4110,7 +11086,7 @@
                 <a:ea typeface="Calibri" pitchFamily="34" charset="-122"/>
                 <a:cs typeface="Calibri" pitchFamily="34" charset="-120"/>
               </a:rPr>
-              <a:t>11</a:t>
+              <a:t>17</a:t>
             </a:r>
             <a:endParaRPr lang="en-US" sz="1000" dirty="0"/>
           </a:p>
@@ -10583,7 +17559,7 @@
                 <a:ea typeface="Calibri" pitchFamily="34" charset="-122"/>
                 <a:cs typeface="Calibri" pitchFamily="34" charset="-120"/>
               </a:rPr>
-              <a:t>03 / ULTRASONIC.PY・CAMERA.PY・LIDAR.PY</a:t>
+              <a:t>03 / ULTRASONIC.PY / CAMERA.PY / LIDAR.PY</a:t>
             </a:r>
             <a:endParaRPr lang="en-US" sz="1200" dirty="0"/>
           </a:p>
